--- a/Notes/Mina_Meeting_Slides_2026-09-23.pptx
+++ b/Notes/Mina_Meeting_Slides_2026-09-23.pptx
@@ -5,14 +5,14 @@
     <p:sldMasterId id="2147483648" r:id="rId1"/>
   </p:sldMasterIdLst>
   <p:notesMasterIdLst>
-    <p:notesMasterId r:id="rId6"/>
+    <p:notesMasterId r:id="rId7"/>
   </p:notesMasterIdLst>
   <p:sldIdLst>
     <p:sldId id="256" r:id="rId2"/>
     <p:sldId id="257" r:id="rId3"/>
     <p:sldId id="258" r:id="rId4"/>
-    <p:sldId id="260" r:id="rId11"/>
-    <p:sldId id="259" r:id="rId5"/>
+    <p:sldId id="260" r:id="rId5"/>
+    <p:sldId id="259" r:id="rId6"/>
   </p:sldIdLst>
   <p:sldSz cx="12192000" cy="6858000"/>
   <p:notesSz cx="6858000" cy="12192000"/>
@@ -1526,7 +1526,7 @@
                 <a:ea typeface="Calibri" pitchFamily="34" charset="-122"/>
                 <a:cs typeface="Calibri" pitchFamily="34" charset="-120"/>
               </a:rPr>
-              <a:t>Status: Stage 1 substantially complete. RNA and protein encoders embedded, validated, and analyzed across probing, CKA (final layer and full layer-wise breakdown), CCA, cross-modal retrieval, and UMAP.</a:t>
+              <a:t>Status: Stage 1 complete. RNA and protein encoders embedded, validated, and analyzed across probing (including codon usage bias and secondary structure), CKA, CCA, cross-modal retrieval, UMAP, and attention-motif interpretability. Now moving into Stage 2.</a:t>
             </a:r>
             <a:endParaRPr lang="en-US" sz="1200" dirty="0"/>
           </a:p>
@@ -1573,6 +1573,7 @@
           <a:lstStyle/>
           <a:p>
             <a:pPr algn="ctr"/>
+            <a:endParaRPr/>
           </a:p>
         </p:txBody>
       </p:sp>
@@ -1652,19 +1653,20 @@
           <a:lstStyle/>
           <a:p>
             <a:pPr algn="ctr"/>
-          </a:p>
-        </p:txBody>
-      </p:sp>
-      <p:sp>
-        <p:nvSpPr>
-          <p:cNvPr id="32" name="TextBox 31"/>
+            <a:endParaRPr/>
+          </a:p>
+        </p:txBody>
+      </p:sp>
+      <p:sp>
+        <p:nvSpPr>
+          <p:cNvPr id="33" name="TextBox 32"/>
           <p:cNvSpPr txBox="1"/>
           <p:nvPr/>
         </p:nvSpPr>
         <p:spPr>
           <a:xfrm>
             <a:off x="640080" y="3063240"/>
-            <a:ext cx="2542032" cy="274320"/>
+            <a:ext cx="2542032" cy="457200"/>
           </a:xfrm>
           <a:prstGeom prst="rect">
             <a:avLst/>
@@ -1679,41 +1681,6 @@
           <a:p>
             <a:pPr algn="l"/>
             <a:r>
-              <a:rPr sz="1000" b="1" i="0">
-                <a:solidFill>
-                  <a:srgbClr val="2C5F2D"/>
-                </a:solidFill>
-                <a:latin typeface="Calibri"/>
-              </a:rPr>
-              <a:t>CURRENT</a:t>
-            </a:r>
-          </a:p>
-        </p:txBody>
-      </p:sp>
-      <p:sp>
-        <p:nvSpPr>
-          <p:cNvPr id="33" name="TextBox 32"/>
-          <p:cNvSpPr txBox="1"/>
-          <p:nvPr/>
-        </p:nvSpPr>
-        <p:spPr>
-          <a:xfrm>
-            <a:off x="640080" y="3355848"/>
-            <a:ext cx="2542032" cy="457200"/>
-          </a:xfrm>
-          <a:prstGeom prst="rect">
-            <a:avLst/>
-          </a:prstGeom>
-          <a:noFill/>
-        </p:spPr>
-        <p:txBody>
-          <a:bodyPr wrap="square">
-            <a:spAutoFit/>
-          </a:bodyPr>
-          <a:lstStyle/>
-          <a:p>
-            <a:pPr algn="l"/>
-            <a:r>
               <a:rPr sz="1600" b="0" i="0">
                 <a:solidFill>
                   <a:srgbClr val="222222"/>
@@ -1733,7 +1700,7 @@
         </p:nvSpPr>
         <p:spPr>
           <a:xfrm>
-            <a:off x="640080" y="3767328"/>
+            <a:off x="640080" y="3474720"/>
             <a:ext cx="2450591" cy="1005840"/>
           </a:xfrm>
           <a:prstGeom prst="rect">
@@ -1836,6 +1803,7 @@
           <a:lstStyle/>
           <a:p>
             <a:pPr algn="ctr"/>
+            <a:endParaRPr/>
           </a:p>
         </p:txBody>
       </p:sp>
@@ -1847,7 +1815,7 @@
         </p:nvSpPr>
         <p:spPr>
           <a:xfrm>
-            <a:off x="3438144" y="3063240"/>
+            <a:off x="3438144" y="3355848"/>
             <a:ext cx="2542032" cy="457200"/>
           </a:xfrm>
           <a:prstGeom prst="rect">
@@ -1882,7 +1850,7 @@
         </p:nvSpPr>
         <p:spPr>
           <a:xfrm>
-            <a:off x="3438144" y="3474720"/>
+            <a:off x="3438144" y="3767328"/>
             <a:ext cx="2450591" cy="1005840"/>
           </a:xfrm>
           <a:prstGeom prst="rect">
@@ -1985,6 +1953,7 @@
           <a:lstStyle/>
           <a:p>
             <a:pPr algn="ctr"/>
+            <a:endParaRPr/>
           </a:p>
         </p:txBody>
       </p:sp>
@@ -2134,6 +2103,7 @@
           <a:lstStyle/>
           <a:p>
             <a:pPr algn="ctr"/>
+            <a:endParaRPr/>
           </a:p>
         </p:txBody>
       </p:sp>
@@ -2203,6 +2173,41 @@
                 <a:latin typeface="Calibri"/>
               </a:rPr>
               <a:t>Test whether fusion beats the best single modality model.</a:t>
+            </a:r>
+          </a:p>
+        </p:txBody>
+      </p:sp>
+      <p:sp>
+        <p:nvSpPr>
+          <p:cNvPr id="32" name="TextBox 31"/>
+          <p:cNvSpPr txBox="1"/>
+          <p:nvPr/>
+        </p:nvSpPr>
+        <p:spPr>
+          <a:xfrm>
+            <a:off x="3438144" y="3063240"/>
+            <a:ext cx="2542032" cy="274320"/>
+          </a:xfrm>
+          <a:prstGeom prst="rect">
+            <a:avLst/>
+          </a:prstGeom>
+          <a:noFill/>
+        </p:spPr>
+        <p:txBody>
+          <a:bodyPr wrap="square">
+            <a:spAutoFit/>
+          </a:bodyPr>
+          <a:lstStyle/>
+          <a:p>
+            <a:pPr algn="l"/>
+            <a:r>
+              <a:rPr sz="1000" b="1" i="0">
+                <a:solidFill>
+                  <a:srgbClr val="2C5F2D"/>
+                </a:solidFill>
+                <a:latin typeface="Calibri"/>
+              </a:rPr>
+              <a:t>CURRENT</a:t>
             </a:r>
           </a:p>
         </p:txBody>
@@ -2407,7 +2412,7 @@
                 </a:solidFill>
                 <a:latin typeface="Cambria"/>
               </a:rPr>
-              <a:t>Decodability</a:t>
+              <a:t>Track A: Decodability</a:t>
             </a:r>
           </a:p>
         </p:txBody>
@@ -2442,7 +2447,7 @@
                 </a:solidFill>
                 <a:latin typeface="Calibri"/>
               </a:rPr>
-              <a:t>RNA R² = 0.059  ·  Protein R² = 0.113  (mRNA stability)</a:t>
+              <a:t>Decodability test: RNA R² = 0.059  ·  Protein R² = 0.113 (mRNA stability)</a:t>
             </a:r>
           </a:p>
         </p:txBody>
@@ -2477,7 +2482,7 @@
                 </a:solidFill>
                 <a:latin typeface="Calibri"/>
               </a:rPr>
-              <a:t>GC content probe: RNA R² = 0.986  ·  Protein R² = 0.681</a:t>
+              <a:t>GC content validity check: RNA R² = 0.986  ·  Protein R² = 0.681</a:t>
             </a:r>
           </a:p>
         </p:txBody>
@@ -2512,7 +2517,7 @@
                 </a:solidFill>
                 <a:latin typeface="Calibri"/>
               </a:rPr>
-              <a:t>Concatenation: R² = 0.115, no gain over protein alone</a:t>
+              <a:t>Synergy check (concatenation): R² = 0.115, no gain over protein alone</a:t>
             </a:r>
           </a:p>
         </p:txBody>
@@ -2558,6 +2563,7 @@
           <a:lstStyle/>
           <a:p>
             <a:pPr algn="ctr"/>
+            <a:endParaRPr/>
           </a:p>
         </p:txBody>
       </p:sp>
@@ -2591,7 +2597,7 @@
                 </a:solidFill>
                 <a:latin typeface="Cambria"/>
               </a:rPr>
-              <a:t>Cross-Modal Geometry</a:t>
+              <a:t>Track B: Cross-Modal Geometry</a:t>
             </a:r>
           </a:p>
         </p:txBody>
@@ -2626,7 +2632,7 @@
                 </a:solidFill>
                 <a:latin typeface="Calibri"/>
               </a:rPr>
-              <a:t>Final-layer CKA: 0.128  ·  Mutual k-NN: 0.070 vs. 0.010 chance</a:t>
+              <a:t>Geometry test: final-layer CKA: 0.128  ·  Mutual k-NN: 0.070 vs. 0.010 chance</a:t>
             </a:r>
           </a:p>
         </p:txBody>
@@ -2661,7 +2667,7 @@
                 </a:solidFill>
                 <a:latin typeface="Calibri"/>
               </a:rPr>
-              <a:t>CCA: correlations up to 0.955 on held-out data</a:t>
+              <a:t>Shared-subspace test (CCA): correlations up to 0.955 on held-out data</a:t>
             </a:r>
           </a:p>
         </p:txBody>
@@ -2696,7 +2702,7 @@
                 </a:solidFill>
                 <a:latin typeface="Calibri"/>
               </a:rPr>
-              <a:t>Retrieval on that subspace: 36.6% top-1 recall vs. 0.3% chance</a:t>
+              <a:t>Cross-modal retrieval test: 36.6% top-1 recall vs. 0.3% chance</a:t>
             </a:r>
           </a:p>
         </p:txBody>
@@ -2742,6 +2748,7 @@
           <a:lstStyle/>
           <a:p>
             <a:pPr algn="ctr"/>
+            <a:endParaRPr/>
           </a:p>
         </p:txBody>
       </p:sp>
@@ -2828,7 +2835,7 @@
 </file>
 
 <file path=ppt/slides/slide4.xml><?xml version="1.0" encoding="utf-8"?>
-<p:sld xmlns:a="http://schemas.openxmlformats.org/drawingml/2006/main" xmlns:p="http://schemas.openxmlformats.org/presentationml/2006/main" xmlns:r="http://schemas.openxmlformats.org/officeDocument/2006/relationships">
+<p:sld xmlns:a="http://schemas.openxmlformats.org/drawingml/2006/main" xmlns:r="http://schemas.openxmlformats.org/officeDocument/2006/relationships" xmlns:p="http://schemas.openxmlformats.org/presentationml/2006/main">
   <p:cSld>
     <p:bg>
       <p:bgPr>
@@ -2844,7 +2851,14 @@
         <p:cNvGrpSpPr/>
         <p:nvPr/>
       </p:nvGrpSpPr>
-      <p:grpSpPr/>
+      <p:grpSpPr>
+        <a:xfrm>
+          <a:off x="0" y="0"/>
+          <a:ext cx="0" cy="0"/>
+          <a:chOff x="0" y="0"/>
+          <a:chExt cx="0" cy="0"/>
+        </a:xfrm>
+      </p:grpSpPr>
       <p:sp>
         <p:nvSpPr>
           <p:cNvPr id="2" name="TextBox 1"/>
@@ -2924,7 +2938,7 @@
           <p:nvPr/>
         </p:nvPicPr>
         <p:blipFill>
-          <a:blip r:embed="rId3"/>
+          <a:blip r:embed="rId2"/>
           <a:stretch>
             <a:fillRect/>
           </a:stretch>
@@ -3050,6 +3064,7 @@
           <a:lstStyle/>
           <a:p>
             <a:pPr algn="ctr"/>
+            <a:endParaRPr/>
           </a:p>
         </p:txBody>
       </p:sp>
@@ -3129,6 +3144,7 @@
           <a:lstStyle/>
           <a:p>
             <a:pPr algn="ctr"/>
+            <a:endParaRPr/>
           </a:p>
         </p:txBody>
       </p:sp>
@@ -3232,7 +3248,7 @@
                 </a:solidFill>
                 <a:latin typeface="Calibri"/>
               </a:rPr>
-              <a:t>Across 100 sequences: 7% show higher attention at motifs (p &lt; 0.05), near the 5% chance baseline</a:t>
+              <a:t>Motif-overlap test: across 100 sequences, 7% show higher attention at motifs (p &lt; 0.05), near the 5% chance baseline</a:t>
             </a:r>
           </a:p>
         </p:txBody>
@@ -3313,6 +3329,7 @@
           <a:lstStyle/>
           <a:p>
             <a:pPr algn="ctr"/>
+            <a:endParaRPr/>
           </a:p>
         </p:txBody>
       </p:sp>
@@ -3381,7 +3398,7 @@
                 </a:solidFill>
                 <a:latin typeface="Calibri"/>
               </a:rPr>
-              <a:t>Slope (ICML 2025 diagnostic): r = -0.013, p = 0.83, not significant</a:t>
+              <a:t>Alignment-vs-accuracy test: slope r = -0.013, p = 0.83, not significant</a:t>
             </a:r>
           </a:p>
         </p:txBody>
@@ -3416,7 +3433,7 @@
                 </a:solidFill>
                 <a:latin typeface="Calibri"/>
               </a:rPr>
-              <a:t>RSA: r = 0.234, p &lt; 0.001, a fourth confirmation of Track B's shared subspace</a:t>
+              <a:t>Internal-structure test (RSA): r = 0.234, p &lt; 0.001, a fourth confirmation of Track B's shared subspace</a:t>
             </a:r>
           </a:p>
         </p:txBody>
@@ -3462,6 +3479,7 @@
           <a:lstStyle/>
           <a:p>
             <a:pPr algn="ctr"/>
+            <a:endParaRPr/>
           </a:p>
         </p:txBody>
       </p:sp>
@@ -3601,7 +3619,7 @@
                 <a:ea typeface="Calibri" pitchFamily="34" charset="-122"/>
                 <a:cs typeface="Calibri" pitchFamily="34" charset="-120"/>
               </a:rPr>
-              <a:t>STATUS AND NEXT STEPS</a:t>
+              <a:t>NEXT STEPS</a:t>
             </a:r>
             <a:endParaRPr lang="en-US" sz="1300" dirty="0"/>
           </a:p>
@@ -3640,7 +3658,7 @@
                 <a:ea typeface="Cambria" pitchFamily="34" charset="-122"/>
                 <a:cs typeface="Cambria" pitchFamily="34" charset="-120"/>
               </a:rPr>
-              <a:t>Remaining Work and Open Questions for Wednesday</a:t>
+              <a:t>Next Steps and Open Questions for Wednesday</a:t>
             </a:r>
             <a:endParaRPr lang="en-US" sz="2800" dirty="0"/>
           </a:p>
@@ -3676,20 +3694,20 @@
                 </a:solidFill>
                 <a:latin typeface="Cambria"/>
               </a:rPr>
-              <a:t>Remaining Stage 1 Work</a:t>
-            </a:r>
-          </a:p>
-        </p:txBody>
-      </p:sp>
-      <p:sp>
-        <p:nvSpPr>
-          <p:cNvPr id="5" name="Rectangle 4"/>
+              <a:t>Next Steps</a:t>
+            </a:r>
+          </a:p>
+        </p:txBody>
+      </p:sp>
+      <p:sp>
+        <p:nvSpPr>
+          <p:cNvPr id="9" name="Rectangle 8"/>
           <p:cNvSpPr/>
           <p:nvPr/>
         </p:nvSpPr>
         <p:spPr>
           <a:xfrm>
-            <a:off x="640080" y="2286000"/>
+            <a:off x="640080" y="2285999"/>
             <a:ext cx="128016" cy="27432"/>
           </a:xfrm>
           <a:prstGeom prst="rect">
@@ -3722,12 +3740,13 @@
           <a:lstStyle/>
           <a:p>
             <a:pPr algn="ctr"/>
-          </a:p>
-        </p:txBody>
-      </p:sp>
-      <p:sp>
-        <p:nvSpPr>
-          <p:cNvPr id="6" name="TextBox 5"/>
+            <a:endParaRPr/>
+          </a:p>
+        </p:txBody>
+      </p:sp>
+      <p:sp>
+        <p:nvSpPr>
+          <p:cNvPr id="10" name="TextBox 9"/>
           <p:cNvSpPr txBox="1"/>
           <p:nvPr/>
         </p:nvSpPr>
@@ -3759,14 +3778,14 @@
                 </a:solidFill>
                 <a:latin typeface="Calibri"/>
               </a:rPr>
-              <a:t>Track C, the alignment-performance slope, and RSA are all built and run; see the previous slide for results.</a:t>
-            </a:r>
-          </a:p>
-        </p:txBody>
-      </p:sp>
-      <p:sp>
-        <p:nvSpPr>
-          <p:cNvPr id="7" name="Rectangle 6"/>
+              <a:t>Move into Stage 2, defining the alignment target: Stage 1 found real shared structure a targeted method can find, but narrow enough that forcing more of it likely will not help.</a:t>
+            </a:r>
+          </a:p>
+        </p:txBody>
+      </p:sp>
+      <p:sp>
+        <p:nvSpPr>
+          <p:cNvPr id="11" name="Rectangle 10"/>
           <p:cNvSpPr/>
           <p:nvPr/>
         </p:nvSpPr>
@@ -3805,12 +3824,13 @@
           <a:lstStyle/>
           <a:p>
             <a:pPr algn="ctr"/>
-          </a:p>
-        </p:txBody>
-      </p:sp>
-      <p:sp>
-        <p:nvSpPr>
-          <p:cNvPr id="8" name="TextBox 7"/>
+            <a:endParaRPr/>
+          </a:p>
+        </p:txBody>
+      </p:sp>
+      <p:sp>
+        <p:nvSpPr>
+          <p:cNvPr id="12" name="TextBox 11"/>
           <p:cNvSpPr txBox="1"/>
           <p:nvPr/>
         </p:nvSpPr>
@@ -3842,27 +3862,27 @@
                 </a:solidFill>
                 <a:latin typeface="Calibri"/>
               </a:rPr>
-              <a:t>Track C's attention-motif test has been re-run against real ARE and m6A motifs: still a null result, but now against the correct ground truth, so it stands as a genuine finding rather than an open item.</a:t>
-            </a:r>
-          </a:p>
-        </p:txBody>
-      </p:sp>
-      <p:sp>
-        <p:nvSpPr>
-          <p:cNvPr id="9" name="Rectangle 8"/>
+              <a:t>Scope the fusion architecture candidates already researched, Coupled Mamba, Cross-Mamba, and mixture-of-experts fusion among them, against whatever alignment target comes out of Wednesday's discussion.</a:t>
+            </a:r>
+          </a:p>
+        </p:txBody>
+      </p:sp>
+      <p:sp>
+        <p:nvSpPr>
+          <p:cNvPr id="13" name="Rectangle 12"/>
           <p:cNvSpPr/>
           <p:nvPr/>
         </p:nvSpPr>
         <p:spPr>
           <a:xfrm>
-            <a:off x="640080" y="3785615"/>
-            <a:ext cx="128016" cy="27432"/>
+            <a:off x="5760720" y="1691640"/>
+            <a:ext cx="18288" cy="4480560"/>
           </a:xfrm>
           <a:prstGeom prst="rect">
             <a:avLst/>
           </a:prstGeom>
           <a:solidFill>
-            <a:srgbClr val="97BC62"/>
+            <a:srgbClr val="D9E2CE"/>
           </a:solidFill>
           <a:ln>
             <a:noFill/>
@@ -3888,19 +3908,90 @@
           <a:lstStyle/>
           <a:p>
             <a:pPr algn="ctr"/>
-          </a:p>
-        </p:txBody>
-      </p:sp>
-      <p:sp>
-        <p:nvSpPr>
-          <p:cNvPr id="10" name="TextBox 9"/>
-          <p:cNvSpPr txBox="1"/>
-          <p:nvPr/>
-        </p:nvSpPr>
-        <p:spPr>
-          <a:xfrm>
-            <a:off x="896112" y="3694176"/>
-            <a:ext cx="4727448" cy="685800"/>
+            <a:endParaRPr/>
+          </a:p>
+        </p:txBody>
+      </p:sp>
+      <p:sp>
+        <p:nvSpPr>
+          <p:cNvPr id="14" name="TextBox 13"/>
+          <p:cNvSpPr txBox="1"/>
+          <p:nvPr/>
+        </p:nvSpPr>
+        <p:spPr>
+          <a:xfrm>
+            <a:off x="6080760" y="1691640"/>
+            <a:ext cx="5166360" cy="365760"/>
+          </a:xfrm>
+          <a:prstGeom prst="rect">
+            <a:avLst/>
+          </a:prstGeom>
+          <a:noFill/>
+        </p:spPr>
+        <p:txBody>
+          <a:bodyPr wrap="square">
+            <a:spAutoFit/>
+          </a:bodyPr>
+          <a:lstStyle/>
+          <a:p>
+            <a:pPr algn="l"/>
+            <a:r>
+              <a:rPr sz="1600" b="1" i="0">
+                <a:solidFill>
+                  <a:srgbClr val="2C5F2D"/>
+                </a:solidFill>
+                <a:latin typeface="Cambria"/>
+              </a:rPr>
+              <a:t>Open Questions for Wednesday</a:t>
+            </a:r>
+          </a:p>
+        </p:txBody>
+      </p:sp>
+      <p:sp>
+        <p:nvSpPr>
+          <p:cNvPr id="15" name="TextBox 14"/>
+          <p:cNvSpPr txBox="1"/>
+          <p:nvPr/>
+        </p:nvSpPr>
+        <p:spPr>
+          <a:xfrm>
+            <a:off x="6080760" y="2194560"/>
+            <a:ext cx="457200" cy="365760"/>
+          </a:xfrm>
+          <a:prstGeom prst="rect">
+            <a:avLst/>
+          </a:prstGeom>
+          <a:noFill/>
+        </p:spPr>
+        <p:txBody>
+          <a:bodyPr wrap="square">
+            <a:spAutoFit/>
+          </a:bodyPr>
+          <a:lstStyle/>
+          <a:p>
+            <a:pPr algn="l"/>
+            <a:r>
+              <a:rPr sz="1500" b="1" i="0">
+                <a:solidFill>
+                  <a:srgbClr val="2C5F2D"/>
+                </a:solidFill>
+                <a:latin typeface="Cambria"/>
+              </a:rPr>
+              <a:t>01</a:t>
+            </a:r>
+          </a:p>
+        </p:txBody>
+      </p:sp>
+      <p:sp>
+        <p:nvSpPr>
+          <p:cNvPr id="16" name="TextBox 15"/>
+          <p:cNvSpPr txBox="1"/>
+          <p:nvPr/>
+        </p:nvSpPr>
+        <p:spPr>
+          <a:xfrm>
+            <a:off x="6537960" y="2194560"/>
+            <a:ext cx="4709160" cy="685800"/>
           </a:xfrm>
           <a:prstGeom prst="rect">
             <a:avLst/>
@@ -3925,27 +4016,249 @@
                 </a:solidFill>
                 <a:latin typeface="Calibri"/>
               </a:rPr>
-              <a:t>Codon usage bias and secondary structure probes are the remaining Track A checks, alongside the GC content probe already run.</a:t>
-            </a:r>
-          </a:p>
-        </p:txBody>
-      </p:sp>
-      <p:sp>
-        <p:nvSpPr>
-          <p:cNvPr id="11" name="Rectangle 10"/>
+              <a:t>Does mRNA stability become the confirmed Stage 4 benchmark, given DNA-optional scoping?</a:t>
+            </a:r>
+          </a:p>
+        </p:txBody>
+      </p:sp>
+      <p:sp>
+        <p:nvSpPr>
+          <p:cNvPr id="17" name="TextBox 16"/>
+          <p:cNvSpPr txBox="1"/>
+          <p:nvPr/>
+        </p:nvSpPr>
+        <p:spPr>
+          <a:xfrm>
+            <a:off x="6080760" y="2944368"/>
+            <a:ext cx="457200" cy="365760"/>
+          </a:xfrm>
+          <a:prstGeom prst="rect">
+            <a:avLst/>
+          </a:prstGeom>
+          <a:noFill/>
+        </p:spPr>
+        <p:txBody>
+          <a:bodyPr wrap="square">
+            <a:spAutoFit/>
+          </a:bodyPr>
+          <a:lstStyle/>
+          <a:p>
+            <a:pPr algn="l"/>
+            <a:r>
+              <a:rPr sz="1500" b="1" i="0">
+                <a:solidFill>
+                  <a:srgbClr val="2C5F2D"/>
+                </a:solidFill>
+                <a:latin typeface="Cambria"/>
+              </a:rPr>
+              <a:t>02</a:t>
+            </a:r>
+          </a:p>
+        </p:txBody>
+      </p:sp>
+      <p:sp>
+        <p:nvSpPr>
+          <p:cNvPr id="18" name="TextBox 17"/>
+          <p:cNvSpPr txBox="1"/>
+          <p:nvPr/>
+        </p:nvSpPr>
+        <p:spPr>
+          <a:xfrm>
+            <a:off x="6537960" y="2944368"/>
+            <a:ext cx="4709160" cy="685800"/>
+          </a:xfrm>
+          <a:prstGeom prst="rect">
+            <a:avLst/>
+          </a:prstGeom>
+          <a:noFill/>
+        </p:spPr>
+        <p:txBody>
+          <a:bodyPr wrap="square">
+            <a:spAutoFit/>
+          </a:bodyPr>
+          <a:lstStyle/>
+          <a:p>
+            <a:pPr algn="l">
+              <a:lnSpc>
+                <a:spcPct val="110000"/>
+              </a:lnSpc>
+            </a:pPr>
+            <a:r>
+              <a:rPr sz="1200" b="0" i="0">
+                <a:solidFill>
+                  <a:srgbClr val="222222"/>
+                </a:solidFill>
+                <a:latin typeface="Calibri"/>
+              </a:rPr>
+              <a:t>Do the mRNA_Stability sequences include 3' UTR context, where AU-rich elements and m6A sites concentrate, or are they CDS-only?</a:t>
+            </a:r>
+          </a:p>
+        </p:txBody>
+      </p:sp>
+      <p:sp>
+        <p:nvSpPr>
+          <p:cNvPr id="19" name="TextBox 18"/>
+          <p:cNvSpPr txBox="1"/>
+          <p:nvPr/>
+        </p:nvSpPr>
+        <p:spPr>
+          <a:xfrm>
+            <a:off x="6080760" y="3694176"/>
+            <a:ext cx="457200" cy="365760"/>
+          </a:xfrm>
+          <a:prstGeom prst="rect">
+            <a:avLst/>
+          </a:prstGeom>
+          <a:noFill/>
+        </p:spPr>
+        <p:txBody>
+          <a:bodyPr wrap="square">
+            <a:spAutoFit/>
+          </a:bodyPr>
+          <a:lstStyle/>
+          <a:p>
+            <a:pPr algn="l"/>
+            <a:r>
+              <a:rPr sz="1500" b="1" i="0">
+                <a:solidFill>
+                  <a:srgbClr val="2C5F2D"/>
+                </a:solidFill>
+                <a:latin typeface="Cambria"/>
+              </a:rPr>
+              <a:t>03</a:t>
+            </a:r>
+          </a:p>
+        </p:txBody>
+      </p:sp>
+      <p:sp>
+        <p:nvSpPr>
+          <p:cNvPr id="20" name="TextBox 19"/>
+          <p:cNvSpPr txBox="1"/>
+          <p:nvPr/>
+        </p:nvSpPr>
+        <p:spPr>
+          <a:xfrm>
+            <a:off x="6537960" y="3694176"/>
+            <a:ext cx="4709160" cy="685800"/>
+          </a:xfrm>
+          <a:prstGeom prst="rect">
+            <a:avLst/>
+          </a:prstGeom>
+          <a:noFill/>
+        </p:spPr>
+        <p:txBody>
+          <a:bodyPr wrap="square">
+            <a:spAutoFit/>
+          </a:bodyPr>
+          <a:lstStyle/>
+          <a:p>
+            <a:pPr algn="l">
+              <a:lnSpc>
+                <a:spcPct val="110000"/>
+              </a:lnSpc>
+            </a:pPr>
+            <a:r>
+              <a:rPr sz="1200" b="0" i="0">
+                <a:solidFill>
+                  <a:srgbClr val="222222"/>
+                </a:solidFill>
+                <a:latin typeface="Calibri"/>
+              </a:rPr>
+              <a:t>Should Stage 2 use asymmetric, per-pair alignment decisions across modality pairs?</a:t>
+            </a:r>
+          </a:p>
+        </p:txBody>
+      </p:sp>
+      <p:sp>
+        <p:nvSpPr>
+          <p:cNvPr id="21" name="TextBox 20"/>
+          <p:cNvSpPr txBox="1"/>
+          <p:nvPr/>
+        </p:nvSpPr>
+        <p:spPr>
+          <a:xfrm>
+            <a:off x="6080760" y="4443984"/>
+            <a:ext cx="457200" cy="365760"/>
+          </a:xfrm>
+          <a:prstGeom prst="rect">
+            <a:avLst/>
+          </a:prstGeom>
+          <a:noFill/>
+        </p:spPr>
+        <p:txBody>
+          <a:bodyPr wrap="square">
+            <a:spAutoFit/>
+          </a:bodyPr>
+          <a:lstStyle/>
+          <a:p>
+            <a:pPr algn="l"/>
+            <a:r>
+              <a:rPr sz="1500" b="1" i="0">
+                <a:solidFill>
+                  <a:srgbClr val="2C5F2D"/>
+                </a:solidFill>
+                <a:latin typeface="Cambria"/>
+              </a:rPr>
+              <a:t>04</a:t>
+            </a:r>
+          </a:p>
+        </p:txBody>
+      </p:sp>
+      <p:sp>
+        <p:nvSpPr>
+          <p:cNvPr id="22" name="TextBox 21"/>
+          <p:cNvSpPr txBox="1"/>
+          <p:nvPr/>
+        </p:nvSpPr>
+        <p:spPr>
+          <a:xfrm>
+            <a:off x="6537960" y="4443984"/>
+            <a:ext cx="4709160" cy="685800"/>
+          </a:xfrm>
+          <a:prstGeom prst="rect">
+            <a:avLst/>
+          </a:prstGeom>
+          <a:noFill/>
+        </p:spPr>
+        <p:txBody>
+          <a:bodyPr wrap="square">
+            <a:spAutoFit/>
+          </a:bodyPr>
+          <a:lstStyle/>
+          <a:p>
+            <a:pPr algn="l">
+              <a:lnSpc>
+                <a:spcPct val="110000"/>
+              </a:lnSpc>
+            </a:pPr>
+            <a:r>
+              <a:rPr sz="1200" b="0" i="0" dirty="0">
+                <a:solidFill>
+                  <a:srgbClr val="222222"/>
+                </a:solidFill>
+                <a:latin typeface="Calibri"/>
+              </a:rPr>
+              <a:t>Is the shared subspace compositional (GC-linked), or something more specific worth checking?</a:t>
+            </a:r>
+          </a:p>
+        </p:txBody>
+      </p:sp>
+      <p:sp>
+        <p:nvSpPr>
+          <p:cNvPr id="23" name="Rectangle 22"/>
           <p:cNvSpPr/>
           <p:nvPr/>
         </p:nvSpPr>
         <p:spPr>
           <a:xfrm>
-            <a:off x="640080" y="4535424"/>
-            <a:ext cx="128016" cy="27432"/>
+            <a:off x="640080" y="5715000"/>
+            <a:ext cx="54864" cy="914400"/>
           </a:xfrm>
           <a:prstGeom prst="rect">
             <a:avLst/>
           </a:prstGeom>
           <a:solidFill>
-            <a:srgbClr val="97BC62"/>
+            <a:srgbClr val="2C5F2D"/>
           </a:solidFill>
           <a:ln>
             <a:noFill/>
@@ -3971,464 +4284,7 @@
           <a:lstStyle/>
           <a:p>
             <a:pPr algn="ctr"/>
-          </a:p>
-        </p:txBody>
-      </p:sp>
-      <p:sp>
-        <p:nvSpPr>
-          <p:cNvPr id="12" name="TextBox 11"/>
-          <p:cNvSpPr txBox="1"/>
-          <p:nvPr/>
-        </p:nvSpPr>
-        <p:spPr>
-          <a:xfrm>
-            <a:off x="896112" y="4443984"/>
-            <a:ext cx="4727448" cy="685800"/>
-          </a:xfrm>
-          <a:prstGeom prst="rect">
-            <a:avLst/>
-          </a:prstGeom>
-          <a:noFill/>
-        </p:spPr>
-        <p:txBody>
-          <a:bodyPr wrap="square">
-            <a:spAutoFit/>
-          </a:bodyPr>
-          <a:lstStyle/>
-          <a:p>
-            <a:pPr algn="l">
-              <a:lnSpc>
-                <a:spcPct val="110000"/>
-              </a:lnSpc>
-            </a:pPr>
-            <a:r>
-              <a:rPr sz="1200" b="0" i="0">
-                <a:solidFill>
-                  <a:srgbClr val="222222"/>
-                </a:solidFill>
-                <a:latin typeface="Calibri"/>
-              </a:rPr>
-              <a:t>Full reviews complete for all six core papers, including the alignment theory paper.</a:t>
-            </a:r>
-          </a:p>
-        </p:txBody>
-      </p:sp>
-      <p:sp>
-        <p:nvSpPr>
-          <p:cNvPr id="13" name="Rectangle 12"/>
-          <p:cNvSpPr/>
-          <p:nvPr/>
-        </p:nvSpPr>
-        <p:spPr>
-          <a:xfrm>
-            <a:off x="5760720" y="1691640"/>
-            <a:ext cx="18288" cy="4480560"/>
-          </a:xfrm>
-          <a:prstGeom prst="rect">
-            <a:avLst/>
-          </a:prstGeom>
-          <a:solidFill>
-            <a:srgbClr val="D9E2CE"/>
-          </a:solidFill>
-          <a:ln>
-            <a:noFill/>
-          </a:ln>
-          <a:effectLst/>
-        </p:spPr>
-        <p:style>
-          <a:lnRef idx="1">
-            <a:schemeClr val="accent1"/>
-          </a:lnRef>
-          <a:fillRef idx="3">
-            <a:schemeClr val="accent1"/>
-          </a:fillRef>
-          <a:effectRef idx="2">
-            <a:schemeClr val="accent1"/>
-          </a:effectRef>
-          <a:fontRef idx="minor">
-            <a:schemeClr val="lt1"/>
-          </a:fontRef>
-        </p:style>
-        <p:txBody>
-          <a:bodyPr rtlCol="0" anchor="ctr"/>
-          <a:lstStyle/>
-          <a:p>
-            <a:pPr algn="ctr"/>
-          </a:p>
-        </p:txBody>
-      </p:sp>
-      <p:sp>
-        <p:nvSpPr>
-          <p:cNvPr id="14" name="TextBox 13"/>
-          <p:cNvSpPr txBox="1"/>
-          <p:nvPr/>
-        </p:nvSpPr>
-        <p:spPr>
-          <a:xfrm>
-            <a:off x="6080760" y="1691640"/>
-            <a:ext cx="5166360" cy="365760"/>
-          </a:xfrm>
-          <a:prstGeom prst="rect">
-            <a:avLst/>
-          </a:prstGeom>
-          <a:noFill/>
-        </p:spPr>
-        <p:txBody>
-          <a:bodyPr wrap="square">
-            <a:spAutoFit/>
-          </a:bodyPr>
-          <a:lstStyle/>
-          <a:p>
-            <a:pPr algn="l"/>
-            <a:r>
-              <a:rPr sz="1600" b="1" i="0">
-                <a:solidFill>
-                  <a:srgbClr val="2C5F2D"/>
-                </a:solidFill>
-                <a:latin typeface="Cambria"/>
-              </a:rPr>
-              <a:t>Open Questions for Wednesday</a:t>
-            </a:r>
-          </a:p>
-        </p:txBody>
-      </p:sp>
-      <p:sp>
-        <p:nvSpPr>
-          <p:cNvPr id="15" name="TextBox 14"/>
-          <p:cNvSpPr txBox="1"/>
-          <p:nvPr/>
-        </p:nvSpPr>
-        <p:spPr>
-          <a:xfrm>
-            <a:off x="6080760" y="2194560"/>
-            <a:ext cx="457200" cy="365760"/>
-          </a:xfrm>
-          <a:prstGeom prst="rect">
-            <a:avLst/>
-          </a:prstGeom>
-          <a:noFill/>
-        </p:spPr>
-        <p:txBody>
-          <a:bodyPr wrap="square">
-            <a:spAutoFit/>
-          </a:bodyPr>
-          <a:lstStyle/>
-          <a:p>
-            <a:pPr algn="l"/>
-            <a:r>
-              <a:rPr sz="1500" b="1" i="0">
-                <a:solidFill>
-                  <a:srgbClr val="2C5F2D"/>
-                </a:solidFill>
-                <a:latin typeface="Cambria"/>
-              </a:rPr>
-              <a:t>01</a:t>
-            </a:r>
-          </a:p>
-        </p:txBody>
-      </p:sp>
-      <p:sp>
-        <p:nvSpPr>
-          <p:cNvPr id="16" name="TextBox 15"/>
-          <p:cNvSpPr txBox="1"/>
-          <p:nvPr/>
-        </p:nvSpPr>
-        <p:spPr>
-          <a:xfrm>
-            <a:off x="6537960" y="2194560"/>
-            <a:ext cx="4709160" cy="685800"/>
-          </a:xfrm>
-          <a:prstGeom prst="rect">
-            <a:avLst/>
-          </a:prstGeom>
-          <a:noFill/>
-        </p:spPr>
-        <p:txBody>
-          <a:bodyPr wrap="square">
-            <a:spAutoFit/>
-          </a:bodyPr>
-          <a:lstStyle/>
-          <a:p>
-            <a:pPr algn="l">
-              <a:lnSpc>
-                <a:spcPct val="110000"/>
-              </a:lnSpc>
-            </a:pPr>
-            <a:r>
-              <a:rPr sz="1200" b="0" i="0">
-                <a:solidFill>
-                  <a:srgbClr val="222222"/>
-                </a:solidFill>
-                <a:latin typeface="Calibri"/>
-              </a:rPr>
-              <a:t>Does mRNA stability become the confirmed Stage 4 benchmark, given DNA-optional scoping?</a:t>
-            </a:r>
-          </a:p>
-        </p:txBody>
-      </p:sp>
-      <p:sp>
-        <p:nvSpPr>
-          <p:cNvPr id="17" name="TextBox 16"/>
-          <p:cNvSpPr txBox="1"/>
-          <p:nvPr/>
-        </p:nvSpPr>
-        <p:spPr>
-          <a:xfrm>
-            <a:off x="6080760" y="2944368"/>
-            <a:ext cx="457200" cy="365760"/>
-          </a:xfrm>
-          <a:prstGeom prst="rect">
-            <a:avLst/>
-          </a:prstGeom>
-          <a:noFill/>
-        </p:spPr>
-        <p:txBody>
-          <a:bodyPr wrap="square">
-            <a:spAutoFit/>
-          </a:bodyPr>
-          <a:lstStyle/>
-          <a:p>
-            <a:pPr algn="l"/>
-            <a:r>
-              <a:rPr sz="1500" b="1" i="0">
-                <a:solidFill>
-                  <a:srgbClr val="2C5F2D"/>
-                </a:solidFill>
-                <a:latin typeface="Cambria"/>
-              </a:rPr>
-              <a:t>02</a:t>
-            </a:r>
-          </a:p>
-        </p:txBody>
-      </p:sp>
-      <p:sp>
-        <p:nvSpPr>
-          <p:cNvPr id="18" name="TextBox 17"/>
-          <p:cNvSpPr txBox="1"/>
-          <p:nvPr/>
-        </p:nvSpPr>
-        <p:spPr>
-          <a:xfrm>
-            <a:off x="6537960" y="2944368"/>
-            <a:ext cx="4709160" cy="685800"/>
-          </a:xfrm>
-          <a:prstGeom prst="rect">
-            <a:avLst/>
-          </a:prstGeom>
-          <a:noFill/>
-        </p:spPr>
-        <p:txBody>
-          <a:bodyPr wrap="square">
-            <a:spAutoFit/>
-          </a:bodyPr>
-          <a:lstStyle/>
-          <a:p>
-            <a:pPr algn="l">
-              <a:lnSpc>
-                <a:spcPct val="110000"/>
-              </a:lnSpc>
-            </a:pPr>
-            <a:r>
-              <a:rPr sz="1200" b="0" i="0">
-                <a:solidFill>
-                  <a:srgbClr val="222222"/>
-                </a:solidFill>
-                <a:latin typeface="Calibri"/>
-              </a:rPr>
-              <a:t>Do the mRNA_Stability sequences include 3' UTR context, where AU-rich elements and m6A sites concentrate, or are they CDS-only?</a:t>
-            </a:r>
-          </a:p>
-        </p:txBody>
-      </p:sp>
-      <p:sp>
-        <p:nvSpPr>
-          <p:cNvPr id="19" name="TextBox 18"/>
-          <p:cNvSpPr txBox="1"/>
-          <p:nvPr/>
-        </p:nvSpPr>
-        <p:spPr>
-          <a:xfrm>
-            <a:off x="6080760" y="3694176"/>
-            <a:ext cx="457200" cy="365760"/>
-          </a:xfrm>
-          <a:prstGeom prst="rect">
-            <a:avLst/>
-          </a:prstGeom>
-          <a:noFill/>
-        </p:spPr>
-        <p:txBody>
-          <a:bodyPr wrap="square">
-            <a:spAutoFit/>
-          </a:bodyPr>
-          <a:lstStyle/>
-          <a:p>
-            <a:pPr algn="l"/>
-            <a:r>
-              <a:rPr sz="1500" b="1" i="0">
-                <a:solidFill>
-                  <a:srgbClr val="2C5F2D"/>
-                </a:solidFill>
-                <a:latin typeface="Cambria"/>
-              </a:rPr>
-              <a:t>03</a:t>
-            </a:r>
-          </a:p>
-        </p:txBody>
-      </p:sp>
-      <p:sp>
-        <p:nvSpPr>
-          <p:cNvPr id="20" name="TextBox 19"/>
-          <p:cNvSpPr txBox="1"/>
-          <p:nvPr/>
-        </p:nvSpPr>
-        <p:spPr>
-          <a:xfrm>
-            <a:off x="6537960" y="3694176"/>
-            <a:ext cx="4709160" cy="685800"/>
-          </a:xfrm>
-          <a:prstGeom prst="rect">
-            <a:avLst/>
-          </a:prstGeom>
-          <a:noFill/>
-        </p:spPr>
-        <p:txBody>
-          <a:bodyPr wrap="square">
-            <a:spAutoFit/>
-          </a:bodyPr>
-          <a:lstStyle/>
-          <a:p>
-            <a:pPr algn="l">
-              <a:lnSpc>
-                <a:spcPct val="110000"/>
-              </a:lnSpc>
-            </a:pPr>
-            <a:r>
-              <a:rPr sz="1200" b="0" i="0">
-                <a:solidFill>
-                  <a:srgbClr val="222222"/>
-                </a:solidFill>
-                <a:latin typeface="Calibri"/>
-              </a:rPr>
-              <a:t>Should Stage 2 use asymmetric, per-pair alignment decisions across modality pairs?</a:t>
-            </a:r>
-          </a:p>
-        </p:txBody>
-      </p:sp>
-      <p:sp>
-        <p:nvSpPr>
-          <p:cNvPr id="21" name="TextBox 20"/>
-          <p:cNvSpPr txBox="1"/>
-          <p:nvPr/>
-        </p:nvSpPr>
-        <p:spPr>
-          <a:xfrm>
-            <a:off x="6080760" y="4443984"/>
-            <a:ext cx="457200" cy="365760"/>
-          </a:xfrm>
-          <a:prstGeom prst="rect">
-            <a:avLst/>
-          </a:prstGeom>
-          <a:noFill/>
-        </p:spPr>
-        <p:txBody>
-          <a:bodyPr wrap="square">
-            <a:spAutoFit/>
-          </a:bodyPr>
-          <a:lstStyle/>
-          <a:p>
-            <a:pPr algn="l"/>
-            <a:r>
-              <a:rPr sz="1500" b="1" i="0">
-                <a:solidFill>
-                  <a:srgbClr val="2C5F2D"/>
-                </a:solidFill>
-                <a:latin typeface="Cambria"/>
-              </a:rPr>
-              <a:t>04</a:t>
-            </a:r>
-          </a:p>
-        </p:txBody>
-      </p:sp>
-      <p:sp>
-        <p:nvSpPr>
-          <p:cNvPr id="22" name="TextBox 21"/>
-          <p:cNvSpPr txBox="1"/>
-          <p:nvPr/>
-        </p:nvSpPr>
-        <p:spPr>
-          <a:xfrm>
-            <a:off x="6537960" y="4443984"/>
-            <a:ext cx="4709160" cy="685800"/>
-          </a:xfrm>
-          <a:prstGeom prst="rect">
-            <a:avLst/>
-          </a:prstGeom>
-          <a:noFill/>
-        </p:spPr>
-        <p:txBody>
-          <a:bodyPr wrap="square">
-            <a:spAutoFit/>
-          </a:bodyPr>
-          <a:lstStyle/>
-          <a:p>
-            <a:pPr algn="l">
-              <a:lnSpc>
-                <a:spcPct val="110000"/>
-              </a:lnSpc>
-            </a:pPr>
-            <a:r>
-              <a:rPr sz="1200" b="0" i="0">
-                <a:solidFill>
-                  <a:srgbClr val="222222"/>
-                </a:solidFill>
-                <a:latin typeface="Calibri"/>
-              </a:rPr>
-              <a:t>Is the shared subspace compositional (GC-linked), or something more specific worth checking?</a:t>
-            </a:r>
-          </a:p>
-        </p:txBody>
-      </p:sp>
-      <p:sp>
-        <p:nvSpPr>
-          <p:cNvPr id="23" name="Rectangle 22"/>
-          <p:cNvSpPr/>
-          <p:nvPr/>
-        </p:nvSpPr>
-        <p:spPr>
-          <a:xfrm>
-            <a:off x="640080" y="5715000"/>
-            <a:ext cx="54864" cy="914400"/>
-          </a:xfrm>
-          <a:prstGeom prst="rect">
-            <a:avLst/>
-          </a:prstGeom>
-          <a:solidFill>
-            <a:srgbClr val="2C5F2D"/>
-          </a:solidFill>
-          <a:ln>
-            <a:noFill/>
-          </a:ln>
-          <a:effectLst/>
-        </p:spPr>
-        <p:style>
-          <a:lnRef idx="1">
-            <a:schemeClr val="accent1"/>
-          </a:lnRef>
-          <a:fillRef idx="3">
-            <a:schemeClr val="accent1"/>
-          </a:fillRef>
-          <a:effectRef idx="2">
-            <a:schemeClr val="accent1"/>
-          </a:effectRef>
-          <a:fontRef idx="minor">
-            <a:schemeClr val="lt1"/>
-          </a:fontRef>
-        </p:style>
-        <p:txBody>
-          <a:bodyPr rtlCol="0" anchor="ctr"/>
-          <a:lstStyle/>
-          <a:p>
-            <a:pPr algn="ctr"/>
+            <a:endParaRPr/>
           </a:p>
         </p:txBody>
       </p:sp>
@@ -4441,7 +4297,7 @@
         <p:spPr>
           <a:xfrm>
             <a:off x="868680" y="5669280"/>
-            <a:ext cx="10332720" cy="822960"/>
+            <a:ext cx="10332720" cy="566758"/>
           </a:xfrm>
           <a:prstGeom prst="rect">
             <a:avLst/>
@@ -4460,13 +4316,31 @@
               </a:lnSpc>
             </a:pPr>
             <a:r>
-              <a:rPr sz="1400" b="0" i="1">
+              <a:rPr sz="1400" b="0" i="1" dirty="0">
                 <a:solidFill>
                   <a:srgbClr val="222222"/>
                 </a:solidFill>
                 <a:latin typeface="Cambria"/>
               </a:rPr>
-              <a:t>Stage 1 is now substantially complete across all three tracks: real signal in both modalities, one specific shared subspace confirmed four independent ways, and a fully re-run attention-motif test that remains null even against the correct biological ground truth.</a:t>
+              <a:t>Stage 1's findings point toward a narrow, real shared subspace worth exploiting rather than forcing broader alignment. </a:t>
+            </a:r>
+            <a:r>
+              <a:rPr lang="en-US" sz="1400" b="0" i="1" dirty="0">
+                <a:solidFill>
+                  <a:srgbClr val="222222"/>
+                </a:solidFill>
+                <a:latin typeface="Cambria"/>
+              </a:rPr>
+              <a:t>What does this </a:t>
+            </a:r>
+            <a:r>
+              <a:rPr sz="1400" b="0" i="1" dirty="0">
+                <a:solidFill>
+                  <a:srgbClr val="222222"/>
+                </a:solidFill>
+                <a:latin typeface="Cambria"/>
+              </a:rPr>
+              <a:t>mean for Stage 2's design and which fusion architecture to prototype first.</a:t>
             </a:r>
           </a:p>
         </p:txBody>

--- a/Notes/Mina_Meeting_Slides_2026-09-23.pptx
+++ b/Notes/Mina_Meeting_Slides_2026-09-23.pptx
@@ -911,7 +911,7 @@
                 <a:ea typeface="Cambria" pitchFamily="34" charset="-122"/>
                 <a:cs typeface="Cambria" pitchFamily="34" charset="-120"/>
               </a:rPr>
-              <a:t>Building a DNA, RNA, and Protein Fusion Pipeline</a:t>
+              <a:t>Building an RNA and Protein Fusion Pipeline</a:t>
             </a:r>
             <a:endParaRPr lang="en-US" sz="4000" dirty="0"/>
           </a:p>
@@ -953,119 +953,9 @@
                 <a:ea typeface="Calibri" pitchFamily="34" charset="-122"/>
                 <a:cs typeface="Calibri" pitchFamily="34" charset="-120"/>
               </a:rPr>
-              <a:t>DNA, RNA, and protein are read today by separate foundation models. This project tests whether fusing them captures real biological signal those models miss on their own, using a rigorous pipeline rather than picking an architecture and hoping it works.</a:t>
+              <a:t>RNA and protein are each read today by separate foundation models, even though they're two connected layers of the same underlying biology. This project tests whether fusing them captures real biological signal those models miss on their own, using a rigorous pipeline rather than picking an architecture and hoping it works.</a:t>
             </a:r>
             <a:endParaRPr lang="en-US" sz="1500" dirty="0"/>
-          </a:p>
-        </p:txBody>
-      </p:sp>
-      <p:sp>
-        <p:nvSpPr>
-          <p:cNvPr id="5" name="Shape 3"/>
-          <p:cNvSpPr/>
-          <p:nvPr/>
-        </p:nvSpPr>
-        <p:spPr>
-          <a:xfrm>
-            <a:off x="1005840" y="3977640"/>
-            <a:ext cx="1920240" cy="1920240"/>
-          </a:xfrm>
-          <a:prstGeom prst="ellipse">
-            <a:avLst/>
-          </a:prstGeom>
-          <a:solidFill>
-            <a:srgbClr val="97BC62"/>
-          </a:solidFill>
-          <a:ln w="19050">
-            <a:solidFill>
-              <a:srgbClr val="FFFFFF"/>
-            </a:solidFill>
-            <a:prstDash val="solid"/>
-          </a:ln>
-        </p:spPr>
-        <p:txBody>
-          <a:bodyPr/>
-          <a:lstStyle/>
-          <a:p>
-            <a:endParaRPr lang="en-US"/>
-          </a:p>
-        </p:txBody>
-      </p:sp>
-      <p:sp>
-        <p:nvSpPr>
-          <p:cNvPr id="6" name="Text 4"/>
-          <p:cNvSpPr txBox="1"/>
-          <p:nvPr/>
-        </p:nvSpPr>
-        <p:spPr>
-          <a:xfrm>
-            <a:off x="1005840" y="4544568"/>
-            <a:ext cx="1920240" cy="365760"/>
-          </a:xfrm>
-          <a:prstGeom prst="rect">
-            <a:avLst/>
-          </a:prstGeom>
-          <a:noFill/>
-          <a:ln/>
-        </p:spPr>
-        <p:txBody>
-          <a:bodyPr wrap="square" lIns="0" tIns="0" rIns="0" bIns="0" rtlCol="0" anchor="ctr"/>
-          <a:lstStyle/>
-          <a:p>
-            <a:pPr marL="0" indent="0" algn="ctr">
-              <a:buNone/>
-            </a:pPr>
-            <a:r>
-              <a:rPr lang="en-US" sz="1500" b="1" dirty="0">
-                <a:solidFill>
-                  <a:srgbClr val="FFFFFF"/>
-                </a:solidFill>
-                <a:latin typeface="Calibri" pitchFamily="34" charset="0"/>
-                <a:ea typeface="Calibri" pitchFamily="34" charset="-122"/>
-                <a:cs typeface="Calibri" pitchFamily="34" charset="-120"/>
-              </a:rPr>
-              <a:t>DNA</a:t>
-            </a:r>
-            <a:endParaRPr lang="en-US" sz="1500" dirty="0"/>
-          </a:p>
-        </p:txBody>
-      </p:sp>
-      <p:sp>
-        <p:nvSpPr>
-          <p:cNvPr id="7" name="Text 5"/>
-          <p:cNvSpPr txBox="1"/>
-          <p:nvPr/>
-        </p:nvSpPr>
-        <p:spPr>
-          <a:xfrm>
-            <a:off x="1005840" y="4892040"/>
-            <a:ext cx="1920240" cy="274320"/>
-          </a:xfrm>
-          <a:prstGeom prst="rect">
-            <a:avLst/>
-          </a:prstGeom>
-          <a:noFill/>
-          <a:ln/>
-        </p:spPr>
-        <p:txBody>
-          <a:bodyPr wrap="square" lIns="0" tIns="0" rIns="0" bIns="0" rtlCol="0" anchor="ctr"/>
-          <a:lstStyle/>
-          <a:p>
-            <a:pPr marL="0" indent="0" algn="ctr">
-              <a:buNone/>
-            </a:pPr>
-            <a:r>
-              <a:rPr lang="en-US" sz="1000" dirty="0">
-                <a:solidFill>
-                  <a:srgbClr val="FFFFFF"/>
-                </a:solidFill>
-                <a:latin typeface="Calibri" pitchFamily="34" charset="0"/>
-                <a:ea typeface="Calibri" pitchFamily="34" charset="-122"/>
-                <a:cs typeface="Calibri" pitchFamily="34" charset="-120"/>
-              </a:rPr>
-              <a:t>encoder</a:t>
-            </a:r>
-            <a:endParaRPr lang="en-US" sz="1000" dirty="0"/>
           </a:p>
         </p:txBody>
       </p:sp>
@@ -1077,7 +967,7 @@
         </p:nvSpPr>
         <p:spPr>
           <a:xfrm>
-            <a:off x="5074920" y="3977640"/>
+            <a:off x="3101340" y="3977640"/>
             <a:ext cx="1920240" cy="1920240"/>
           </a:xfrm>
           <a:prstGeom prst="ellipse">
@@ -1109,7 +999,7 @@
         </p:nvSpPr>
         <p:spPr>
           <a:xfrm>
-            <a:off x="5074920" y="4544568"/>
+            <a:off x="3101340" y="4544568"/>
             <a:ext cx="1920240" cy="365760"/>
           </a:xfrm>
           <a:prstGeom prst="rect">
@@ -1148,7 +1038,7 @@
         </p:nvSpPr>
         <p:spPr>
           <a:xfrm>
-            <a:off x="5074920" y="4892040"/>
+            <a:off x="3101340" y="4892040"/>
             <a:ext cx="1920240" cy="274320"/>
           </a:xfrm>
           <a:prstGeom prst="rect">
@@ -1187,7 +1077,7 @@
         </p:nvSpPr>
         <p:spPr>
           <a:xfrm>
-            <a:off x="9144000" y="3977640"/>
+            <a:off x="7170420" y="3977640"/>
             <a:ext cx="1920240" cy="1920240"/>
           </a:xfrm>
           <a:prstGeom prst="ellipse">
@@ -1219,7 +1109,7 @@
         </p:nvSpPr>
         <p:spPr>
           <a:xfrm>
-            <a:off x="9144000" y="4544568"/>
+            <a:off x="7170420" y="4544568"/>
             <a:ext cx="1920240" cy="365760"/>
           </a:xfrm>
           <a:prstGeom prst="rect">
@@ -1258,7 +1148,7 @@
         </p:nvSpPr>
         <p:spPr>
           <a:xfrm>
-            <a:off x="9144000" y="4892040"/>
+            <a:off x="7170420" y="4892040"/>
             <a:ext cx="1920240" cy="274320"/>
           </a:xfrm>
           <a:prstGeom prst="rect">
@@ -1291,40 +1181,13 @@
       </p:sp>
       <p:sp>
         <p:nvSpPr>
-          <p:cNvPr id="14" name="Shape 12"/>
-          <p:cNvSpPr/>
-          <p:nvPr/>
-        </p:nvSpPr>
-        <p:spPr>
-          <a:xfrm>
-            <a:off x="3035808" y="4828032"/>
-            <a:ext cx="914400" cy="219456"/>
-          </a:xfrm>
-          <a:prstGeom prst="rightArrow">
-            <a:avLst/>
-          </a:prstGeom>
-          <a:solidFill>
-            <a:srgbClr val="97BC62"/>
-          </a:solidFill>
-          <a:ln/>
-        </p:spPr>
-        <p:txBody>
-          <a:bodyPr/>
-          <a:lstStyle/>
-          <a:p>
-            <a:endParaRPr lang="en-US"/>
-          </a:p>
-        </p:txBody>
-      </p:sp>
-      <p:sp>
-        <p:nvSpPr>
           <p:cNvPr id="15" name="Shape 13"/>
           <p:cNvSpPr/>
           <p:nvPr/>
         </p:nvSpPr>
         <p:spPr>
           <a:xfrm>
-            <a:off x="7104888" y="4828032"/>
+            <a:off x="5131308" y="4828032"/>
             <a:ext cx="914400" cy="219456"/>
           </a:xfrm>
           <a:prstGeom prst="rightArrow">
@@ -2022,7 +1885,7 @@
                 </a:solidFill>
                 <a:latin typeface="Calibri"/>
               </a:rPr>
-              <a:t>Build the architecture that combines the three modalities.</a:t>
+              <a:t>Build the architecture that combines the two modalities.</a:t>
             </a:r>
           </a:p>
         </p:txBody>
@@ -2447,7 +2310,7 @@
                 </a:solidFill>
                 <a:latin typeface="Calibri"/>
               </a:rPr>
-              <a:t>Decodability test: RNA R² = 0.059  ·  Protein R² = 0.113 (mRNA stability)</a:t>
+              <a:t>Decodability test: RNA R² = 0.048  ·  Protein R² = 0.115 (mRNA stability, leak-corrected)</a:t>
             </a:r>
           </a:p>
         </p:txBody>
@@ -2482,7 +2345,7 @@
                 </a:solidFill>
                 <a:latin typeface="Calibri"/>
               </a:rPr>
-              <a:t>GC content validity check: RNA R² = 0.986  ·  Protein R² = 0.681</a:t>
+              <a:t>GC content validity check: RNA R² = 0.985  ·  Protein R² = 0.688</a:t>
             </a:r>
           </a:p>
         </p:txBody>
@@ -2517,7 +2380,7 @@
                 </a:solidFill>
                 <a:latin typeface="Calibri"/>
               </a:rPr>
-              <a:t>Synergy check (concatenation): R² = 0.115, no gain over protein alone</a:t>
+              <a:t>Synergy check (concatenation): R² = 0.118, no gain over protein alone (0.115)</a:t>
             </a:r>
           </a:p>
         </p:txBody>
@@ -3363,7 +3226,7 @@
                 </a:solidFill>
                 <a:latin typeface="Cambria"/>
               </a:rPr>
-              <a:t>Alignment-Performance Slope and RSA</a:t>
+              <a:t>Alignment–Error Association and RSA</a:t>
             </a:r>
           </a:p>
         </p:txBody>
@@ -3398,7 +3261,7 @@
                 </a:solidFill>
                 <a:latin typeface="Calibri"/>
               </a:rPr>
-              <a:t>Alignment-vs-accuracy test: slope r = -0.013, p = 0.83, not significant</a:t>
+              <a:t>Alignment–error association: r = -0.013, p = 0.83, not significant (adapted diagnostic, not a replication of the ICML 2025 paper's own test)</a:t>
             </a:r>
           </a:p>
         </p:txBody>
@@ -3548,7 +3411,7 @@
                 </a:solidFill>
                 <a:latin typeface="Calibri"/>
               </a:rPr>
-              <a:t>The motif-overlap test has been re-run against real, literature-cited AU-rich-element and m6A motifs, and the result is still null: attention doesn't concentrate at these positions any more than the JASPAR test suggested. Unlike the first pass, the ground truth is now correct, so this is a genuine finding about the encoder, not a methodology artifact. The slope diagnostic agrees with Track B: local alignment doesn't predict performance, so an explicit alignment loss likely won't help Stage 2's fusion design.</a:t>
+              <a:t>The motif-overlap test has been re-run against real, literature-cited AU-rich-element and m6A motifs, and the result is still null: attention doesn't concentrate at these positions any more than the JASPAR test suggested. Unlike the first pass, the ground truth is now correct, so this is a genuine finding about the encoder, not a methodology artifact. The alignment–error association agrees with Track B: local alignment doesn't predict performance, so an explicit alignment loss likely won't help Stage 2's fusion design.</a:t>
             </a:r>
           </a:p>
         </p:txBody>
@@ -3778,7 +3641,7 @@
                 </a:solidFill>
                 <a:latin typeface="Calibri"/>
               </a:rPr>
-              <a:t>Move into Stage 2, defining the alignment target: Stage 1 found real shared structure a targeted method can find, but narrow enough that forcing more of it likely will not help.</a:t>
+              <a:t>Propose the alignment target: Stage 1 places this pair in the “low alignment, high synergy” branch of Mina's own decision tree — skip an explicit alignment loss and confirm the read with her.</a:t>
             </a:r>
           </a:p>
         </p:txBody>
@@ -3862,7 +3725,7 @@
                 </a:solidFill>
                 <a:latin typeface="Calibri"/>
               </a:rPr>
-              <a:t>Scope the fusion architecture candidates already researched, Coupled Mamba, Cross-Mamba, and mixture-of-experts fusion among them, against whatever alignment target comes out of Wednesday's discussion.</a:t>
+              <a:t>Confirm the fusion candidates: cross-attention and Coupled-Mamba are already settled per Mina's ask; Cross-Mamba and mixture-of-experts fusion stand by as fallbacks.</a:t>
             </a:r>
           </a:p>
         </p:txBody>
@@ -4322,25 +4185,175 @@
                 </a:solidFill>
                 <a:latin typeface="Cambria"/>
               </a:rPr>
-              <a:t>Stage 1's findings point toward a narrow, real shared subspace worth exploiting rather than forcing broader alignment. </a:t>
-            </a:r>
-            <a:r>
-              <a:rPr lang="en-US" sz="1400" b="0" i="1" dirty="0">
+              <a:t>Once these are confirmed: Stage 2 formalizes the alignment decision, Stage 3 builds and benchmarks both fusion architectures at scale, and Stage 4 tests whether fusion beats the best single-modality model.</a:t>
+            </a:r>
+          </a:p>
+        </p:txBody>
+      </p:sp>
+      <p:sp>
+        <p:nvSpPr>
+          <p:cNvPr id="11" name="Rectangle 10"/>
+          <p:cNvSpPr/>
+          <p:nvPr/>
+        </p:nvSpPr>
+        <p:spPr>
+          <a:xfrm>
+            <a:off x="640080" y="3785616"/>
+            <a:ext cx="128016" cy="27432"/>
+          </a:xfrm>
+          <a:prstGeom prst="rect">
+            <a:avLst/>
+          </a:prstGeom>
+          <a:solidFill>
+            <a:srgbClr val="97BC62"/>
+          </a:solidFill>
+          <a:ln>
+            <a:noFill/>
+          </a:ln>
+          <a:effectLst/>
+        </p:spPr>
+        <p:style>
+          <a:lnRef idx="1">
+            <a:schemeClr val="accent1"/>
+          </a:lnRef>
+          <a:fillRef idx="3">
+            <a:schemeClr val="accent1"/>
+          </a:fillRef>
+          <a:effectRef idx="2">
+            <a:schemeClr val="accent1"/>
+          </a:effectRef>
+          <a:fontRef idx="minor">
+            <a:schemeClr val="lt1"/>
+          </a:fontRef>
+        </p:style>
+        <p:txBody>
+          <a:bodyPr rtlCol="0" anchor="ctr"/>
+          <a:lstStyle/>
+          <a:p>
+            <a:pPr algn="ctr"/>
+            <a:endParaRPr/>
+          </a:p>
+        </p:txBody>
+      </p:sp>
+      <p:sp>
+        <p:nvSpPr>
+          <p:cNvPr id="12" name="TextBox 11"/>
+          <p:cNvSpPr txBox="1"/>
+          <p:nvPr/>
+        </p:nvSpPr>
+        <p:spPr>
+          <a:xfrm>
+            <a:off x="896112" y="3694176"/>
+            <a:ext cx="4727448" cy="685800"/>
+          </a:xfrm>
+          <a:prstGeom prst="rect">
+            <a:avLst/>
+          </a:prstGeom>
+          <a:noFill/>
+        </p:spPr>
+        <p:txBody>
+          <a:bodyPr wrap="square">
+            <a:spAutoFit/>
+          </a:bodyPr>
+          <a:lstStyle/>
+          <a:p>
+            <a:pPr algn="l">
+              <a:lnSpc>
+                <a:spcPct val="110000"/>
+              </a:lnSpc>
+            </a:pPr>
+            <a:r>
+              <a:rPr sz="1200" b="0" i="0">
                 <a:solidFill>
                   <a:srgbClr val="222222"/>
                 </a:solidFill>
-                <a:latin typeface="Cambria"/>
-              </a:rPr>
-              <a:t>What does this </a:t>
-            </a:r>
-            <a:r>
-              <a:rPr sz="1400" b="0" i="1" dirty="0">
+                <a:latin typeface="Calibri"/>
+              </a:rPr>
+              <a:t>Done: secondary-structure (Nussinov) probe reran under the corrected min-loop implementation — no longer pending.</a:t>
+            </a:r>
+          </a:p>
+        </p:txBody>
+      </p:sp>
+      <p:sp>
+        <p:nvSpPr>
+          <p:cNvPr id="11" name="Rectangle 10"/>
+          <p:cNvSpPr/>
+          <p:nvPr/>
+        </p:nvSpPr>
+        <p:spPr>
+          <a:xfrm>
+            <a:off x="640080" y="4535424"/>
+            <a:ext cx="128016" cy="27432"/>
+          </a:xfrm>
+          <a:prstGeom prst="rect">
+            <a:avLst/>
+          </a:prstGeom>
+          <a:solidFill>
+            <a:srgbClr val="97BC62"/>
+          </a:solidFill>
+          <a:ln>
+            <a:noFill/>
+          </a:ln>
+          <a:effectLst/>
+        </p:spPr>
+        <p:style>
+          <a:lnRef idx="1">
+            <a:schemeClr val="accent1"/>
+          </a:lnRef>
+          <a:fillRef idx="3">
+            <a:schemeClr val="accent1"/>
+          </a:fillRef>
+          <a:effectRef idx="2">
+            <a:schemeClr val="accent1"/>
+          </a:effectRef>
+          <a:fontRef idx="minor">
+            <a:schemeClr val="lt1"/>
+          </a:fontRef>
+        </p:style>
+        <p:txBody>
+          <a:bodyPr rtlCol="0" anchor="ctr"/>
+          <a:lstStyle/>
+          <a:p>
+            <a:pPr algn="ctr"/>
+            <a:endParaRPr/>
+          </a:p>
+        </p:txBody>
+      </p:sp>
+      <p:sp>
+        <p:nvSpPr>
+          <p:cNvPr id="12" name="TextBox 11"/>
+          <p:cNvSpPr txBox="1"/>
+          <p:nvPr/>
+        </p:nvSpPr>
+        <p:spPr>
+          <a:xfrm>
+            <a:off x="896112" y="4617720"/>
+            <a:ext cx="4727448" cy="685800"/>
+          </a:xfrm>
+          <a:prstGeom prst="rect">
+            <a:avLst/>
+          </a:prstGeom>
+          <a:noFill/>
+        </p:spPr>
+        <p:txBody>
+          <a:bodyPr wrap="square">
+            <a:spAutoFit/>
+          </a:bodyPr>
+          <a:lstStyle/>
+          <a:p>
+            <a:pPr algn="l">
+              <a:lnSpc>
+                <a:spcPct val="110000"/>
+              </a:lnSpc>
+            </a:pPr>
+            <a:r>
+              <a:rPr sz="1200" b="0" i="0">
                 <a:solidFill>
                   <a:srgbClr val="222222"/>
                 </a:solidFill>
-                <a:latin typeface="Cambria"/>
-              </a:rPr>
-              <a:t>mean for Stage 2's design and which fusion architecture to prototype first.</a:t>
+                <a:latin typeface="Calibri"/>
+              </a:rPr>
+              <a:t>Done: both evaluation leaks (scaler fit before CV; duplicate-sequence groups crossing folds) are fixed — Track A/B R² above are the corrected values.</a:t>
             </a:r>
           </a:p>
         </p:txBody>

--- a/Notes/Mina_Meeting_Slides_2026-09-23.pptx
+++ b/Notes/Mina_Meeting_Slides_2026-09-23.pptx
@@ -2310,7 +2310,7 @@
                 </a:solidFill>
                 <a:latin typeface="Calibri"/>
               </a:rPr>
-              <a:t>Decodability test: RNA R² = 0.048  ·  Protein R² = 0.115 (mRNA stability, leak-corrected)</a:t>
+              <a:t>Decodability test: RNA R² = 0.015  ·  Protein R² = 0.103 (mRNA stability, leak-corrected — RNA no longer distinguishable from zero)</a:t>
             </a:r>
           </a:p>
         </p:txBody>
@@ -2345,7 +2345,7 @@
                 </a:solidFill>
                 <a:latin typeface="Calibri"/>
               </a:rPr>
-              <a:t>GC content validity check: RNA R² = 0.985  ·  Protein R² = 0.688</a:t>
+              <a:t>GC content validity check: RNA R² = 0.986  ·  Protein R² = 0.678</a:t>
             </a:r>
           </a:p>
         </p:txBody>
@@ -2380,7 +2380,7 @@
                 </a:solidFill>
                 <a:latin typeface="Calibri"/>
               </a:rPr>
-              <a:t>Synergy check (concatenation): R² = 0.118, no gain over protein alone (0.115)</a:t>
+              <a:t>Synergy check (concatenation): R² = 0.100, no gain over protein alone (0.103)</a:t>
             </a:r>
           </a:p>
         </p:txBody>

--- a/Notes/Mina_Meeting_Slides_2026-09-23.pptx
+++ b/Notes/Mina_Meeting_Slides_2026-09-23.pptx
@@ -2310,7 +2310,7 @@
                 </a:solidFill>
                 <a:latin typeface="Calibri"/>
               </a:rPr>
-              <a:t>Decodability test: RNA R² = 0.015  ·  Protein R² = 0.103 (mRNA stability, leak-corrected — RNA no longer distinguishable from zero)</a:t>
+              <a:t>Decodability test: RNA R² = 0.048  ·  Protein R² = 0.115 (mRNA stability, leak-corrected)</a:t>
             </a:r>
           </a:p>
         </p:txBody>
@@ -2345,7 +2345,7 @@
                 </a:solidFill>
                 <a:latin typeface="Calibri"/>
               </a:rPr>
-              <a:t>GC content validity check: RNA R² = 0.986  ·  Protein R² = 0.678</a:t>
+              <a:t>GC content validity check: RNA R² = 0.985  ·  Protein R² = 0.688</a:t>
             </a:r>
           </a:p>
         </p:txBody>
@@ -2380,7 +2380,7 @@
                 </a:solidFill>
                 <a:latin typeface="Calibri"/>
               </a:rPr>
-              <a:t>Synergy check (concatenation): R² = 0.100, no gain over protein alone (0.103)</a:t>
+              <a:t>Synergy check (concatenation): R² = 0.118, no gain over protein alone (0.115)</a:t>
             </a:r>
           </a:p>
         </p:txBody>
@@ -3641,7 +3641,7 @@
                 </a:solidFill>
                 <a:latin typeface="Calibri"/>
               </a:rPr>
-              <a:t>Propose the alignment target: Stage 1 places this pair in the “low alignment, high synergy” branch of Mina's own decision tree — skip an explicit alignment loss and confirm the read with her.</a:t>
+              <a:t>Propose the alignment target: Stage 1 places this pair in the “low alignment, high synergy” branch of the decision tree — skip an explicit alignment loss, pending your read on it.</a:t>
             </a:r>
           </a:p>
         </p:txBody>
@@ -3725,7 +3725,7 @@
                 </a:solidFill>
                 <a:latin typeface="Calibri"/>
               </a:rPr>
-              <a:t>Confirm the fusion candidates: cross-attention and Coupled-Mamba are already settled per Mina's ask; Cross-Mamba and mixture-of-experts fusion stand by as fallbacks.</a:t>
+              <a:t>Confirm the fusion candidates: cross-attention and Coupled-Mamba as previously discussed; Cross-Mamba and mixture-of-experts fusion stand by as fallbacks.</a:t>
             </a:r>
           </a:p>
         </p:txBody>

--- a/Notes/Mina_Meeting_Slides_2026-09-23.pptx
+++ b/Notes/Mina_Meeting_Slides_2026-09-23.pptx
@@ -10,6 +10,7 @@
   <p:sldIdLst>
     <p:sldId id="256" r:id="rId2"/>
     <p:sldId id="257" r:id="rId3"/>
+    <p:sldId id="261" r:id="rId12"/>
     <p:sldId id="258" r:id="rId4"/>
     <p:sldId id="260" r:id="rId5"/>
     <p:sldId id="259" r:id="rId6"/>
@@ -2084,6 +2085,2824 @@
 </file>
 
 <file path=ppt/slides/slide3.xml><?xml version="1.0" encoding="utf-8"?>
+<p:sld xmlns:a="http://schemas.openxmlformats.org/drawingml/2006/main" xmlns:p="http://schemas.openxmlformats.org/presentationml/2006/main" xmlns:r="http://schemas.openxmlformats.org/officeDocument/2006/relationships">
+  <p:cSld>
+    <p:bg>
+      <p:bgPr>
+        <a:solidFill>
+          <a:srgbClr val="FFFFFF"/>
+        </a:solidFill>
+        <a:effectLst/>
+      </p:bgPr>
+    </p:bg>
+    <p:spTree>
+      <p:nvGrpSpPr>
+        <p:cNvPr id="1" name=""/>
+        <p:cNvGrpSpPr/>
+        <p:nvPr/>
+      </p:nvGrpSpPr>
+      <p:grpSpPr/>
+      <p:sp>
+        <p:nvSpPr>
+          <p:cNvPr id="2" name="TextBox 1"/>
+          <p:cNvSpPr txBox="1"/>
+          <p:nvPr/>
+        </p:nvSpPr>
+        <p:spPr>
+          <a:xfrm>
+            <a:off x="640080" y="457200"/>
+            <a:ext cx="6000000" cy="320040"/>
+          </a:xfrm>
+          <a:prstGeom prst="rect">
+            <a:avLst/>
+          </a:prstGeom>
+          <a:noFill/>
+        </p:spPr>
+        <p:txBody>
+          <a:bodyPr wrap="square" lIns="0" rIns="0" tIns="0" bIns="0" anchor="t">
+            <a:spAutoFit/>
+          </a:bodyPr>
+          <a:lstStyle/>
+          <a:p>
+            <a:pPr algn="l"/>
+            <a:r>
+              <a:rPr sz="1300" b="1">
+                <a:solidFill>
+                  <a:srgbClr val="2C5F2D"/>
+                </a:solidFill>
+                <a:latin typeface="Calibri"/>
+              </a:rPr>
+              <a:t>RELATED WORK</a:t>
+            </a:r>
+          </a:p>
+        </p:txBody>
+      </p:sp>
+      <p:sp>
+        <p:nvSpPr>
+          <p:cNvPr id="3" name="TextBox 2"/>
+          <p:cNvSpPr txBox="1"/>
+          <p:nvPr/>
+        </p:nvSpPr>
+        <p:spPr>
+          <a:xfrm>
+            <a:off x="640080" y="777240"/>
+            <a:ext cx="10911840" cy="600000"/>
+          </a:xfrm>
+          <a:prstGeom prst="rect">
+            <a:avLst/>
+          </a:prstGeom>
+          <a:noFill/>
+        </p:spPr>
+        <p:txBody>
+          <a:bodyPr wrap="square" lIns="0" rIns="0" tIns="0" bIns="0" anchor="t">
+            <a:spAutoFit/>
+          </a:bodyPr>
+          <a:lstStyle/>
+          <a:p>
+            <a:pPr algn="l"/>
+            <a:r>
+              <a:rPr sz="2800" b="1">
+                <a:solidFill>
+                  <a:srgbClr val="222222"/>
+                </a:solidFill>
+                <a:latin typeface="Cambria"/>
+              </a:rPr>
+              <a:t>How the Literature Shapes Our Architecture</a:t>
+            </a:r>
+          </a:p>
+        </p:txBody>
+      </p:sp>
+      <p:sp>
+        <p:nvSpPr>
+          <p:cNvPr id="4" name="TextBox 3"/>
+          <p:cNvSpPr txBox="1"/>
+          <p:nvPr/>
+        </p:nvSpPr>
+        <p:spPr>
+          <a:xfrm>
+            <a:off x="640080" y="1400000"/>
+            <a:ext cx="10911840" cy="380000"/>
+          </a:xfrm>
+          <a:prstGeom prst="rect">
+            <a:avLst/>
+          </a:prstGeom>
+          <a:noFill/>
+        </p:spPr>
+        <p:txBody>
+          <a:bodyPr wrap="square" lIns="0" rIns="0" tIns="0" bIns="0" anchor="t">
+            <a:spAutoFit/>
+          </a:bodyPr>
+          <a:lstStyle/>
+          <a:p>
+            <a:pPr algn="l"/>
+            <a:r>
+              <a:rPr sz="1400" b="0">
+                <a:solidFill>
+                  <a:srgbClr val="222222"/>
+                </a:solidFill>
+                <a:latin typeface="Calibri"/>
+              </a:rPr>
+              <a:t>Our encoders stay NT and ESM-2. Each paper contributes a design idea at the stage where it fits.</a:t>
+            </a:r>
+          </a:p>
+        </p:txBody>
+      </p:sp>
+      <p:sp>
+        <p:nvSpPr>
+          <p:cNvPr id="5" name="Rectangle 4"/>
+          <p:cNvSpPr/>
+          <p:nvPr/>
+        </p:nvSpPr>
+        <p:spPr>
+          <a:xfrm>
+            <a:off x="5171920" y="560000"/>
+            <a:ext cx="146304" cy="146304"/>
+          </a:xfrm>
+          <a:prstGeom prst="rect">
+            <a:avLst/>
+          </a:prstGeom>
+          <a:solidFill>
+            <a:srgbClr val="2C5F2D"/>
+          </a:solidFill>
+          <a:ln>
+            <a:noFill/>
+          </a:ln>
+          <a:effectLst/>
+        </p:spPr>
+        <p:style>
+          <a:lnRef idx="1">
+            <a:schemeClr val="accent1"/>
+          </a:lnRef>
+          <a:fillRef idx="3">
+            <a:schemeClr val="accent1"/>
+          </a:fillRef>
+          <a:effectRef idx="2">
+            <a:schemeClr val="accent1"/>
+          </a:effectRef>
+          <a:fontRef idx="minor">
+            <a:schemeClr val="lt1"/>
+          </a:fontRef>
+        </p:style>
+        <p:txBody>
+          <a:bodyPr rtlCol="0" anchor="ctr"/>
+          <a:lstStyle/>
+          <a:p>
+            <a:pPr algn="ctr"/>
+          </a:p>
+        </p:txBody>
+      </p:sp>
+      <p:sp>
+        <p:nvSpPr>
+          <p:cNvPr id="6" name="TextBox 5"/>
+          <p:cNvSpPr txBox="1"/>
+          <p:nvPr/>
+        </p:nvSpPr>
+        <p:spPr>
+          <a:xfrm>
+            <a:off x="5391920" y="500000"/>
+            <a:ext cx="1250000" cy="280000"/>
+          </a:xfrm>
+          <a:prstGeom prst="rect">
+            <a:avLst/>
+          </a:prstGeom>
+          <a:noFill/>
+        </p:spPr>
+        <p:txBody>
+          <a:bodyPr wrap="square" lIns="0" rIns="0" tIns="0" bIns="0" anchor="t">
+            <a:spAutoFit/>
+          </a:bodyPr>
+          <a:lstStyle/>
+          <a:p>
+            <a:pPr algn="l"/>
+            <a:r>
+              <a:rPr sz="1200" b="1">
+                <a:solidFill>
+                  <a:srgbClr val="222222"/>
+                </a:solidFill>
+                <a:latin typeface="Calibri"/>
+              </a:rPr>
+              <a:t>BioLangFusion</a:t>
+            </a:r>
+          </a:p>
+        </p:txBody>
+      </p:sp>
+      <p:sp>
+        <p:nvSpPr>
+          <p:cNvPr id="7" name="Rectangle 6"/>
+          <p:cNvSpPr/>
+          <p:nvPr/>
+        </p:nvSpPr>
+        <p:spPr>
+          <a:xfrm>
+            <a:off x="6621920" y="560000"/>
+            <a:ext cx="146304" cy="146304"/>
+          </a:xfrm>
+          <a:prstGeom prst="rect">
+            <a:avLst/>
+          </a:prstGeom>
+          <a:solidFill>
+            <a:srgbClr val="8DB48E"/>
+          </a:solidFill>
+          <a:ln>
+            <a:noFill/>
+          </a:ln>
+          <a:effectLst/>
+        </p:spPr>
+        <p:style>
+          <a:lnRef idx="1">
+            <a:schemeClr val="accent1"/>
+          </a:lnRef>
+          <a:fillRef idx="3">
+            <a:schemeClr val="accent1"/>
+          </a:fillRef>
+          <a:effectRef idx="2">
+            <a:schemeClr val="accent1"/>
+          </a:effectRef>
+          <a:fontRef idx="minor">
+            <a:schemeClr val="lt1"/>
+          </a:fontRef>
+        </p:style>
+        <p:txBody>
+          <a:bodyPr rtlCol="0" anchor="ctr"/>
+          <a:lstStyle/>
+          <a:p>
+            <a:pPr algn="ctr"/>
+          </a:p>
+        </p:txBody>
+      </p:sp>
+      <p:sp>
+        <p:nvSpPr>
+          <p:cNvPr id="8" name="TextBox 7"/>
+          <p:cNvSpPr txBox="1"/>
+          <p:nvPr/>
+        </p:nvSpPr>
+        <p:spPr>
+          <a:xfrm>
+            <a:off x="6841920" y="500000"/>
+            <a:ext cx="950000" cy="280000"/>
+          </a:xfrm>
+          <a:prstGeom prst="rect">
+            <a:avLst/>
+          </a:prstGeom>
+          <a:noFill/>
+        </p:spPr>
+        <p:txBody>
+          <a:bodyPr wrap="square" lIns="0" rIns="0" tIns="0" bIns="0" anchor="t">
+            <a:spAutoFit/>
+          </a:bodyPr>
+          <a:lstStyle/>
+          <a:p>
+            <a:pPr algn="l"/>
+            <a:r>
+              <a:rPr sz="1200" b="1">
+                <a:solidFill>
+                  <a:srgbClr val="222222"/>
+                </a:solidFill>
+                <a:latin typeface="Calibri"/>
+              </a:rPr>
+              <a:t>Isoformer</a:t>
+            </a:r>
+          </a:p>
+        </p:txBody>
+      </p:sp>
+      <p:sp>
+        <p:nvSpPr>
+          <p:cNvPr id="9" name="Rectangle 8"/>
+          <p:cNvSpPr/>
+          <p:nvPr/>
+        </p:nvSpPr>
+        <p:spPr>
+          <a:xfrm>
+            <a:off x="7771920" y="560000"/>
+            <a:ext cx="146304" cy="146304"/>
+          </a:xfrm>
+          <a:prstGeom prst="rect">
+            <a:avLst/>
+          </a:prstGeom>
+          <a:solidFill>
+            <a:srgbClr val="A6A6A6"/>
+          </a:solidFill>
+          <a:ln>
+            <a:noFill/>
+          </a:ln>
+          <a:effectLst/>
+        </p:spPr>
+        <p:style>
+          <a:lnRef idx="1">
+            <a:schemeClr val="accent1"/>
+          </a:lnRef>
+          <a:fillRef idx="3">
+            <a:schemeClr val="accent1"/>
+          </a:fillRef>
+          <a:effectRef idx="2">
+            <a:schemeClr val="accent1"/>
+          </a:effectRef>
+          <a:fontRef idx="minor">
+            <a:schemeClr val="lt1"/>
+          </a:fontRef>
+        </p:style>
+        <p:txBody>
+          <a:bodyPr rtlCol="0" anchor="ctr"/>
+          <a:lstStyle/>
+          <a:p>
+            <a:pPr algn="ctr"/>
+          </a:p>
+        </p:txBody>
+      </p:sp>
+      <p:sp>
+        <p:nvSpPr>
+          <p:cNvPr id="10" name="TextBox 9"/>
+          <p:cNvSpPr txBox="1"/>
+          <p:nvPr/>
+        </p:nvSpPr>
+        <p:spPr>
+          <a:xfrm>
+            <a:off x="7991920" y="500000"/>
+            <a:ext cx="600000" cy="280000"/>
+          </a:xfrm>
+          <a:prstGeom prst="rect">
+            <a:avLst/>
+          </a:prstGeom>
+          <a:noFill/>
+        </p:spPr>
+        <p:txBody>
+          <a:bodyPr wrap="square" lIns="0" rIns="0" tIns="0" bIns="0" anchor="t">
+            <a:spAutoFit/>
+          </a:bodyPr>
+          <a:lstStyle/>
+          <a:p>
+            <a:pPr algn="l"/>
+            <a:r>
+              <a:rPr sz="1200" b="1">
+                <a:solidFill>
+                  <a:srgbClr val="222222"/>
+                </a:solidFill>
+                <a:latin typeface="Calibri"/>
+              </a:rPr>
+              <a:t>CDT</a:t>
+            </a:r>
+          </a:p>
+        </p:txBody>
+      </p:sp>
+      <p:sp>
+        <p:nvSpPr>
+          <p:cNvPr id="11" name="Rectangle 10"/>
+          <p:cNvSpPr/>
+          <p:nvPr/>
+        </p:nvSpPr>
+        <p:spPr>
+          <a:xfrm>
+            <a:off x="8571920" y="560000"/>
+            <a:ext cx="146304" cy="146304"/>
+          </a:xfrm>
+          <a:prstGeom prst="rect">
+            <a:avLst/>
+          </a:prstGeom>
+          <a:solidFill>
+            <a:srgbClr val="C9A227"/>
+          </a:solidFill>
+          <a:ln>
+            <a:noFill/>
+          </a:ln>
+          <a:effectLst/>
+        </p:spPr>
+        <p:style>
+          <a:lnRef idx="1">
+            <a:schemeClr val="accent1"/>
+          </a:lnRef>
+          <a:fillRef idx="3">
+            <a:schemeClr val="accent1"/>
+          </a:fillRef>
+          <a:effectRef idx="2">
+            <a:schemeClr val="accent1"/>
+          </a:effectRef>
+          <a:fontRef idx="minor">
+            <a:schemeClr val="lt1"/>
+          </a:fontRef>
+        </p:style>
+        <p:txBody>
+          <a:bodyPr rtlCol="0" anchor="ctr"/>
+          <a:lstStyle/>
+          <a:p>
+            <a:pPr algn="ctr"/>
+          </a:p>
+        </p:txBody>
+      </p:sp>
+      <p:sp>
+        <p:nvSpPr>
+          <p:cNvPr id="12" name="TextBox 11"/>
+          <p:cNvSpPr txBox="1"/>
+          <p:nvPr/>
+        </p:nvSpPr>
+        <p:spPr>
+          <a:xfrm>
+            <a:off x="8791920" y="500000"/>
+            <a:ext cx="1250000" cy="280000"/>
+          </a:xfrm>
+          <a:prstGeom prst="rect">
+            <a:avLst/>
+          </a:prstGeom>
+          <a:noFill/>
+        </p:spPr>
+        <p:txBody>
+          <a:bodyPr wrap="square" lIns="0" rIns="0" tIns="0" bIns="0" anchor="t">
+            <a:spAutoFit/>
+          </a:bodyPr>
+          <a:lstStyle/>
+          <a:p>
+            <a:pPr algn="l"/>
+            <a:r>
+              <a:rPr sz="1200" b="1">
+                <a:solidFill>
+                  <a:srgbClr val="222222"/>
+                </a:solidFill>
+                <a:latin typeface="Calibri"/>
+              </a:rPr>
+              <a:t>Coupled Mamba</a:t>
+            </a:r>
+          </a:p>
+        </p:txBody>
+      </p:sp>
+      <p:sp>
+        <p:nvSpPr>
+          <p:cNvPr id="13" name="Rectangle 12"/>
+          <p:cNvSpPr/>
+          <p:nvPr/>
+        </p:nvSpPr>
+        <p:spPr>
+          <a:xfrm>
+            <a:off x="10021920" y="560000"/>
+            <a:ext cx="146304" cy="146304"/>
+          </a:xfrm>
+          <a:prstGeom prst="rect">
+            <a:avLst/>
+          </a:prstGeom>
+          <a:solidFill>
+            <a:srgbClr val="555555"/>
+          </a:solidFill>
+          <a:ln>
+            <a:noFill/>
+          </a:ln>
+          <a:effectLst/>
+        </p:spPr>
+        <p:style>
+          <a:lnRef idx="1">
+            <a:schemeClr val="accent1"/>
+          </a:lnRef>
+          <a:fillRef idx="3">
+            <a:schemeClr val="accent1"/>
+          </a:fillRef>
+          <a:effectRef idx="2">
+            <a:schemeClr val="accent1"/>
+          </a:effectRef>
+          <a:fontRef idx="minor">
+            <a:schemeClr val="lt1"/>
+          </a:fontRef>
+        </p:style>
+        <p:txBody>
+          <a:bodyPr rtlCol="0" anchor="ctr"/>
+          <a:lstStyle/>
+          <a:p>
+            <a:pPr algn="ctr"/>
+          </a:p>
+        </p:txBody>
+      </p:sp>
+      <p:sp>
+        <p:nvSpPr>
+          <p:cNvPr id="14" name="TextBox 13"/>
+          <p:cNvSpPr txBox="1"/>
+          <p:nvPr/>
+        </p:nvSpPr>
+        <p:spPr>
+          <a:xfrm>
+            <a:off x="10241920" y="500000"/>
+            <a:ext cx="1330000" cy="280000"/>
+          </a:xfrm>
+          <a:prstGeom prst="rect">
+            <a:avLst/>
+          </a:prstGeom>
+          <a:noFill/>
+        </p:spPr>
+        <p:txBody>
+          <a:bodyPr wrap="square" lIns="0" rIns="0" tIns="0" bIns="0" anchor="t">
+            <a:spAutoFit/>
+          </a:bodyPr>
+          <a:lstStyle/>
+          <a:p>
+            <a:pPr algn="l"/>
+            <a:r>
+              <a:rPr sz="1200" b="1">
+                <a:solidFill>
+                  <a:srgbClr val="222222"/>
+                </a:solidFill>
+                <a:latin typeface="Calibri"/>
+              </a:rPr>
+              <a:t>Alignment Theory</a:t>
+            </a:r>
+          </a:p>
+        </p:txBody>
+      </p:sp>
+      <p:sp>
+        <p:nvSpPr>
+          <p:cNvPr id="15" name="Rectangle 14"/>
+          <p:cNvSpPr/>
+          <p:nvPr/>
+        </p:nvSpPr>
+        <p:spPr>
+          <a:xfrm>
+            <a:off x="640080" y="1950000"/>
+            <a:ext cx="2502960" cy="900000"/>
+          </a:xfrm>
+          <a:prstGeom prst="rect">
+            <a:avLst/>
+          </a:prstGeom>
+          <a:solidFill>
+            <a:srgbClr val="F3F6F3"/>
+          </a:solidFill>
+          <a:ln w="15875">
+            <a:solidFill>
+              <a:srgbClr val="2C5F2D"/>
+            </a:solidFill>
+          </a:ln>
+          <a:effectLst/>
+        </p:spPr>
+        <p:style>
+          <a:lnRef idx="1">
+            <a:schemeClr val="accent1"/>
+          </a:lnRef>
+          <a:fillRef idx="3">
+            <a:schemeClr val="accent1"/>
+          </a:fillRef>
+          <a:effectRef idx="2">
+            <a:schemeClr val="accent1"/>
+          </a:effectRef>
+          <a:fontRef idx="minor">
+            <a:schemeClr val="lt1"/>
+          </a:fontRef>
+        </p:style>
+        <p:txBody>
+          <a:bodyPr rtlCol="0" anchor="ctr"/>
+          <a:lstStyle/>
+          <a:p>
+            <a:pPr algn="ctr"/>
+          </a:p>
+        </p:txBody>
+      </p:sp>
+      <p:sp>
+        <p:nvSpPr>
+          <p:cNvPr id="16" name="TextBox 15"/>
+          <p:cNvSpPr txBox="1"/>
+          <p:nvPr/>
+        </p:nvSpPr>
+        <p:spPr>
+          <a:xfrm>
+            <a:off x="640080" y="2040000"/>
+            <a:ext cx="2502960" cy="720000"/>
+          </a:xfrm>
+          <a:prstGeom prst="rect">
+            <a:avLst/>
+          </a:prstGeom>
+          <a:noFill/>
+        </p:spPr>
+        <p:txBody>
+          <a:bodyPr wrap="square" lIns="120000" rIns="120000" tIns="0" bIns="0" anchor="t">
+            <a:spAutoFit/>
+          </a:bodyPr>
+          <a:lstStyle/>
+          <a:p>
+            <a:pPr algn="l"/>
+            <a:r>
+              <a:rPr sz="1000" b="1">
+                <a:solidFill>
+                  <a:srgbClr val="2C5F2D"/>
+                </a:solidFill>
+                <a:latin typeface="Calibri"/>
+              </a:rPr>
+              <a:t>STAGE 1</a:t>
+            </a:r>
+          </a:p>
+          <a:p>
+            <a:pPr algn="l"/>
+            <a:r>
+              <a:rPr sz="1700" b="1">
+                <a:solidFill>
+                  <a:srgbClr val="222222"/>
+                </a:solidFill>
+                <a:latin typeface="Cambria"/>
+              </a:rPr>
+              <a:t>Frozen Encoders</a:t>
+            </a:r>
+          </a:p>
+          <a:p>
+            <a:pPr algn="l"/>
+            <a:r>
+              <a:rPr sz="1100" b="0">
+                <a:solidFill>
+                  <a:srgbClr val="555555"/>
+                </a:solidFill>
+                <a:latin typeface="Calibri"/>
+              </a:rPr>
+              <a:t>NT (RNA) + ESM-2 (protein)</a:t>
+            </a:r>
+          </a:p>
+        </p:txBody>
+      </p:sp>
+      <p:sp>
+        <p:nvSpPr>
+          <p:cNvPr id="17" name="Right Arrow 16"/>
+          <p:cNvSpPr/>
+          <p:nvPr/>
+        </p:nvSpPr>
+        <p:spPr>
+          <a:xfrm>
+            <a:off x="3193040" y="2300000"/>
+            <a:ext cx="200000" cy="200000"/>
+          </a:xfrm>
+          <a:prstGeom prst="rightArrow">
+            <a:avLst/>
+          </a:prstGeom>
+          <a:solidFill>
+            <a:srgbClr val="888888"/>
+          </a:solidFill>
+          <a:ln>
+            <a:noFill/>
+          </a:ln>
+          <a:effectLst/>
+        </p:spPr>
+        <p:style>
+          <a:lnRef idx="1">
+            <a:schemeClr val="accent1"/>
+          </a:lnRef>
+          <a:fillRef idx="3">
+            <a:schemeClr val="accent1"/>
+          </a:fillRef>
+          <a:effectRef idx="2">
+            <a:schemeClr val="accent1"/>
+          </a:effectRef>
+          <a:fontRef idx="minor">
+            <a:schemeClr val="lt1"/>
+          </a:fontRef>
+        </p:style>
+        <p:txBody>
+          <a:bodyPr rtlCol="0" anchor="ctr"/>
+          <a:lstStyle/>
+          <a:p>
+            <a:pPr algn="ctr"/>
+          </a:p>
+        </p:txBody>
+      </p:sp>
+      <p:sp>
+        <p:nvSpPr>
+          <p:cNvPr id="18" name="Rectangle 17"/>
+          <p:cNvSpPr/>
+          <p:nvPr/>
+        </p:nvSpPr>
+        <p:spPr>
+          <a:xfrm>
+            <a:off x="3443040" y="1950000"/>
+            <a:ext cx="2502960" cy="900000"/>
+          </a:xfrm>
+          <a:prstGeom prst="rect">
+            <a:avLst/>
+          </a:prstGeom>
+          <a:solidFill>
+            <a:srgbClr val="F3F6F3"/>
+          </a:solidFill>
+          <a:ln w="15875">
+            <a:solidFill>
+              <a:srgbClr val="2C5F2D"/>
+            </a:solidFill>
+          </a:ln>
+          <a:effectLst/>
+        </p:spPr>
+        <p:style>
+          <a:lnRef idx="1">
+            <a:schemeClr val="accent1"/>
+          </a:lnRef>
+          <a:fillRef idx="3">
+            <a:schemeClr val="accent1"/>
+          </a:fillRef>
+          <a:effectRef idx="2">
+            <a:schemeClr val="accent1"/>
+          </a:effectRef>
+          <a:fontRef idx="minor">
+            <a:schemeClr val="lt1"/>
+          </a:fontRef>
+        </p:style>
+        <p:txBody>
+          <a:bodyPr rtlCol="0" anchor="ctr"/>
+          <a:lstStyle/>
+          <a:p>
+            <a:pPr algn="ctr"/>
+          </a:p>
+        </p:txBody>
+      </p:sp>
+      <p:sp>
+        <p:nvSpPr>
+          <p:cNvPr id="19" name="TextBox 18"/>
+          <p:cNvSpPr txBox="1"/>
+          <p:nvPr/>
+        </p:nvSpPr>
+        <p:spPr>
+          <a:xfrm>
+            <a:off x="3443040" y="2040000"/>
+            <a:ext cx="2502960" cy="720000"/>
+          </a:xfrm>
+          <a:prstGeom prst="rect">
+            <a:avLst/>
+          </a:prstGeom>
+          <a:noFill/>
+        </p:spPr>
+        <p:txBody>
+          <a:bodyPr wrap="square" lIns="120000" rIns="120000" tIns="0" bIns="0" anchor="t">
+            <a:spAutoFit/>
+          </a:bodyPr>
+          <a:lstStyle/>
+          <a:p>
+            <a:pPr algn="l"/>
+            <a:r>
+              <a:rPr sz="1000" b="1">
+                <a:solidFill>
+                  <a:srgbClr val="2C5F2D"/>
+                </a:solidFill>
+                <a:latin typeface="Calibri"/>
+              </a:rPr>
+              <a:t>STAGE 2</a:t>
+            </a:r>
+          </a:p>
+          <a:p>
+            <a:pPr algn="l"/>
+            <a:r>
+              <a:rPr sz="1700" b="1">
+                <a:solidFill>
+                  <a:srgbClr val="222222"/>
+                </a:solidFill>
+                <a:latin typeface="Cambria"/>
+              </a:rPr>
+              <a:t>Align</a:t>
+            </a:r>
+          </a:p>
+          <a:p>
+            <a:pPr algn="l"/>
+            <a:r>
+              <a:rPr sz="1100" b="0">
+                <a:solidFill>
+                  <a:srgbClr val="555555"/>
+                </a:solidFill>
+                <a:latin typeface="Calibri"/>
+              </a:rPr>
+              <a:t>Choose the alignment target</a:t>
+            </a:r>
+          </a:p>
+        </p:txBody>
+      </p:sp>
+      <p:sp>
+        <p:nvSpPr>
+          <p:cNvPr id="20" name="Right Arrow 19"/>
+          <p:cNvSpPr/>
+          <p:nvPr/>
+        </p:nvSpPr>
+        <p:spPr>
+          <a:xfrm>
+            <a:off x="5996000" y="2300000"/>
+            <a:ext cx="200000" cy="200000"/>
+          </a:xfrm>
+          <a:prstGeom prst="rightArrow">
+            <a:avLst/>
+          </a:prstGeom>
+          <a:solidFill>
+            <a:srgbClr val="888888"/>
+          </a:solidFill>
+          <a:ln>
+            <a:noFill/>
+          </a:ln>
+          <a:effectLst/>
+        </p:spPr>
+        <p:style>
+          <a:lnRef idx="1">
+            <a:schemeClr val="accent1"/>
+          </a:lnRef>
+          <a:fillRef idx="3">
+            <a:schemeClr val="accent1"/>
+          </a:fillRef>
+          <a:effectRef idx="2">
+            <a:schemeClr val="accent1"/>
+          </a:effectRef>
+          <a:fontRef idx="minor">
+            <a:schemeClr val="lt1"/>
+          </a:fontRef>
+        </p:style>
+        <p:txBody>
+          <a:bodyPr rtlCol="0" anchor="ctr"/>
+          <a:lstStyle/>
+          <a:p>
+            <a:pPr algn="ctr"/>
+          </a:p>
+        </p:txBody>
+      </p:sp>
+      <p:sp>
+        <p:nvSpPr>
+          <p:cNvPr id="21" name="Rectangle 20"/>
+          <p:cNvSpPr/>
+          <p:nvPr/>
+        </p:nvSpPr>
+        <p:spPr>
+          <a:xfrm>
+            <a:off x="6246000" y="1950000"/>
+            <a:ext cx="2502960" cy="900000"/>
+          </a:xfrm>
+          <a:prstGeom prst="rect">
+            <a:avLst/>
+          </a:prstGeom>
+          <a:solidFill>
+            <a:srgbClr val="F3F6F3"/>
+          </a:solidFill>
+          <a:ln w="15875">
+            <a:solidFill>
+              <a:srgbClr val="2C5F2D"/>
+            </a:solidFill>
+          </a:ln>
+          <a:effectLst/>
+        </p:spPr>
+        <p:style>
+          <a:lnRef idx="1">
+            <a:schemeClr val="accent1"/>
+          </a:lnRef>
+          <a:fillRef idx="3">
+            <a:schemeClr val="accent1"/>
+          </a:fillRef>
+          <a:effectRef idx="2">
+            <a:schemeClr val="accent1"/>
+          </a:effectRef>
+          <a:fontRef idx="minor">
+            <a:schemeClr val="lt1"/>
+          </a:fontRef>
+        </p:style>
+        <p:txBody>
+          <a:bodyPr rtlCol="0" anchor="ctr"/>
+          <a:lstStyle/>
+          <a:p>
+            <a:pPr algn="ctr"/>
+          </a:p>
+        </p:txBody>
+      </p:sp>
+      <p:sp>
+        <p:nvSpPr>
+          <p:cNvPr id="22" name="TextBox 21"/>
+          <p:cNvSpPr txBox="1"/>
+          <p:nvPr/>
+        </p:nvSpPr>
+        <p:spPr>
+          <a:xfrm>
+            <a:off x="6246000" y="2040000"/>
+            <a:ext cx="2502960" cy="720000"/>
+          </a:xfrm>
+          <a:prstGeom prst="rect">
+            <a:avLst/>
+          </a:prstGeom>
+          <a:noFill/>
+        </p:spPr>
+        <p:txBody>
+          <a:bodyPr wrap="square" lIns="120000" rIns="120000" tIns="0" bIns="0" anchor="t">
+            <a:spAutoFit/>
+          </a:bodyPr>
+          <a:lstStyle/>
+          <a:p>
+            <a:pPr algn="l"/>
+            <a:r>
+              <a:rPr sz="1000" b="1">
+                <a:solidFill>
+                  <a:srgbClr val="2C5F2D"/>
+                </a:solidFill>
+                <a:latin typeface="Calibri"/>
+              </a:rPr>
+              <a:t>STAGE 3</a:t>
+            </a:r>
+          </a:p>
+          <a:p>
+            <a:pPr algn="l"/>
+            <a:r>
+              <a:rPr sz="1700" b="1">
+                <a:solidFill>
+                  <a:srgbClr val="222222"/>
+                </a:solidFill>
+                <a:latin typeface="Cambria"/>
+              </a:rPr>
+              <a:t>Fuse</a:t>
+            </a:r>
+          </a:p>
+          <a:p>
+            <a:pPr algn="l"/>
+            <a:r>
+              <a:rPr sz="1100" b="0">
+                <a:solidFill>
+                  <a:srgbClr val="555555"/>
+                </a:solidFill>
+                <a:latin typeface="Calibri"/>
+              </a:rPr>
+              <a:t>Cross-attention and Coupled-Mamba</a:t>
+            </a:r>
+          </a:p>
+        </p:txBody>
+      </p:sp>
+      <p:sp>
+        <p:nvSpPr>
+          <p:cNvPr id="23" name="Right Arrow 22"/>
+          <p:cNvSpPr/>
+          <p:nvPr/>
+        </p:nvSpPr>
+        <p:spPr>
+          <a:xfrm>
+            <a:off x="8798960" y="2300000"/>
+            <a:ext cx="200000" cy="200000"/>
+          </a:xfrm>
+          <a:prstGeom prst="rightArrow">
+            <a:avLst/>
+          </a:prstGeom>
+          <a:solidFill>
+            <a:srgbClr val="888888"/>
+          </a:solidFill>
+          <a:ln>
+            <a:noFill/>
+          </a:ln>
+          <a:effectLst/>
+        </p:spPr>
+        <p:style>
+          <a:lnRef idx="1">
+            <a:schemeClr val="accent1"/>
+          </a:lnRef>
+          <a:fillRef idx="3">
+            <a:schemeClr val="accent1"/>
+          </a:fillRef>
+          <a:effectRef idx="2">
+            <a:schemeClr val="accent1"/>
+          </a:effectRef>
+          <a:fontRef idx="minor">
+            <a:schemeClr val="lt1"/>
+          </a:fontRef>
+        </p:style>
+        <p:txBody>
+          <a:bodyPr rtlCol="0" anchor="ctr"/>
+          <a:lstStyle/>
+          <a:p>
+            <a:pPr algn="ctr"/>
+          </a:p>
+        </p:txBody>
+      </p:sp>
+      <p:sp>
+        <p:nvSpPr>
+          <p:cNvPr id="24" name="Rectangle 23"/>
+          <p:cNvSpPr/>
+          <p:nvPr/>
+        </p:nvSpPr>
+        <p:spPr>
+          <a:xfrm>
+            <a:off x="9048960" y="1950000"/>
+            <a:ext cx="2502960" cy="900000"/>
+          </a:xfrm>
+          <a:prstGeom prst="rect">
+            <a:avLst/>
+          </a:prstGeom>
+          <a:solidFill>
+            <a:srgbClr val="F3F6F3"/>
+          </a:solidFill>
+          <a:ln w="15875">
+            <a:solidFill>
+              <a:srgbClr val="2C5F2D"/>
+            </a:solidFill>
+          </a:ln>
+          <a:effectLst/>
+        </p:spPr>
+        <p:style>
+          <a:lnRef idx="1">
+            <a:schemeClr val="accent1"/>
+          </a:lnRef>
+          <a:fillRef idx="3">
+            <a:schemeClr val="accent1"/>
+          </a:fillRef>
+          <a:effectRef idx="2">
+            <a:schemeClr val="accent1"/>
+          </a:effectRef>
+          <a:fontRef idx="minor">
+            <a:schemeClr val="lt1"/>
+          </a:fontRef>
+        </p:style>
+        <p:txBody>
+          <a:bodyPr rtlCol="0" anchor="ctr"/>
+          <a:lstStyle/>
+          <a:p>
+            <a:pPr algn="ctr"/>
+          </a:p>
+        </p:txBody>
+      </p:sp>
+      <p:sp>
+        <p:nvSpPr>
+          <p:cNvPr id="25" name="TextBox 24"/>
+          <p:cNvSpPr txBox="1"/>
+          <p:nvPr/>
+        </p:nvSpPr>
+        <p:spPr>
+          <a:xfrm>
+            <a:off x="9048960" y="2040000"/>
+            <a:ext cx="2502960" cy="720000"/>
+          </a:xfrm>
+          <a:prstGeom prst="rect">
+            <a:avLst/>
+          </a:prstGeom>
+          <a:noFill/>
+        </p:spPr>
+        <p:txBody>
+          <a:bodyPr wrap="square" lIns="120000" rIns="120000" tIns="0" bIns="0" anchor="t">
+            <a:spAutoFit/>
+          </a:bodyPr>
+          <a:lstStyle/>
+          <a:p>
+            <a:pPr algn="l"/>
+            <a:r>
+              <a:rPr sz="1000" b="1">
+                <a:solidFill>
+                  <a:srgbClr val="2C5F2D"/>
+                </a:solidFill>
+                <a:latin typeface="Calibri"/>
+              </a:rPr>
+              <a:t>STAGES 3 AND 4</a:t>
+            </a:r>
+          </a:p>
+          <a:p>
+            <a:pPr algn="l"/>
+            <a:r>
+              <a:rPr sz="1700" b="1">
+                <a:solidFill>
+                  <a:srgbClr val="222222"/>
+                </a:solidFill>
+                <a:latin typeface="Cambria"/>
+              </a:rPr>
+              <a:t>Test</a:t>
+            </a:r>
+          </a:p>
+          <a:p>
+            <a:pPr algn="l"/>
+            <a:r>
+              <a:rPr sz="1100" b="0">
+                <a:solidFill>
+                  <a:srgbClr val="555555"/>
+                </a:solidFill>
+                <a:latin typeface="Calibri"/>
+              </a:rPr>
+              <a:t>Ablation and benchmarking</a:t>
+            </a:r>
+          </a:p>
+        </p:txBody>
+      </p:sp>
+      <p:sp>
+        <p:nvSpPr>
+          <p:cNvPr id="26" name="Rectangle 25"/>
+          <p:cNvSpPr/>
+          <p:nvPr/>
+        </p:nvSpPr>
+        <p:spPr>
+          <a:xfrm>
+            <a:off x="1886988" y="2850000"/>
+            <a:ext cx="9144" cy="180000"/>
+          </a:xfrm>
+          <a:prstGeom prst="rect">
+            <a:avLst/>
+          </a:prstGeom>
+          <a:solidFill>
+            <a:srgbClr val="BBBBBB"/>
+          </a:solidFill>
+          <a:ln>
+            <a:noFill/>
+          </a:ln>
+          <a:effectLst/>
+        </p:spPr>
+        <p:style>
+          <a:lnRef idx="1">
+            <a:schemeClr val="accent1"/>
+          </a:lnRef>
+          <a:fillRef idx="3">
+            <a:schemeClr val="accent1"/>
+          </a:fillRef>
+          <a:effectRef idx="2">
+            <a:schemeClr val="accent1"/>
+          </a:effectRef>
+          <a:fontRef idx="minor">
+            <a:schemeClr val="lt1"/>
+          </a:fontRef>
+        </p:style>
+        <p:txBody>
+          <a:bodyPr rtlCol="0" anchor="ctr"/>
+          <a:lstStyle/>
+          <a:p>
+            <a:pPr algn="ctr"/>
+          </a:p>
+        </p:txBody>
+      </p:sp>
+      <p:sp>
+        <p:nvSpPr>
+          <p:cNvPr id="27" name="Rectangle 26"/>
+          <p:cNvSpPr/>
+          <p:nvPr/>
+        </p:nvSpPr>
+        <p:spPr>
+          <a:xfrm>
+            <a:off x="640080" y="3030000"/>
+            <a:ext cx="2502960" cy="580000"/>
+          </a:xfrm>
+          <a:prstGeom prst="rect">
+            <a:avLst/>
+          </a:prstGeom>
+          <a:solidFill>
+            <a:srgbClr val="F7F7F7"/>
+          </a:solidFill>
+          <a:ln>
+            <a:noFill/>
+          </a:ln>
+          <a:effectLst/>
+        </p:spPr>
+        <p:style>
+          <a:lnRef idx="1">
+            <a:schemeClr val="accent1"/>
+          </a:lnRef>
+          <a:fillRef idx="3">
+            <a:schemeClr val="accent1"/>
+          </a:fillRef>
+          <a:effectRef idx="2">
+            <a:schemeClr val="accent1"/>
+          </a:effectRef>
+          <a:fontRef idx="minor">
+            <a:schemeClr val="lt1"/>
+          </a:fontRef>
+        </p:style>
+        <p:txBody>
+          <a:bodyPr rtlCol="0" anchor="ctr"/>
+          <a:lstStyle/>
+          <a:p>
+            <a:pPr algn="ctr"/>
+          </a:p>
+        </p:txBody>
+      </p:sp>
+      <p:sp>
+        <p:nvSpPr>
+          <p:cNvPr id="28" name="Rectangle 27"/>
+          <p:cNvSpPr/>
+          <p:nvPr/>
+        </p:nvSpPr>
+        <p:spPr>
+          <a:xfrm>
+            <a:off x="640080" y="3030000"/>
+            <a:ext cx="64008" cy="580000"/>
+          </a:xfrm>
+          <a:prstGeom prst="rect">
+            <a:avLst/>
+          </a:prstGeom>
+          <a:solidFill>
+            <a:srgbClr val="555555"/>
+          </a:solidFill>
+          <a:ln>
+            <a:noFill/>
+          </a:ln>
+          <a:effectLst/>
+        </p:spPr>
+        <p:style>
+          <a:lnRef idx="1">
+            <a:schemeClr val="accent1"/>
+          </a:lnRef>
+          <a:fillRef idx="3">
+            <a:schemeClr val="accent1"/>
+          </a:fillRef>
+          <a:effectRef idx="2">
+            <a:schemeClr val="accent1"/>
+          </a:effectRef>
+          <a:fontRef idx="minor">
+            <a:schemeClr val="lt1"/>
+          </a:fontRef>
+        </p:style>
+        <p:txBody>
+          <a:bodyPr rtlCol="0" anchor="ctr"/>
+          <a:lstStyle/>
+          <a:p>
+            <a:pPr algn="ctr"/>
+          </a:p>
+        </p:txBody>
+      </p:sp>
+      <p:sp>
+        <p:nvSpPr>
+          <p:cNvPr id="29" name="TextBox 28"/>
+          <p:cNvSpPr txBox="1"/>
+          <p:nvPr/>
+        </p:nvSpPr>
+        <p:spPr>
+          <a:xfrm>
+            <a:off x="790080" y="3070000"/>
+            <a:ext cx="2282960" cy="500000"/>
+          </a:xfrm>
+          <a:prstGeom prst="rect">
+            <a:avLst/>
+          </a:prstGeom>
+          <a:noFill/>
+        </p:spPr>
+        <p:txBody>
+          <a:bodyPr wrap="square" lIns="0" rIns="0" tIns="0" bIns="0" anchor="t">
+            <a:spAutoFit/>
+          </a:bodyPr>
+          <a:lstStyle/>
+          <a:p>
+            <a:pPr algn="l"/>
+            <a:r>
+              <a:rPr sz="1100" b="1">
+                <a:solidFill>
+                  <a:srgbClr val="222222"/>
+                </a:solidFill>
+                <a:latin typeface="Calibri"/>
+              </a:rPr>
+              <a:t>Alignment Theory</a:t>
+            </a:r>
+          </a:p>
+          <a:p>
+            <a:pPr algn="l"/>
+            <a:r>
+              <a:rPr sz="1050" b="0">
+                <a:solidFill>
+                  <a:srgbClr val="222222"/>
+                </a:solidFill>
+                <a:latin typeface="Calibri"/>
+              </a:rPr>
+              <a:t>Exit test: place the pair on the redundancy vs. uniqueness map</a:t>
+            </a:r>
+          </a:p>
+        </p:txBody>
+      </p:sp>
+      <p:sp>
+        <p:nvSpPr>
+          <p:cNvPr id="30" name="Rectangle 29"/>
+          <p:cNvSpPr/>
+          <p:nvPr/>
+        </p:nvSpPr>
+        <p:spPr>
+          <a:xfrm>
+            <a:off x="640080" y="3680000"/>
+            <a:ext cx="2502960" cy="580000"/>
+          </a:xfrm>
+          <a:prstGeom prst="rect">
+            <a:avLst/>
+          </a:prstGeom>
+          <a:solidFill>
+            <a:srgbClr val="F7F7F7"/>
+          </a:solidFill>
+          <a:ln>
+            <a:noFill/>
+          </a:ln>
+          <a:effectLst/>
+        </p:spPr>
+        <p:style>
+          <a:lnRef idx="1">
+            <a:schemeClr val="accent1"/>
+          </a:lnRef>
+          <a:fillRef idx="3">
+            <a:schemeClr val="accent1"/>
+          </a:fillRef>
+          <a:effectRef idx="2">
+            <a:schemeClr val="accent1"/>
+          </a:effectRef>
+          <a:fontRef idx="minor">
+            <a:schemeClr val="lt1"/>
+          </a:fontRef>
+        </p:style>
+        <p:txBody>
+          <a:bodyPr rtlCol="0" anchor="ctr"/>
+          <a:lstStyle/>
+          <a:p>
+            <a:pPr algn="ctr"/>
+          </a:p>
+        </p:txBody>
+      </p:sp>
+      <p:sp>
+        <p:nvSpPr>
+          <p:cNvPr id="31" name="Rectangle 30"/>
+          <p:cNvSpPr/>
+          <p:nvPr/>
+        </p:nvSpPr>
+        <p:spPr>
+          <a:xfrm>
+            <a:off x="640080" y="3680000"/>
+            <a:ext cx="64008" cy="580000"/>
+          </a:xfrm>
+          <a:prstGeom prst="rect">
+            <a:avLst/>
+          </a:prstGeom>
+          <a:solidFill>
+            <a:srgbClr val="2C5F2D"/>
+          </a:solidFill>
+          <a:ln>
+            <a:noFill/>
+          </a:ln>
+          <a:effectLst/>
+        </p:spPr>
+        <p:style>
+          <a:lnRef idx="1">
+            <a:schemeClr val="accent1"/>
+          </a:lnRef>
+          <a:fillRef idx="3">
+            <a:schemeClr val="accent1"/>
+          </a:fillRef>
+          <a:effectRef idx="2">
+            <a:schemeClr val="accent1"/>
+          </a:effectRef>
+          <a:fontRef idx="minor">
+            <a:schemeClr val="lt1"/>
+          </a:fontRef>
+        </p:style>
+        <p:txBody>
+          <a:bodyPr rtlCol="0" anchor="ctr"/>
+          <a:lstStyle/>
+          <a:p>
+            <a:pPr algn="ctr"/>
+          </a:p>
+        </p:txBody>
+      </p:sp>
+      <p:sp>
+        <p:nvSpPr>
+          <p:cNvPr id="32" name="TextBox 31"/>
+          <p:cNvSpPr txBox="1"/>
+          <p:nvPr/>
+        </p:nvSpPr>
+        <p:spPr>
+          <a:xfrm>
+            <a:off x="790080" y="3720000"/>
+            <a:ext cx="2282960" cy="500000"/>
+          </a:xfrm>
+          <a:prstGeom prst="rect">
+            <a:avLst/>
+          </a:prstGeom>
+          <a:noFill/>
+        </p:spPr>
+        <p:txBody>
+          <a:bodyPr wrap="square" lIns="0" rIns="0" tIns="0" bIns="0" anchor="t">
+            <a:spAutoFit/>
+          </a:bodyPr>
+          <a:lstStyle/>
+          <a:p>
+            <a:pPr algn="l"/>
+            <a:r>
+              <a:rPr sz="1100" b="1">
+                <a:solidFill>
+                  <a:srgbClr val="222222"/>
+                </a:solidFill>
+                <a:latin typeface="Calibri"/>
+              </a:rPr>
+              <a:t>BioLangFusion</a:t>
+            </a:r>
+          </a:p>
+          <a:p>
+            <a:pPr algn="l"/>
+            <a:r>
+              <a:rPr sz="1050" b="0">
+                <a:solidFill>
+                  <a:srgbClr val="222222"/>
+                </a:solidFill>
+                <a:latin typeface="Calibri"/>
+              </a:rPr>
+              <a:t>Uses NT v2 + ESM-2 (plus RNA-FM), all kept frozen</a:t>
+            </a:r>
+          </a:p>
+        </p:txBody>
+      </p:sp>
+      <p:sp>
+        <p:nvSpPr>
+          <p:cNvPr id="33" name="Rectangle 32"/>
+          <p:cNvSpPr/>
+          <p:nvPr/>
+        </p:nvSpPr>
+        <p:spPr>
+          <a:xfrm>
+            <a:off x="640080" y="4330000"/>
+            <a:ext cx="2502960" cy="580000"/>
+          </a:xfrm>
+          <a:prstGeom prst="rect">
+            <a:avLst/>
+          </a:prstGeom>
+          <a:solidFill>
+            <a:srgbClr val="F7F7F7"/>
+          </a:solidFill>
+          <a:ln>
+            <a:noFill/>
+          </a:ln>
+          <a:effectLst/>
+        </p:spPr>
+        <p:style>
+          <a:lnRef idx="1">
+            <a:schemeClr val="accent1"/>
+          </a:lnRef>
+          <a:fillRef idx="3">
+            <a:schemeClr val="accent1"/>
+          </a:fillRef>
+          <a:effectRef idx="2">
+            <a:schemeClr val="accent1"/>
+          </a:effectRef>
+          <a:fontRef idx="minor">
+            <a:schemeClr val="lt1"/>
+          </a:fontRef>
+        </p:style>
+        <p:txBody>
+          <a:bodyPr rtlCol="0" anchor="ctr"/>
+          <a:lstStyle/>
+          <a:p>
+            <a:pPr algn="ctr"/>
+          </a:p>
+        </p:txBody>
+      </p:sp>
+      <p:sp>
+        <p:nvSpPr>
+          <p:cNvPr id="34" name="Rectangle 33"/>
+          <p:cNvSpPr/>
+          <p:nvPr/>
+        </p:nvSpPr>
+        <p:spPr>
+          <a:xfrm>
+            <a:off x="640080" y="4330000"/>
+            <a:ext cx="64008" cy="580000"/>
+          </a:xfrm>
+          <a:prstGeom prst="rect">
+            <a:avLst/>
+          </a:prstGeom>
+          <a:solidFill>
+            <a:srgbClr val="8DB48E"/>
+          </a:solidFill>
+          <a:ln>
+            <a:noFill/>
+          </a:ln>
+          <a:effectLst/>
+        </p:spPr>
+        <p:style>
+          <a:lnRef idx="1">
+            <a:schemeClr val="accent1"/>
+          </a:lnRef>
+          <a:fillRef idx="3">
+            <a:schemeClr val="accent1"/>
+          </a:fillRef>
+          <a:effectRef idx="2">
+            <a:schemeClr val="accent1"/>
+          </a:effectRef>
+          <a:fontRef idx="minor">
+            <a:schemeClr val="lt1"/>
+          </a:fontRef>
+        </p:style>
+        <p:txBody>
+          <a:bodyPr rtlCol="0" anchor="ctr"/>
+          <a:lstStyle/>
+          <a:p>
+            <a:pPr algn="ctr"/>
+          </a:p>
+        </p:txBody>
+      </p:sp>
+      <p:sp>
+        <p:nvSpPr>
+          <p:cNvPr id="35" name="TextBox 34"/>
+          <p:cNvSpPr txBox="1"/>
+          <p:nvPr/>
+        </p:nvSpPr>
+        <p:spPr>
+          <a:xfrm>
+            <a:off x="790080" y="4370000"/>
+            <a:ext cx="2282960" cy="500000"/>
+          </a:xfrm>
+          <a:prstGeom prst="rect">
+            <a:avLst/>
+          </a:prstGeom>
+          <a:noFill/>
+        </p:spPr>
+        <p:txBody>
+          <a:bodyPr wrap="square" lIns="0" rIns="0" tIns="0" bIns="0" anchor="t">
+            <a:spAutoFit/>
+          </a:bodyPr>
+          <a:lstStyle/>
+          <a:p>
+            <a:pPr algn="l"/>
+            <a:r>
+              <a:rPr sz="1100" b="1">
+                <a:solidFill>
+                  <a:srgbClr val="222222"/>
+                </a:solidFill>
+                <a:latin typeface="Calibri"/>
+              </a:rPr>
+              <a:t>Isoformer</a:t>
+            </a:r>
+          </a:p>
+          <a:p>
+            <a:pPr algn="l"/>
+            <a:r>
+              <a:rPr sz="1050" b="0">
+                <a:solidFill>
+                  <a:srgbClr val="222222"/>
+                </a:solidFill>
+                <a:latin typeface="Calibri"/>
+              </a:rPr>
+              <a:t>Uses NT v2 + ESM-2; trains only the fusion layer and head</a:t>
+            </a:r>
+          </a:p>
+        </p:txBody>
+      </p:sp>
+      <p:sp>
+        <p:nvSpPr>
+          <p:cNvPr id="36" name="Rectangle 35"/>
+          <p:cNvSpPr/>
+          <p:nvPr/>
+        </p:nvSpPr>
+        <p:spPr>
+          <a:xfrm>
+            <a:off x="4689948" y="2850000"/>
+            <a:ext cx="9144" cy="180000"/>
+          </a:xfrm>
+          <a:prstGeom prst="rect">
+            <a:avLst/>
+          </a:prstGeom>
+          <a:solidFill>
+            <a:srgbClr val="BBBBBB"/>
+          </a:solidFill>
+          <a:ln>
+            <a:noFill/>
+          </a:ln>
+          <a:effectLst/>
+        </p:spPr>
+        <p:style>
+          <a:lnRef idx="1">
+            <a:schemeClr val="accent1"/>
+          </a:lnRef>
+          <a:fillRef idx="3">
+            <a:schemeClr val="accent1"/>
+          </a:fillRef>
+          <a:effectRef idx="2">
+            <a:schemeClr val="accent1"/>
+          </a:effectRef>
+          <a:fontRef idx="minor">
+            <a:schemeClr val="lt1"/>
+          </a:fontRef>
+        </p:style>
+        <p:txBody>
+          <a:bodyPr rtlCol="0" anchor="ctr"/>
+          <a:lstStyle/>
+          <a:p>
+            <a:pPr algn="ctr"/>
+          </a:p>
+        </p:txBody>
+      </p:sp>
+      <p:sp>
+        <p:nvSpPr>
+          <p:cNvPr id="37" name="Rectangle 36"/>
+          <p:cNvSpPr/>
+          <p:nvPr/>
+        </p:nvSpPr>
+        <p:spPr>
+          <a:xfrm>
+            <a:off x="3443040" y="3030000"/>
+            <a:ext cx="2502960" cy="580000"/>
+          </a:xfrm>
+          <a:prstGeom prst="rect">
+            <a:avLst/>
+          </a:prstGeom>
+          <a:solidFill>
+            <a:srgbClr val="F7F7F7"/>
+          </a:solidFill>
+          <a:ln>
+            <a:noFill/>
+          </a:ln>
+          <a:effectLst/>
+        </p:spPr>
+        <p:style>
+          <a:lnRef idx="1">
+            <a:schemeClr val="accent1"/>
+          </a:lnRef>
+          <a:fillRef idx="3">
+            <a:schemeClr val="accent1"/>
+          </a:fillRef>
+          <a:effectRef idx="2">
+            <a:schemeClr val="accent1"/>
+          </a:effectRef>
+          <a:fontRef idx="minor">
+            <a:schemeClr val="lt1"/>
+          </a:fontRef>
+        </p:style>
+        <p:txBody>
+          <a:bodyPr rtlCol="0" anchor="ctr"/>
+          <a:lstStyle/>
+          <a:p>
+            <a:pPr algn="ctr"/>
+          </a:p>
+        </p:txBody>
+      </p:sp>
+      <p:sp>
+        <p:nvSpPr>
+          <p:cNvPr id="38" name="Rectangle 37"/>
+          <p:cNvSpPr/>
+          <p:nvPr/>
+        </p:nvSpPr>
+        <p:spPr>
+          <a:xfrm>
+            <a:off x="3443040" y="3030000"/>
+            <a:ext cx="64008" cy="580000"/>
+          </a:xfrm>
+          <a:prstGeom prst="rect">
+            <a:avLst/>
+          </a:prstGeom>
+          <a:solidFill>
+            <a:srgbClr val="555555"/>
+          </a:solidFill>
+          <a:ln>
+            <a:noFill/>
+          </a:ln>
+          <a:effectLst/>
+        </p:spPr>
+        <p:style>
+          <a:lnRef idx="1">
+            <a:schemeClr val="accent1"/>
+          </a:lnRef>
+          <a:fillRef idx="3">
+            <a:schemeClr val="accent1"/>
+          </a:fillRef>
+          <a:effectRef idx="2">
+            <a:schemeClr val="accent1"/>
+          </a:effectRef>
+          <a:fontRef idx="minor">
+            <a:schemeClr val="lt1"/>
+          </a:fontRef>
+        </p:style>
+        <p:txBody>
+          <a:bodyPr rtlCol="0" anchor="ctr"/>
+          <a:lstStyle/>
+          <a:p>
+            <a:pPr algn="ctr"/>
+          </a:p>
+        </p:txBody>
+      </p:sp>
+      <p:sp>
+        <p:nvSpPr>
+          <p:cNvPr id="39" name="TextBox 38"/>
+          <p:cNvSpPr txBox="1"/>
+          <p:nvPr/>
+        </p:nvSpPr>
+        <p:spPr>
+          <a:xfrm>
+            <a:off x="3593040" y="3070000"/>
+            <a:ext cx="2282960" cy="500000"/>
+          </a:xfrm>
+          <a:prstGeom prst="rect">
+            <a:avLst/>
+          </a:prstGeom>
+          <a:noFill/>
+        </p:spPr>
+        <p:txBody>
+          <a:bodyPr wrap="square" lIns="0" rIns="0" tIns="0" bIns="0" anchor="t">
+            <a:spAutoFit/>
+          </a:bodyPr>
+          <a:lstStyle/>
+          <a:p>
+            <a:pPr algn="l"/>
+            <a:r>
+              <a:rPr sz="1100" b="1">
+                <a:solidFill>
+                  <a:srgbClr val="222222"/>
+                </a:solidFill>
+                <a:latin typeface="Calibri"/>
+              </a:rPr>
+              <a:t>Alignment Theory</a:t>
+            </a:r>
+          </a:p>
+          <a:p>
+            <a:pPr algn="l"/>
+            <a:r>
+              <a:rPr sz="1050" b="0">
+                <a:solidFill>
+                  <a:srgbClr val="222222"/>
+                </a:solidFill>
+                <a:latin typeface="Calibri"/>
+              </a:rPr>
+              <a:t>Alignment-performance slope: does an alignment loss help?</a:t>
+            </a:r>
+          </a:p>
+        </p:txBody>
+      </p:sp>
+      <p:sp>
+        <p:nvSpPr>
+          <p:cNvPr id="40" name="Rectangle 39"/>
+          <p:cNvSpPr/>
+          <p:nvPr/>
+        </p:nvSpPr>
+        <p:spPr>
+          <a:xfrm>
+            <a:off x="3443040" y="3680000"/>
+            <a:ext cx="2502960" cy="580000"/>
+          </a:xfrm>
+          <a:prstGeom prst="rect">
+            <a:avLst/>
+          </a:prstGeom>
+          <a:solidFill>
+            <a:srgbClr val="F7F7F7"/>
+          </a:solidFill>
+          <a:ln>
+            <a:noFill/>
+          </a:ln>
+          <a:effectLst/>
+        </p:spPr>
+        <p:style>
+          <a:lnRef idx="1">
+            <a:schemeClr val="accent1"/>
+          </a:lnRef>
+          <a:fillRef idx="3">
+            <a:schemeClr val="accent1"/>
+          </a:fillRef>
+          <a:effectRef idx="2">
+            <a:schemeClr val="accent1"/>
+          </a:effectRef>
+          <a:fontRef idx="minor">
+            <a:schemeClr val="lt1"/>
+          </a:fontRef>
+        </p:style>
+        <p:txBody>
+          <a:bodyPr rtlCol="0" anchor="ctr"/>
+          <a:lstStyle/>
+          <a:p>
+            <a:pPr algn="ctr"/>
+          </a:p>
+        </p:txBody>
+      </p:sp>
+      <p:sp>
+        <p:nvSpPr>
+          <p:cNvPr id="41" name="Rectangle 40"/>
+          <p:cNvSpPr/>
+          <p:nvPr/>
+        </p:nvSpPr>
+        <p:spPr>
+          <a:xfrm>
+            <a:off x="3443040" y="3680000"/>
+            <a:ext cx="64008" cy="580000"/>
+          </a:xfrm>
+          <a:prstGeom prst="rect">
+            <a:avLst/>
+          </a:prstGeom>
+          <a:solidFill>
+            <a:srgbClr val="2C5F2D"/>
+          </a:solidFill>
+          <a:ln>
+            <a:noFill/>
+          </a:ln>
+          <a:effectLst/>
+        </p:spPr>
+        <p:style>
+          <a:lnRef idx="1">
+            <a:schemeClr val="accent1"/>
+          </a:lnRef>
+          <a:fillRef idx="3">
+            <a:schemeClr val="accent1"/>
+          </a:fillRef>
+          <a:effectRef idx="2">
+            <a:schemeClr val="accent1"/>
+          </a:effectRef>
+          <a:fontRef idx="minor">
+            <a:schemeClr val="lt1"/>
+          </a:fontRef>
+        </p:style>
+        <p:txBody>
+          <a:bodyPr rtlCol="0" anchor="ctr"/>
+          <a:lstStyle/>
+          <a:p>
+            <a:pPr algn="ctr"/>
+          </a:p>
+        </p:txBody>
+      </p:sp>
+      <p:sp>
+        <p:nvSpPr>
+          <p:cNvPr id="42" name="TextBox 41"/>
+          <p:cNvSpPr txBox="1"/>
+          <p:nvPr/>
+        </p:nvSpPr>
+        <p:spPr>
+          <a:xfrm>
+            <a:off x="3593040" y="3720000"/>
+            <a:ext cx="2282960" cy="500000"/>
+          </a:xfrm>
+          <a:prstGeom prst="rect">
+            <a:avLst/>
+          </a:prstGeom>
+          <a:noFill/>
+        </p:spPr>
+        <p:txBody>
+          <a:bodyPr wrap="square" lIns="0" rIns="0" tIns="0" bIns="0" anchor="t">
+            <a:spAutoFit/>
+          </a:bodyPr>
+          <a:lstStyle/>
+          <a:p>
+            <a:pPr algn="l"/>
+            <a:r>
+              <a:rPr sz="1100" b="1">
+                <a:solidFill>
+                  <a:srgbClr val="222222"/>
+                </a:solidFill>
+                <a:latin typeface="Calibri"/>
+              </a:rPr>
+              <a:t>BioLangFusion</a:t>
+            </a:r>
+          </a:p>
+          <a:p>
+            <a:pPr algn="l"/>
+            <a:r>
+              <a:rPr sz="1050" b="0">
+                <a:solidFill>
+                  <a:srgbClr val="222222"/>
+                </a:solidFill>
+                <a:latin typeface="Calibri"/>
+              </a:rPr>
+              <a:t>Codon-resolution resampling, if alignment turns out high</a:t>
+            </a:r>
+          </a:p>
+        </p:txBody>
+      </p:sp>
+      <p:sp>
+        <p:nvSpPr>
+          <p:cNvPr id="43" name="Rectangle 42"/>
+          <p:cNvSpPr/>
+          <p:nvPr/>
+        </p:nvSpPr>
+        <p:spPr>
+          <a:xfrm>
+            <a:off x="3443040" y="4330000"/>
+            <a:ext cx="2502960" cy="580000"/>
+          </a:xfrm>
+          <a:prstGeom prst="rect">
+            <a:avLst/>
+          </a:prstGeom>
+          <a:solidFill>
+            <a:srgbClr val="F7F7F7"/>
+          </a:solidFill>
+          <a:ln>
+            <a:noFill/>
+          </a:ln>
+          <a:effectLst/>
+        </p:spPr>
+        <p:style>
+          <a:lnRef idx="1">
+            <a:schemeClr val="accent1"/>
+          </a:lnRef>
+          <a:fillRef idx="3">
+            <a:schemeClr val="accent1"/>
+          </a:fillRef>
+          <a:effectRef idx="2">
+            <a:schemeClr val="accent1"/>
+          </a:effectRef>
+          <a:fontRef idx="minor">
+            <a:schemeClr val="lt1"/>
+          </a:fontRef>
+        </p:style>
+        <p:txBody>
+          <a:bodyPr rtlCol="0" anchor="ctr"/>
+          <a:lstStyle/>
+          <a:p>
+            <a:pPr algn="ctr"/>
+          </a:p>
+        </p:txBody>
+      </p:sp>
+      <p:sp>
+        <p:nvSpPr>
+          <p:cNvPr id="44" name="Rectangle 43"/>
+          <p:cNvSpPr/>
+          <p:nvPr/>
+        </p:nvSpPr>
+        <p:spPr>
+          <a:xfrm>
+            <a:off x="3443040" y="4330000"/>
+            <a:ext cx="64008" cy="580000"/>
+          </a:xfrm>
+          <a:prstGeom prst="rect">
+            <a:avLst/>
+          </a:prstGeom>
+          <a:solidFill>
+            <a:srgbClr val="A6A6A6"/>
+          </a:solidFill>
+          <a:ln>
+            <a:noFill/>
+          </a:ln>
+          <a:effectLst/>
+        </p:spPr>
+        <p:style>
+          <a:lnRef idx="1">
+            <a:schemeClr val="accent1"/>
+          </a:lnRef>
+          <a:fillRef idx="3">
+            <a:schemeClr val="accent1"/>
+          </a:fillRef>
+          <a:effectRef idx="2">
+            <a:schemeClr val="accent1"/>
+          </a:effectRef>
+          <a:fontRef idx="minor">
+            <a:schemeClr val="lt1"/>
+          </a:fontRef>
+        </p:style>
+        <p:txBody>
+          <a:bodyPr rtlCol="0" anchor="ctr"/>
+          <a:lstStyle/>
+          <a:p>
+            <a:pPr algn="ctr"/>
+          </a:p>
+        </p:txBody>
+      </p:sp>
+      <p:sp>
+        <p:nvSpPr>
+          <p:cNvPr id="45" name="TextBox 44"/>
+          <p:cNvSpPr txBox="1"/>
+          <p:nvPr/>
+        </p:nvSpPr>
+        <p:spPr>
+          <a:xfrm>
+            <a:off x="3593040" y="4370000"/>
+            <a:ext cx="2282960" cy="500000"/>
+          </a:xfrm>
+          <a:prstGeom prst="rect">
+            <a:avLst/>
+          </a:prstGeom>
+          <a:noFill/>
+        </p:spPr>
+        <p:txBody>
+          <a:bodyPr wrap="square" lIns="0" rIns="0" tIns="0" bIns="0" anchor="t">
+            <a:spAutoFit/>
+          </a:bodyPr>
+          <a:lstStyle/>
+          <a:p>
+            <a:pPr algn="l"/>
+            <a:r>
+              <a:rPr sz="1100" b="1">
+                <a:solidFill>
+                  <a:srgbClr val="222222"/>
+                </a:solidFill>
+                <a:latin typeface="Calibri"/>
+              </a:rPr>
+              <a:t>CDT</a:t>
+            </a:r>
+          </a:p>
+          <a:p>
+            <a:pPr algn="l"/>
+            <a:r>
+              <a:rPr sz="1050" b="0">
+                <a:solidFill>
+                  <a:srgbClr val="222222"/>
+                </a:solidFill>
+                <a:latin typeface="Calibri"/>
+              </a:rPr>
+              <a:t>Decide alignment per modality pair, not one method for all (Q3)</a:t>
+            </a:r>
+          </a:p>
+        </p:txBody>
+      </p:sp>
+      <p:sp>
+        <p:nvSpPr>
+          <p:cNvPr id="46" name="Rectangle 45"/>
+          <p:cNvSpPr/>
+          <p:nvPr/>
+        </p:nvSpPr>
+        <p:spPr>
+          <a:xfrm>
+            <a:off x="7492908" y="2850000"/>
+            <a:ext cx="9144" cy="180000"/>
+          </a:xfrm>
+          <a:prstGeom prst="rect">
+            <a:avLst/>
+          </a:prstGeom>
+          <a:solidFill>
+            <a:srgbClr val="BBBBBB"/>
+          </a:solidFill>
+          <a:ln>
+            <a:noFill/>
+          </a:ln>
+          <a:effectLst/>
+        </p:spPr>
+        <p:style>
+          <a:lnRef idx="1">
+            <a:schemeClr val="accent1"/>
+          </a:lnRef>
+          <a:fillRef idx="3">
+            <a:schemeClr val="accent1"/>
+          </a:fillRef>
+          <a:effectRef idx="2">
+            <a:schemeClr val="accent1"/>
+          </a:effectRef>
+          <a:fontRef idx="minor">
+            <a:schemeClr val="lt1"/>
+          </a:fontRef>
+        </p:style>
+        <p:txBody>
+          <a:bodyPr rtlCol="0" anchor="ctr"/>
+          <a:lstStyle/>
+          <a:p>
+            <a:pPr algn="ctr"/>
+          </a:p>
+        </p:txBody>
+      </p:sp>
+      <p:sp>
+        <p:nvSpPr>
+          <p:cNvPr id="47" name="Rectangle 46"/>
+          <p:cNvSpPr/>
+          <p:nvPr/>
+        </p:nvSpPr>
+        <p:spPr>
+          <a:xfrm>
+            <a:off x="6246000" y="3030000"/>
+            <a:ext cx="2502960" cy="580000"/>
+          </a:xfrm>
+          <a:prstGeom prst="rect">
+            <a:avLst/>
+          </a:prstGeom>
+          <a:solidFill>
+            <a:srgbClr val="F7F7F7"/>
+          </a:solidFill>
+          <a:ln>
+            <a:noFill/>
+          </a:ln>
+          <a:effectLst/>
+        </p:spPr>
+        <p:style>
+          <a:lnRef idx="1">
+            <a:schemeClr val="accent1"/>
+          </a:lnRef>
+          <a:fillRef idx="3">
+            <a:schemeClr val="accent1"/>
+          </a:fillRef>
+          <a:effectRef idx="2">
+            <a:schemeClr val="accent1"/>
+          </a:effectRef>
+          <a:fontRef idx="minor">
+            <a:schemeClr val="lt1"/>
+          </a:fontRef>
+        </p:style>
+        <p:txBody>
+          <a:bodyPr rtlCol="0" anchor="ctr"/>
+          <a:lstStyle/>
+          <a:p>
+            <a:pPr algn="ctr"/>
+          </a:p>
+        </p:txBody>
+      </p:sp>
+      <p:sp>
+        <p:nvSpPr>
+          <p:cNvPr id="48" name="Rectangle 47"/>
+          <p:cNvSpPr/>
+          <p:nvPr/>
+        </p:nvSpPr>
+        <p:spPr>
+          <a:xfrm>
+            <a:off x="6246000" y="3030000"/>
+            <a:ext cx="64008" cy="580000"/>
+          </a:xfrm>
+          <a:prstGeom prst="rect">
+            <a:avLst/>
+          </a:prstGeom>
+          <a:solidFill>
+            <a:srgbClr val="8DB48E"/>
+          </a:solidFill>
+          <a:ln>
+            <a:noFill/>
+          </a:ln>
+          <a:effectLst/>
+        </p:spPr>
+        <p:style>
+          <a:lnRef idx="1">
+            <a:schemeClr val="accent1"/>
+          </a:lnRef>
+          <a:fillRef idx="3">
+            <a:schemeClr val="accent1"/>
+          </a:fillRef>
+          <a:effectRef idx="2">
+            <a:schemeClr val="accent1"/>
+          </a:effectRef>
+          <a:fontRef idx="minor">
+            <a:schemeClr val="lt1"/>
+          </a:fontRef>
+        </p:style>
+        <p:txBody>
+          <a:bodyPr rtlCol="0" anchor="ctr"/>
+          <a:lstStyle/>
+          <a:p>
+            <a:pPr algn="ctr"/>
+          </a:p>
+        </p:txBody>
+      </p:sp>
+      <p:sp>
+        <p:nvSpPr>
+          <p:cNvPr id="49" name="TextBox 48"/>
+          <p:cNvSpPr txBox="1"/>
+          <p:nvPr/>
+        </p:nvSpPr>
+        <p:spPr>
+          <a:xfrm>
+            <a:off x="6396000" y="3070000"/>
+            <a:ext cx="2282960" cy="500000"/>
+          </a:xfrm>
+          <a:prstGeom prst="rect">
+            <a:avLst/>
+          </a:prstGeom>
+          <a:noFill/>
+        </p:spPr>
+        <p:txBody>
+          <a:bodyPr wrap="square" lIns="0" rIns="0" tIns="0" bIns="0" anchor="t">
+            <a:spAutoFit/>
+          </a:bodyPr>
+          <a:lstStyle/>
+          <a:p>
+            <a:pPr algn="l"/>
+            <a:r>
+              <a:rPr sz="1100" b="1">
+                <a:solidFill>
+                  <a:srgbClr val="222222"/>
+                </a:solidFill>
+                <a:latin typeface="Calibri"/>
+              </a:rPr>
+              <a:t>Isoformer</a:t>
+            </a:r>
+          </a:p>
+          <a:p>
+            <a:pPr algn="l"/>
+            <a:r>
+              <a:rPr sz="1050" b="0">
+                <a:solidFill>
+                  <a:srgbClr val="222222"/>
+                </a:solidFill>
+                <a:latin typeface="Calibri"/>
+              </a:rPr>
+              <a:t>Cross-attention fusion, primary candidate</a:t>
+            </a:r>
+          </a:p>
+        </p:txBody>
+      </p:sp>
+      <p:sp>
+        <p:nvSpPr>
+          <p:cNvPr id="50" name="Rectangle 49"/>
+          <p:cNvSpPr/>
+          <p:nvPr/>
+        </p:nvSpPr>
+        <p:spPr>
+          <a:xfrm>
+            <a:off x="6246000" y="3680000"/>
+            <a:ext cx="2502960" cy="580000"/>
+          </a:xfrm>
+          <a:prstGeom prst="rect">
+            <a:avLst/>
+          </a:prstGeom>
+          <a:solidFill>
+            <a:srgbClr val="F7F7F7"/>
+          </a:solidFill>
+          <a:ln>
+            <a:noFill/>
+          </a:ln>
+          <a:effectLst/>
+        </p:spPr>
+        <p:style>
+          <a:lnRef idx="1">
+            <a:schemeClr val="accent1"/>
+          </a:lnRef>
+          <a:fillRef idx="3">
+            <a:schemeClr val="accent1"/>
+          </a:fillRef>
+          <a:effectRef idx="2">
+            <a:schemeClr val="accent1"/>
+          </a:effectRef>
+          <a:fontRef idx="minor">
+            <a:schemeClr val="lt1"/>
+          </a:fontRef>
+        </p:style>
+        <p:txBody>
+          <a:bodyPr rtlCol="0" anchor="ctr"/>
+          <a:lstStyle/>
+          <a:p>
+            <a:pPr algn="ctr"/>
+          </a:p>
+        </p:txBody>
+      </p:sp>
+      <p:sp>
+        <p:nvSpPr>
+          <p:cNvPr id="51" name="Rectangle 50"/>
+          <p:cNvSpPr/>
+          <p:nvPr/>
+        </p:nvSpPr>
+        <p:spPr>
+          <a:xfrm>
+            <a:off x="6246000" y="3680000"/>
+            <a:ext cx="64008" cy="580000"/>
+          </a:xfrm>
+          <a:prstGeom prst="rect">
+            <a:avLst/>
+          </a:prstGeom>
+          <a:solidFill>
+            <a:srgbClr val="C9A227"/>
+          </a:solidFill>
+          <a:ln>
+            <a:noFill/>
+          </a:ln>
+          <a:effectLst/>
+        </p:spPr>
+        <p:style>
+          <a:lnRef idx="1">
+            <a:schemeClr val="accent1"/>
+          </a:lnRef>
+          <a:fillRef idx="3">
+            <a:schemeClr val="accent1"/>
+          </a:fillRef>
+          <a:effectRef idx="2">
+            <a:schemeClr val="accent1"/>
+          </a:effectRef>
+          <a:fontRef idx="minor">
+            <a:schemeClr val="lt1"/>
+          </a:fontRef>
+        </p:style>
+        <p:txBody>
+          <a:bodyPr rtlCol="0" anchor="ctr"/>
+          <a:lstStyle/>
+          <a:p>
+            <a:pPr algn="ctr"/>
+          </a:p>
+        </p:txBody>
+      </p:sp>
+      <p:sp>
+        <p:nvSpPr>
+          <p:cNvPr id="52" name="TextBox 51"/>
+          <p:cNvSpPr txBox="1"/>
+          <p:nvPr/>
+        </p:nvSpPr>
+        <p:spPr>
+          <a:xfrm>
+            <a:off x="6396000" y="3720000"/>
+            <a:ext cx="2282960" cy="500000"/>
+          </a:xfrm>
+          <a:prstGeom prst="rect">
+            <a:avLst/>
+          </a:prstGeom>
+          <a:noFill/>
+        </p:spPr>
+        <p:txBody>
+          <a:bodyPr wrap="square" lIns="0" rIns="0" tIns="0" bIns="0" anchor="t">
+            <a:spAutoFit/>
+          </a:bodyPr>
+          <a:lstStyle/>
+          <a:p>
+            <a:pPr algn="l"/>
+            <a:r>
+              <a:rPr sz="1100" b="1">
+                <a:solidFill>
+                  <a:srgbClr val="222222"/>
+                </a:solidFill>
+                <a:latin typeface="Calibri"/>
+              </a:rPr>
+              <a:t>Coupled Mamba</a:t>
+            </a:r>
+          </a:p>
+          <a:p>
+            <a:pPr algn="l"/>
+            <a:r>
+              <a:rPr sz="1050" b="0">
+                <a:solidFill>
+                  <a:srgbClr val="222222"/>
+                </a:solidFill>
+                <a:latin typeface="Calibri"/>
+              </a:rPr>
+              <a:t>Linear-cost, alignment-free fusion, primary candidate</a:t>
+            </a:r>
+          </a:p>
+        </p:txBody>
+      </p:sp>
+      <p:sp>
+        <p:nvSpPr>
+          <p:cNvPr id="53" name="Rectangle 52"/>
+          <p:cNvSpPr/>
+          <p:nvPr/>
+        </p:nvSpPr>
+        <p:spPr>
+          <a:xfrm>
+            <a:off x="6246000" y="4330000"/>
+            <a:ext cx="2502960" cy="580000"/>
+          </a:xfrm>
+          <a:prstGeom prst="rect">
+            <a:avLst/>
+          </a:prstGeom>
+          <a:solidFill>
+            <a:srgbClr val="F7F7F7"/>
+          </a:solidFill>
+          <a:ln>
+            <a:noFill/>
+          </a:ln>
+          <a:effectLst/>
+        </p:spPr>
+        <p:style>
+          <a:lnRef idx="1">
+            <a:schemeClr val="accent1"/>
+          </a:lnRef>
+          <a:fillRef idx="3">
+            <a:schemeClr val="accent1"/>
+          </a:fillRef>
+          <a:effectRef idx="2">
+            <a:schemeClr val="accent1"/>
+          </a:effectRef>
+          <a:fontRef idx="minor">
+            <a:schemeClr val="lt1"/>
+          </a:fontRef>
+        </p:style>
+        <p:txBody>
+          <a:bodyPr rtlCol="0" anchor="ctr"/>
+          <a:lstStyle/>
+          <a:p>
+            <a:pPr algn="ctr"/>
+          </a:p>
+        </p:txBody>
+      </p:sp>
+      <p:sp>
+        <p:nvSpPr>
+          <p:cNvPr id="54" name="Rectangle 53"/>
+          <p:cNvSpPr/>
+          <p:nvPr/>
+        </p:nvSpPr>
+        <p:spPr>
+          <a:xfrm>
+            <a:off x="6246000" y="4330000"/>
+            <a:ext cx="64008" cy="580000"/>
+          </a:xfrm>
+          <a:prstGeom prst="rect">
+            <a:avLst/>
+          </a:prstGeom>
+          <a:solidFill>
+            <a:srgbClr val="2C5F2D"/>
+          </a:solidFill>
+          <a:ln>
+            <a:noFill/>
+          </a:ln>
+          <a:effectLst/>
+        </p:spPr>
+        <p:style>
+          <a:lnRef idx="1">
+            <a:schemeClr val="accent1"/>
+          </a:lnRef>
+          <a:fillRef idx="3">
+            <a:schemeClr val="accent1"/>
+          </a:fillRef>
+          <a:effectRef idx="2">
+            <a:schemeClr val="accent1"/>
+          </a:effectRef>
+          <a:fontRef idx="minor">
+            <a:schemeClr val="lt1"/>
+          </a:fontRef>
+        </p:style>
+        <p:txBody>
+          <a:bodyPr rtlCol="0" anchor="ctr"/>
+          <a:lstStyle/>
+          <a:p>
+            <a:pPr algn="ctr"/>
+          </a:p>
+        </p:txBody>
+      </p:sp>
+      <p:sp>
+        <p:nvSpPr>
+          <p:cNvPr id="55" name="TextBox 54"/>
+          <p:cNvSpPr txBox="1"/>
+          <p:nvPr/>
+        </p:nvSpPr>
+        <p:spPr>
+          <a:xfrm>
+            <a:off x="6396000" y="4370000"/>
+            <a:ext cx="2282960" cy="500000"/>
+          </a:xfrm>
+          <a:prstGeom prst="rect">
+            <a:avLst/>
+          </a:prstGeom>
+          <a:noFill/>
+        </p:spPr>
+        <p:txBody>
+          <a:bodyPr wrap="square" lIns="0" rIns="0" tIns="0" bIns="0" anchor="t">
+            <a:spAutoFit/>
+          </a:bodyPr>
+          <a:lstStyle/>
+          <a:p>
+            <a:pPr algn="l"/>
+            <a:r>
+              <a:rPr sz="1100" b="1">
+                <a:solidFill>
+                  <a:srgbClr val="222222"/>
+                </a:solidFill>
+                <a:latin typeface="Calibri"/>
+              </a:rPr>
+              <a:t>BioLangFusion</a:t>
+            </a:r>
+          </a:p>
+          <a:p>
+            <a:pPr algn="l"/>
+            <a:r>
+              <a:rPr sz="1050" b="0">
+                <a:solidFill>
+                  <a:srgbClr val="222222"/>
+                </a:solidFill>
+                <a:latin typeface="Calibri"/>
+              </a:rPr>
+              <a:t>Concat + MLP, the baseline every model must beat</a:t>
+            </a:r>
+          </a:p>
+        </p:txBody>
+      </p:sp>
+      <p:sp>
+        <p:nvSpPr>
+          <p:cNvPr id="56" name="Rectangle 55"/>
+          <p:cNvSpPr/>
+          <p:nvPr/>
+        </p:nvSpPr>
+        <p:spPr>
+          <a:xfrm>
+            <a:off x="6246000" y="4980000"/>
+            <a:ext cx="2502960" cy="580000"/>
+          </a:xfrm>
+          <a:prstGeom prst="rect">
+            <a:avLst/>
+          </a:prstGeom>
+          <a:solidFill>
+            <a:srgbClr val="F7F7F7"/>
+          </a:solidFill>
+          <a:ln>
+            <a:noFill/>
+          </a:ln>
+          <a:effectLst/>
+        </p:spPr>
+        <p:style>
+          <a:lnRef idx="1">
+            <a:schemeClr val="accent1"/>
+          </a:lnRef>
+          <a:fillRef idx="3">
+            <a:schemeClr val="accent1"/>
+          </a:fillRef>
+          <a:effectRef idx="2">
+            <a:schemeClr val="accent1"/>
+          </a:effectRef>
+          <a:fontRef idx="minor">
+            <a:schemeClr val="lt1"/>
+          </a:fontRef>
+        </p:style>
+        <p:txBody>
+          <a:bodyPr rtlCol="0" anchor="ctr"/>
+          <a:lstStyle/>
+          <a:p>
+            <a:pPr algn="ctr"/>
+          </a:p>
+        </p:txBody>
+      </p:sp>
+      <p:sp>
+        <p:nvSpPr>
+          <p:cNvPr id="57" name="Rectangle 56"/>
+          <p:cNvSpPr/>
+          <p:nvPr/>
+        </p:nvSpPr>
+        <p:spPr>
+          <a:xfrm>
+            <a:off x="6246000" y="4980000"/>
+            <a:ext cx="64008" cy="580000"/>
+          </a:xfrm>
+          <a:prstGeom prst="rect">
+            <a:avLst/>
+          </a:prstGeom>
+          <a:solidFill>
+            <a:srgbClr val="A6A6A6"/>
+          </a:solidFill>
+          <a:ln>
+            <a:noFill/>
+          </a:ln>
+          <a:effectLst/>
+        </p:spPr>
+        <p:style>
+          <a:lnRef idx="1">
+            <a:schemeClr val="accent1"/>
+          </a:lnRef>
+          <a:fillRef idx="3">
+            <a:schemeClr val="accent1"/>
+          </a:fillRef>
+          <a:effectRef idx="2">
+            <a:schemeClr val="accent1"/>
+          </a:effectRef>
+          <a:fontRef idx="minor">
+            <a:schemeClr val="lt1"/>
+          </a:fontRef>
+        </p:style>
+        <p:txBody>
+          <a:bodyPr rtlCol="0" anchor="ctr"/>
+          <a:lstStyle/>
+          <a:p>
+            <a:pPr algn="ctr"/>
+          </a:p>
+        </p:txBody>
+      </p:sp>
+      <p:sp>
+        <p:nvSpPr>
+          <p:cNvPr id="58" name="TextBox 57"/>
+          <p:cNvSpPr txBox="1"/>
+          <p:nvPr/>
+        </p:nvSpPr>
+        <p:spPr>
+          <a:xfrm>
+            <a:off x="6396000" y="5020000"/>
+            <a:ext cx="2282960" cy="500000"/>
+          </a:xfrm>
+          <a:prstGeom prst="rect">
+            <a:avLst/>
+          </a:prstGeom>
+          <a:noFill/>
+        </p:spPr>
+        <p:txBody>
+          <a:bodyPr wrap="square" lIns="0" rIns="0" tIns="0" bIns="0" anchor="t">
+            <a:spAutoFit/>
+          </a:bodyPr>
+          <a:lstStyle/>
+          <a:p>
+            <a:pPr algn="l"/>
+            <a:r>
+              <a:rPr sz="1100" b="1">
+                <a:solidFill>
+                  <a:srgbClr val="222222"/>
+                </a:solidFill>
+                <a:latin typeface="Calibri"/>
+              </a:rPr>
+              <a:t>CDT</a:t>
+            </a:r>
+          </a:p>
+          <a:p>
+            <a:pPr algn="l"/>
+            <a:r>
+              <a:rPr sz="1050" b="0">
+                <a:solidFill>
+                  <a:srgbClr val="222222"/>
+                </a:solidFill>
+                <a:latin typeface="Calibri"/>
+              </a:rPr>
+              <a:t>One-way DNA → RNA → protein attention, an interpretability idea</a:t>
+            </a:r>
+          </a:p>
+        </p:txBody>
+      </p:sp>
+      <p:sp>
+        <p:nvSpPr>
+          <p:cNvPr id="59" name="Rectangle 58"/>
+          <p:cNvSpPr/>
+          <p:nvPr/>
+        </p:nvSpPr>
+        <p:spPr>
+          <a:xfrm>
+            <a:off x="10295868" y="2850000"/>
+            <a:ext cx="9144" cy="180000"/>
+          </a:xfrm>
+          <a:prstGeom prst="rect">
+            <a:avLst/>
+          </a:prstGeom>
+          <a:solidFill>
+            <a:srgbClr val="BBBBBB"/>
+          </a:solidFill>
+          <a:ln>
+            <a:noFill/>
+          </a:ln>
+          <a:effectLst/>
+        </p:spPr>
+        <p:style>
+          <a:lnRef idx="1">
+            <a:schemeClr val="accent1"/>
+          </a:lnRef>
+          <a:fillRef idx="3">
+            <a:schemeClr val="accent1"/>
+          </a:fillRef>
+          <a:effectRef idx="2">
+            <a:schemeClr val="accent1"/>
+          </a:effectRef>
+          <a:fontRef idx="minor">
+            <a:schemeClr val="lt1"/>
+          </a:fontRef>
+        </p:style>
+        <p:txBody>
+          <a:bodyPr rtlCol="0" anchor="ctr"/>
+          <a:lstStyle/>
+          <a:p>
+            <a:pPr algn="ctr"/>
+          </a:p>
+        </p:txBody>
+      </p:sp>
+      <p:sp>
+        <p:nvSpPr>
+          <p:cNvPr id="60" name="Rectangle 59"/>
+          <p:cNvSpPr/>
+          <p:nvPr/>
+        </p:nvSpPr>
+        <p:spPr>
+          <a:xfrm>
+            <a:off x="9048960" y="3030000"/>
+            <a:ext cx="2502960" cy="580000"/>
+          </a:xfrm>
+          <a:prstGeom prst="rect">
+            <a:avLst/>
+          </a:prstGeom>
+          <a:solidFill>
+            <a:srgbClr val="F7F7F7"/>
+          </a:solidFill>
+          <a:ln>
+            <a:noFill/>
+          </a:ln>
+          <a:effectLst/>
+        </p:spPr>
+        <p:style>
+          <a:lnRef idx="1">
+            <a:schemeClr val="accent1"/>
+          </a:lnRef>
+          <a:fillRef idx="3">
+            <a:schemeClr val="accent1"/>
+          </a:fillRef>
+          <a:effectRef idx="2">
+            <a:schemeClr val="accent1"/>
+          </a:effectRef>
+          <a:fontRef idx="minor">
+            <a:schemeClr val="lt1"/>
+          </a:fontRef>
+        </p:style>
+        <p:txBody>
+          <a:bodyPr rtlCol="0" anchor="ctr"/>
+          <a:lstStyle/>
+          <a:p>
+            <a:pPr algn="ctr"/>
+          </a:p>
+        </p:txBody>
+      </p:sp>
+      <p:sp>
+        <p:nvSpPr>
+          <p:cNvPr id="61" name="Rectangle 60"/>
+          <p:cNvSpPr/>
+          <p:nvPr/>
+        </p:nvSpPr>
+        <p:spPr>
+          <a:xfrm>
+            <a:off x="9048960" y="3030000"/>
+            <a:ext cx="64008" cy="580000"/>
+          </a:xfrm>
+          <a:prstGeom prst="rect">
+            <a:avLst/>
+          </a:prstGeom>
+          <a:solidFill>
+            <a:srgbClr val="8DB48E"/>
+          </a:solidFill>
+          <a:ln>
+            <a:noFill/>
+          </a:ln>
+          <a:effectLst/>
+        </p:spPr>
+        <p:style>
+          <a:lnRef idx="1">
+            <a:schemeClr val="accent1"/>
+          </a:lnRef>
+          <a:fillRef idx="3">
+            <a:schemeClr val="accent1"/>
+          </a:fillRef>
+          <a:effectRef idx="2">
+            <a:schemeClr val="accent1"/>
+          </a:effectRef>
+          <a:fontRef idx="minor">
+            <a:schemeClr val="lt1"/>
+          </a:fontRef>
+        </p:style>
+        <p:txBody>
+          <a:bodyPr rtlCol="0" anchor="ctr"/>
+          <a:lstStyle/>
+          <a:p>
+            <a:pPr algn="ctr"/>
+          </a:p>
+        </p:txBody>
+      </p:sp>
+      <p:sp>
+        <p:nvSpPr>
+          <p:cNvPr id="62" name="TextBox 61"/>
+          <p:cNvSpPr txBox="1"/>
+          <p:nvPr/>
+        </p:nvSpPr>
+        <p:spPr>
+          <a:xfrm>
+            <a:off x="9198960" y="3070000"/>
+            <a:ext cx="2282960" cy="500000"/>
+          </a:xfrm>
+          <a:prstGeom prst="rect">
+            <a:avLst/>
+          </a:prstGeom>
+          <a:noFill/>
+        </p:spPr>
+        <p:txBody>
+          <a:bodyPr wrap="square" lIns="0" rIns="0" tIns="0" bIns="0" anchor="t">
+            <a:spAutoFit/>
+          </a:bodyPr>
+          <a:lstStyle/>
+          <a:p>
+            <a:pPr algn="l"/>
+            <a:r>
+              <a:rPr sz="1100" b="1">
+                <a:solidFill>
+                  <a:srgbClr val="222222"/>
+                </a:solidFill>
+                <a:latin typeface="Calibri"/>
+              </a:rPr>
+              <a:t>Isoformer</a:t>
+            </a:r>
+          </a:p>
+          <a:p>
+            <a:pPr algn="l"/>
+            <a:r>
+              <a:rPr sz="1050" b="0">
+                <a:solidFill>
+                  <a:srgbClr val="222222"/>
+                </a:solidFill>
+                <a:latin typeface="Calibri"/>
+              </a:rPr>
+              <a:t>Drop-one-encoder ablation: score should fall if fusion uses both</a:t>
+            </a:r>
+          </a:p>
+        </p:txBody>
+      </p:sp>
+      <p:sp>
+        <p:nvSpPr>
+          <p:cNvPr id="63" name="Rectangle 62"/>
+          <p:cNvSpPr/>
+          <p:nvPr/>
+        </p:nvSpPr>
+        <p:spPr>
+          <a:xfrm>
+            <a:off x="640080" y="5820000"/>
+            <a:ext cx="54864" cy="500000"/>
+          </a:xfrm>
+          <a:prstGeom prst="rect">
+            <a:avLst/>
+          </a:prstGeom>
+          <a:solidFill>
+            <a:srgbClr val="2C5F2D"/>
+          </a:solidFill>
+          <a:ln>
+            <a:noFill/>
+          </a:ln>
+          <a:effectLst/>
+        </p:spPr>
+        <p:style>
+          <a:lnRef idx="1">
+            <a:schemeClr val="accent1"/>
+          </a:lnRef>
+          <a:fillRef idx="3">
+            <a:schemeClr val="accent1"/>
+          </a:fillRef>
+          <a:effectRef idx="2">
+            <a:schemeClr val="accent1"/>
+          </a:effectRef>
+          <a:fontRef idx="minor">
+            <a:schemeClr val="lt1"/>
+          </a:fontRef>
+        </p:style>
+        <p:txBody>
+          <a:bodyPr rtlCol="0" anchor="ctr"/>
+          <a:lstStyle/>
+          <a:p>
+            <a:pPr algn="ctr"/>
+          </a:p>
+        </p:txBody>
+      </p:sp>
+      <p:sp>
+        <p:nvSpPr>
+          <p:cNvPr id="64" name="TextBox 63"/>
+          <p:cNvSpPr txBox="1"/>
+          <p:nvPr/>
+        </p:nvSpPr>
+        <p:spPr>
+          <a:xfrm>
+            <a:off x="868680" y="5820000"/>
+            <a:ext cx="10332720" cy="500000"/>
+          </a:xfrm>
+          <a:prstGeom prst="rect">
+            <a:avLst/>
+          </a:prstGeom>
+          <a:noFill/>
+        </p:spPr>
+        <p:txBody>
+          <a:bodyPr wrap="square" lIns="0" rIns="0" tIns="0" bIns="0" anchor="ctr">
+            <a:spAutoFit/>
+          </a:bodyPr>
+          <a:lstStyle/>
+          <a:p>
+            <a:pPr algn="l"/>
+            <a:r>
+              <a:rPr sz="1400" b="0">
+                <a:solidFill>
+                  <a:srgbClr val="222222"/>
+                </a:solidFill>
+                <a:latin typeface="Cambria"/>
+              </a:rPr>
+              <a:t>Our contribution is the method for deciding whether and how to fuse, not a new fusion model.</a:t>
+            </a:r>
+          </a:p>
+        </p:txBody>
+      </p:sp>
+    </p:spTree>
+  </p:cSld>
+  <p:clrMapOvr>
+    <a:masterClrMapping/>
+  </p:clrMapOvr>
+</p:sld>
+</file>
+
+<file path=ppt/slides/slide4.xml><?xml version="1.0" encoding="utf-8"?>
 <p:sld xmlns:a="http://schemas.openxmlformats.org/drawingml/2006/main" xmlns:r="http://schemas.openxmlformats.org/officeDocument/2006/relationships" xmlns:p="http://schemas.openxmlformats.org/presentationml/2006/main">
   <p:cSld name="Slide 3">
     <p:bg>
@@ -2697,7 +5516,7 @@
 </p:sld>
 </file>
 
-<file path=ppt/slides/slide4.xml><?xml version="1.0" encoding="utf-8"?>
+<file path=ppt/slides/slide5.xml><?xml version="1.0" encoding="utf-8"?>
 <p:sld xmlns:a="http://schemas.openxmlformats.org/drawingml/2006/main" xmlns:r="http://schemas.openxmlformats.org/officeDocument/2006/relationships" xmlns:p="http://schemas.openxmlformats.org/presentationml/2006/main">
   <p:cSld>
     <p:bg>
@@ -3424,7 +6243,7 @@
 </p:sld>
 </file>
 
-<file path=ppt/slides/slide5.xml><?xml version="1.0" encoding="utf-8"?>
+<file path=ppt/slides/slide6.xml><?xml version="1.0" encoding="utf-8"?>
 <p:sld xmlns:a="http://schemas.openxmlformats.org/drawingml/2006/main" xmlns:r="http://schemas.openxmlformats.org/officeDocument/2006/relationships" xmlns:p="http://schemas.openxmlformats.org/presentationml/2006/main">
   <p:cSld name="Slide 3">
     <p:bg>

--- a/Notes/Mina_Meeting_Slides_2026-09-23.pptx
+++ b/Notes/Mina_Meeting_Slides_2026-09-23.pptx
@@ -461,8 +461,7 @@
           <a:lstStyle/>
           <a:p>
             <a:r>
-              <a:rPr lang="en-US" dirty="0"/>
-              <a:t>Where I am: Stage 1, still in literature review and tool definition, no experiments run. The plan this week is to get a small pilot run of the Stage 1 tools actually producing numbers before Wednesday. Open questions are listed for discussion.</a:t>
+              <a:t>Stage 1 results. Protein embeddings predict mRNA stability better than RNA embeddings, and concatenating the two adds nothing. As whole spaces the two embeddings mostly disagree, but CCA and retrieval find one narrow, strong shared subspace, most likely genetic-code-linked composition.</a:t>
             </a:r>
           </a:p>
         </p:txBody>
@@ -5129,7 +5128,7 @@
                 </a:solidFill>
                 <a:latin typeface="Calibri"/>
               </a:rPr>
-              <a:t>Decodability test: RNA R² = 0.015  ·  Protein R² = 0.103 (mRNA stability, leak-corrected — RNA no longer distinguishable from zero)</a:t>
+              <a:t>Decodability test (mRNA stability): RNA R² = 0.015  ·  Protein R² = 0.103</a:t>
             </a:r>
           </a:p>
         </p:txBody>
@@ -5780,7 +5779,7 @@
                 </a:solidFill>
                 <a:latin typeface="Calibri"/>
               </a:rPr>
-              <a:t>63 motif hits found (311 positions); mean attention 0.0031 at those positions vs. 0.0033 elsewhere, again the opposite of the hypothesis.</a:t>
+              <a:t>63 motif hits found (311 positions); mean attention 0.0031 at those positions vs. 0.0033 elsewhere, the opposite of the hypothesis.</a:t>
             </a:r>
           </a:p>
         </p:txBody>
@@ -6080,7 +6079,7 @@
                 </a:solidFill>
                 <a:latin typeface="Calibri"/>
               </a:rPr>
-              <a:t>Alignment–error association: r = -0.013, p = 0.83, not significant (adapted diagnostic, not a replication of the ICML 2025 paper's own test)</a:t>
+              <a:t>Alignment–error association: r = -0.013, p = 0.83, not significant</a:t>
             </a:r>
           </a:p>
         </p:txBody>
@@ -6230,7 +6229,7 @@
                 </a:solidFill>
                 <a:latin typeface="Calibri"/>
               </a:rPr>
-              <a:t>The motif-overlap test has been re-run against real, literature-cited AU-rich-element and m6A motifs, and the result is still null: attention doesn't concentrate at these positions any more than the JASPAR test suggested. Unlike the first pass, the ground truth is now correct, so this is a genuine finding about the encoder, not a methodology artifact. The alignment–error association agrees with Track B: local alignment doesn't predict performance, so an explicit alignment loss likely won't help Stage 2's fusion design.</a:t>
+              <a:t>Attention does not concentrate at literature-cited AU-rich-element and m6A motifs, so the encoder's attention is not tracking these known stability elements. The alignment–error association agrees with Track B: local alignment doesn't predict performance, so an explicit alignment loss likely won't help Stage 2's fusion design.</a:t>
             </a:r>
           </a:p>
         </p:txBody>
@@ -6460,7 +6459,7 @@
                 </a:solidFill>
                 <a:latin typeface="Calibri"/>
               </a:rPr>
-              <a:t>Propose the alignment target: Stage 1 places this pair in the “low alignment, high synergy” branch of the decision tree — skip an explicit alignment loss, pending your read on it.</a:t>
+              <a:t>Propose the alignment target: Stage 1 places this pair in the “low alignment, high synergy” branch of the decision tree, so skip an explicit alignment loss, pending your read on it.</a:t>
             </a:r>
           </a:p>
         </p:txBody>
@@ -6558,7 +6557,7 @@
         <p:spPr>
           <a:xfrm>
             <a:off x="5760720" y="1691640"/>
-            <a:ext cx="18288" cy="4480560"/>
+            <a:ext cx="18288" cy="3794760"/>
           </a:xfrm>
           <a:prstGeom prst="rect">
             <a:avLst/>
@@ -7005,174 +7004,6 @@
                 <a:latin typeface="Cambria"/>
               </a:rPr>
               <a:t>Once these are confirmed: Stage 2 formalizes the alignment decision, Stage 3 builds and benchmarks both fusion architectures at scale, and Stage 4 tests whether fusion beats the best single-modality model.</a:t>
-            </a:r>
-          </a:p>
-        </p:txBody>
-      </p:sp>
-      <p:sp>
-        <p:nvSpPr>
-          <p:cNvPr id="11" name="Rectangle 10"/>
-          <p:cNvSpPr/>
-          <p:nvPr/>
-        </p:nvSpPr>
-        <p:spPr>
-          <a:xfrm>
-            <a:off x="640080" y="3785616"/>
-            <a:ext cx="128016" cy="27432"/>
-          </a:xfrm>
-          <a:prstGeom prst="rect">
-            <a:avLst/>
-          </a:prstGeom>
-          <a:solidFill>
-            <a:srgbClr val="97BC62"/>
-          </a:solidFill>
-          <a:ln>
-            <a:noFill/>
-          </a:ln>
-          <a:effectLst/>
-        </p:spPr>
-        <p:style>
-          <a:lnRef idx="1">
-            <a:schemeClr val="accent1"/>
-          </a:lnRef>
-          <a:fillRef idx="3">
-            <a:schemeClr val="accent1"/>
-          </a:fillRef>
-          <a:effectRef idx="2">
-            <a:schemeClr val="accent1"/>
-          </a:effectRef>
-          <a:fontRef idx="minor">
-            <a:schemeClr val="lt1"/>
-          </a:fontRef>
-        </p:style>
-        <p:txBody>
-          <a:bodyPr rtlCol="0" anchor="ctr"/>
-          <a:lstStyle/>
-          <a:p>
-            <a:pPr algn="ctr"/>
-            <a:endParaRPr/>
-          </a:p>
-        </p:txBody>
-      </p:sp>
-      <p:sp>
-        <p:nvSpPr>
-          <p:cNvPr id="12" name="TextBox 11"/>
-          <p:cNvSpPr txBox="1"/>
-          <p:nvPr/>
-        </p:nvSpPr>
-        <p:spPr>
-          <a:xfrm>
-            <a:off x="896112" y="3694176"/>
-            <a:ext cx="4727448" cy="685800"/>
-          </a:xfrm>
-          <a:prstGeom prst="rect">
-            <a:avLst/>
-          </a:prstGeom>
-          <a:noFill/>
-        </p:spPr>
-        <p:txBody>
-          <a:bodyPr wrap="square">
-            <a:spAutoFit/>
-          </a:bodyPr>
-          <a:lstStyle/>
-          <a:p>
-            <a:pPr algn="l">
-              <a:lnSpc>
-                <a:spcPct val="110000"/>
-              </a:lnSpc>
-            </a:pPr>
-            <a:r>
-              <a:rPr sz="1200" b="0" i="0">
-                <a:solidFill>
-                  <a:srgbClr val="222222"/>
-                </a:solidFill>
-                <a:latin typeface="Calibri"/>
-              </a:rPr>
-              <a:t>Done: secondary-structure (Nussinov) probe reran under the corrected min-loop implementation — no longer pending.</a:t>
-            </a:r>
-          </a:p>
-        </p:txBody>
-      </p:sp>
-      <p:sp>
-        <p:nvSpPr>
-          <p:cNvPr id="11" name="Rectangle 10"/>
-          <p:cNvSpPr/>
-          <p:nvPr/>
-        </p:nvSpPr>
-        <p:spPr>
-          <a:xfrm>
-            <a:off x="640080" y="4535424"/>
-            <a:ext cx="128016" cy="27432"/>
-          </a:xfrm>
-          <a:prstGeom prst="rect">
-            <a:avLst/>
-          </a:prstGeom>
-          <a:solidFill>
-            <a:srgbClr val="97BC62"/>
-          </a:solidFill>
-          <a:ln>
-            <a:noFill/>
-          </a:ln>
-          <a:effectLst/>
-        </p:spPr>
-        <p:style>
-          <a:lnRef idx="1">
-            <a:schemeClr val="accent1"/>
-          </a:lnRef>
-          <a:fillRef idx="3">
-            <a:schemeClr val="accent1"/>
-          </a:fillRef>
-          <a:effectRef idx="2">
-            <a:schemeClr val="accent1"/>
-          </a:effectRef>
-          <a:fontRef idx="minor">
-            <a:schemeClr val="lt1"/>
-          </a:fontRef>
-        </p:style>
-        <p:txBody>
-          <a:bodyPr rtlCol="0" anchor="ctr"/>
-          <a:lstStyle/>
-          <a:p>
-            <a:pPr algn="ctr"/>
-            <a:endParaRPr/>
-          </a:p>
-        </p:txBody>
-      </p:sp>
-      <p:sp>
-        <p:nvSpPr>
-          <p:cNvPr id="12" name="TextBox 11"/>
-          <p:cNvSpPr txBox="1"/>
-          <p:nvPr/>
-        </p:nvSpPr>
-        <p:spPr>
-          <a:xfrm>
-            <a:off x="896112" y="4617720"/>
-            <a:ext cx="4727448" cy="685800"/>
-          </a:xfrm>
-          <a:prstGeom prst="rect">
-            <a:avLst/>
-          </a:prstGeom>
-          <a:noFill/>
-        </p:spPr>
-        <p:txBody>
-          <a:bodyPr wrap="square">
-            <a:spAutoFit/>
-          </a:bodyPr>
-          <a:lstStyle/>
-          <a:p>
-            <a:pPr algn="l">
-              <a:lnSpc>
-                <a:spcPct val="110000"/>
-              </a:lnSpc>
-            </a:pPr>
-            <a:r>
-              <a:rPr sz="1200" b="0" i="0">
-                <a:solidFill>
-                  <a:srgbClr val="222222"/>
-                </a:solidFill>
-                <a:latin typeface="Calibri"/>
-              </a:rPr>
-              <a:t>Done: both evaluation leaks (scaler fit before CV; duplicate-sequence groups crossing folds) are fixed — Track A/B R² above are the corrected values.</a:t>
             </a:r>
           </a:p>
         </p:txBody>

--- a/Notes/Mina_Meeting_Slides_2026-09-23.pptx
+++ b/Notes/Mina_Meeting_Slides_2026-09-23.pptx
@@ -5058,7 +5058,7 @@
                 </a:solidFill>
                 <a:latin typeface="Calibri"/>
               </a:rPr>
-              <a:t>Layer-wise CKA, RNA vs protein. Peak 0.400 sits at near-embedding layers.</a:t>
+              <a:t>Layer-wise CKA, RNA vs protein. Peak 0.400 pairs RNA layer 16 with the protein embedding layer.</a:t>
             </a:r>
           </a:p>
         </p:txBody>
@@ -6114,7 +6114,7 @@
                 </a:solidFill>
                 <a:latin typeface="Calibri"/>
               </a:rPr>
-              <a:t>Internal-structure test (RSA): r = 0.234, p &lt; 0.001, a fourth confirmation of Track B's shared subspace</a:t>
+              <a:t>Internal-structure test (RSA): r = 0.234, p &lt; 0.001, consistent with Track B's shared subspace</a:t>
             </a:r>
           </a:p>
         </p:txBody>
@@ -6459,7 +6459,7 @@
                 </a:solidFill>
                 <a:latin typeface="Calibri"/>
               </a:rPr>
-              <a:t>Propose the alignment target: Stage 1 places this pair in the “low alignment, high synergy” branch of the decision tree, so skip an explicit alignment loss, pending your read on it.</a:t>
+              <a:t>Propose the alignment target: Stage 1 places this pair in the “low alignment, high uniqueness” branch, with synergy untested until Stage 3, so skip an explicit alignment loss, pending your read on it.</a:t>
             </a:r>
           </a:p>
         </p:txBody>

--- a/Notes/Mina_Meeting_Slides_2026-09-23.pptx
+++ b/Notes/Mina_Meeting_Slides_2026-09-23.pptx
@@ -6362,7 +6362,7 @@
           <a:noFill/>
         </p:spPr>
         <p:txBody>
-          <a:bodyPr wrap="square">
+          <a:bodyPr wrap="square" lIns="0">
             <a:spAutoFit/>
           </a:bodyPr>
           <a:lstStyle/>
@@ -6382,20 +6382,20 @@
       </p:sp>
       <p:sp>
         <p:nvSpPr>
-          <p:cNvPr id="9" name="Rectangle 8"/>
+          <p:cNvPr id="13" name="Rectangle 12"/>
           <p:cNvSpPr/>
           <p:nvPr/>
         </p:nvSpPr>
         <p:spPr>
           <a:xfrm>
-            <a:off x="640080" y="2285999"/>
-            <a:ext cx="128016" cy="27432"/>
-          </a:xfrm>
-          <a:prstGeom prst="rect">
-            <a:avLst/>
-          </a:prstGeom>
-          <a:solidFill>
-            <a:srgbClr val="97BC62"/>
+            <a:off x="5760720" y="1691640"/>
+            <a:ext cx="18288" cy="3794760"/>
+          </a:xfrm>
+          <a:prstGeom prst="rect">
+            <a:avLst/>
+          </a:prstGeom>
+          <a:solidFill>
+            <a:srgbClr val="D9E2CE"/>
           </a:solidFill>
           <a:ln>
             <a:noFill/>
@@ -6427,14 +6427,84 @@
       </p:sp>
       <p:sp>
         <p:nvSpPr>
-          <p:cNvPr id="10" name="TextBox 9"/>
-          <p:cNvSpPr txBox="1"/>
-          <p:nvPr/>
-        </p:nvSpPr>
-        <p:spPr>
-          <a:xfrm>
-            <a:off x="896112" y="2194560"/>
-            <a:ext cx="4727448" cy="685800"/>
+          <p:cNvPr id="14" name="TextBox 13"/>
+          <p:cNvSpPr txBox="1"/>
+          <p:nvPr/>
+        </p:nvSpPr>
+        <p:spPr>
+          <a:xfrm>
+            <a:off x="6080760" y="1691640"/>
+            <a:ext cx="5166360" cy="365760"/>
+          </a:xfrm>
+          <a:prstGeom prst="rect">
+            <a:avLst/>
+          </a:prstGeom>
+          <a:noFill/>
+        </p:spPr>
+        <p:txBody>
+          <a:bodyPr wrap="square">
+            <a:spAutoFit/>
+          </a:bodyPr>
+          <a:lstStyle/>
+          <a:p>
+            <a:pPr algn="l"/>
+            <a:r>
+              <a:rPr sz="1600" b="1" i="0">
+                <a:solidFill>
+                  <a:srgbClr val="2C5F2D"/>
+                </a:solidFill>
+                <a:latin typeface="Cambria"/>
+              </a:rPr>
+              <a:t>Open Questions for Wednesday</a:t>
+            </a:r>
+          </a:p>
+        </p:txBody>
+      </p:sp>
+      <p:sp>
+        <p:nvSpPr>
+          <p:cNvPr id="15" name="TextBox 14"/>
+          <p:cNvSpPr txBox="1"/>
+          <p:nvPr/>
+        </p:nvSpPr>
+        <p:spPr>
+          <a:xfrm>
+            <a:off x="6080760" y="2194560"/>
+            <a:ext cx="457200" cy="365760"/>
+          </a:xfrm>
+          <a:prstGeom prst="rect">
+            <a:avLst/>
+          </a:prstGeom>
+          <a:noFill/>
+        </p:spPr>
+        <p:txBody>
+          <a:bodyPr wrap="square">
+            <a:spAutoFit/>
+          </a:bodyPr>
+          <a:lstStyle/>
+          <a:p>
+            <a:pPr algn="l"/>
+            <a:r>
+              <a:rPr sz="1500" b="1" i="0">
+                <a:solidFill>
+                  <a:srgbClr val="2C5F2D"/>
+                </a:solidFill>
+                <a:latin typeface="Cambria"/>
+              </a:rPr>
+              <a:t>01</a:t>
+            </a:r>
+          </a:p>
+        </p:txBody>
+      </p:sp>
+      <p:sp>
+        <p:nvSpPr>
+          <p:cNvPr id="16" name="TextBox 15"/>
+          <p:cNvSpPr txBox="1"/>
+          <p:nvPr/>
+        </p:nvSpPr>
+        <p:spPr>
+          <a:xfrm>
+            <a:off x="6537960" y="2194560"/>
+            <a:ext cx="4709160" cy="685800"/>
           </a:xfrm>
           <a:prstGeom prst="rect">
             <a:avLst/>
@@ -6459,27 +6529,175 @@
                 </a:solidFill>
                 <a:latin typeface="Calibri"/>
               </a:rPr>
-              <a:t>Propose the alignment target: Stage 1 places this pair in the “low alignment, high uniqueness” branch, with synergy untested until Stage 3, so skip an explicit alignment loss, pending your read on it.</a:t>
-            </a:r>
-          </a:p>
-        </p:txBody>
-      </p:sp>
-      <p:sp>
-        <p:nvSpPr>
-          <p:cNvPr id="11" name="Rectangle 10"/>
+              <a:t>Does mRNA stability become the confirmed Stage 4 benchmark, given DNA-optional scoping?</a:t>
+            </a:r>
+          </a:p>
+        </p:txBody>
+      </p:sp>
+      <p:sp>
+        <p:nvSpPr>
+          <p:cNvPr id="19" name="TextBox 18"/>
+          <p:cNvSpPr txBox="1"/>
+          <p:nvPr/>
+        </p:nvSpPr>
+        <p:spPr>
+          <a:xfrm>
+            <a:off x="6080760" y="2944368"/>
+            <a:ext cx="457200" cy="365760"/>
+          </a:xfrm>
+          <a:prstGeom prst="rect">
+            <a:avLst/>
+          </a:prstGeom>
+          <a:noFill/>
+        </p:spPr>
+        <p:txBody>
+          <a:bodyPr wrap="square">
+            <a:spAutoFit/>
+          </a:bodyPr>
+          <a:lstStyle/>
+          <a:p>
+            <a:pPr algn="l"/>
+            <a:r>
+              <a:rPr sz="1500" b="1" i="0">
+                <a:solidFill>
+                  <a:srgbClr val="2C5F2D"/>
+                </a:solidFill>
+                <a:latin typeface="Cambria"/>
+              </a:rPr>
+              <a:t>02</a:t>
+            </a:r>
+          </a:p>
+        </p:txBody>
+      </p:sp>
+      <p:sp>
+        <p:nvSpPr>
+          <p:cNvPr id="20" name="TextBox 19"/>
+          <p:cNvSpPr txBox="1"/>
+          <p:nvPr/>
+        </p:nvSpPr>
+        <p:spPr>
+          <a:xfrm>
+            <a:off x="6537960" y="2944368"/>
+            <a:ext cx="4709160" cy="685800"/>
+          </a:xfrm>
+          <a:prstGeom prst="rect">
+            <a:avLst/>
+          </a:prstGeom>
+          <a:noFill/>
+        </p:spPr>
+        <p:txBody>
+          <a:bodyPr wrap="square">
+            <a:spAutoFit/>
+          </a:bodyPr>
+          <a:lstStyle/>
+          <a:p>
+            <a:pPr algn="l">
+              <a:lnSpc>
+                <a:spcPct val="110000"/>
+              </a:lnSpc>
+            </a:pPr>
+            <a:r>
+              <a:rPr sz="1200" b="0" i="0">
+                <a:solidFill>
+                  <a:srgbClr val="222222"/>
+                </a:solidFill>
+                <a:latin typeface="Calibri"/>
+              </a:rPr>
+              <a:t>Should Stage 2 use asymmetric, per-pair alignment decisions across modality pairs?</a:t>
+            </a:r>
+          </a:p>
+        </p:txBody>
+      </p:sp>
+      <p:sp>
+        <p:nvSpPr>
+          <p:cNvPr id="21" name="TextBox 20"/>
+          <p:cNvSpPr txBox="1"/>
+          <p:nvPr/>
+        </p:nvSpPr>
+        <p:spPr>
+          <a:xfrm>
+            <a:off x="6080760" y="3694176"/>
+            <a:ext cx="457200" cy="365760"/>
+          </a:xfrm>
+          <a:prstGeom prst="rect">
+            <a:avLst/>
+          </a:prstGeom>
+          <a:noFill/>
+        </p:spPr>
+        <p:txBody>
+          <a:bodyPr wrap="square">
+            <a:spAutoFit/>
+          </a:bodyPr>
+          <a:lstStyle/>
+          <a:p>
+            <a:pPr algn="l"/>
+            <a:r>
+              <a:rPr sz="1500" b="1" i="0">
+                <a:solidFill>
+                  <a:srgbClr val="2C5F2D"/>
+                </a:solidFill>
+                <a:latin typeface="Cambria"/>
+              </a:rPr>
+              <a:t>03</a:t>
+            </a:r>
+          </a:p>
+        </p:txBody>
+      </p:sp>
+      <p:sp>
+        <p:nvSpPr>
+          <p:cNvPr id="22" name="TextBox 21"/>
+          <p:cNvSpPr txBox="1"/>
+          <p:nvPr/>
+        </p:nvSpPr>
+        <p:spPr>
+          <a:xfrm>
+            <a:off x="6537960" y="3694176"/>
+            <a:ext cx="4709160" cy="685800"/>
+          </a:xfrm>
+          <a:prstGeom prst="rect">
+            <a:avLst/>
+          </a:prstGeom>
+          <a:noFill/>
+        </p:spPr>
+        <p:txBody>
+          <a:bodyPr wrap="square">
+            <a:spAutoFit/>
+          </a:bodyPr>
+          <a:lstStyle/>
+          <a:p>
+            <a:pPr algn="l">
+              <a:lnSpc>
+                <a:spcPct val="110000"/>
+              </a:lnSpc>
+            </a:pPr>
+            <a:r>
+              <a:rPr sz="1200" b="0" i="0" dirty="0">
+                <a:solidFill>
+                  <a:srgbClr val="222222"/>
+                </a:solidFill>
+                <a:latin typeface="Calibri"/>
+              </a:rPr>
+              <a:t>Is the shared subspace compositional (GC-linked), or something more specific worth checking?</a:t>
+            </a:r>
+          </a:p>
+        </p:txBody>
+      </p:sp>
+      <p:sp>
+        <p:nvSpPr>
+          <p:cNvPr id="23" name="Rectangle 22"/>
           <p:cNvSpPr/>
           <p:nvPr/>
         </p:nvSpPr>
         <p:spPr>
           <a:xfrm>
-            <a:off x="640080" y="3035808"/>
-            <a:ext cx="128016" cy="27432"/>
-          </a:xfrm>
-          <a:prstGeom prst="rect">
-            <a:avLst/>
-          </a:prstGeom>
-          <a:solidFill>
-            <a:srgbClr val="97BC62"/>
+            <a:off x="640080" y="5715000"/>
+            <a:ext cx="54864" cy="914400"/>
+          </a:xfrm>
+          <a:prstGeom prst="rect">
+            <a:avLst/>
+          </a:prstGeom>
+          <a:solidFill>
+            <a:srgbClr val="2C5F2D"/>
           </a:solidFill>
           <a:ln>
             <a:noFill/>
@@ -6511,14 +6729,14 @@
       </p:sp>
       <p:sp>
         <p:nvSpPr>
-          <p:cNvPr id="12" name="TextBox 11"/>
-          <p:cNvSpPr txBox="1"/>
-          <p:nvPr/>
-        </p:nvSpPr>
-        <p:spPr>
-          <a:xfrm>
-            <a:off x="896112" y="2944368"/>
-            <a:ext cx="4727448" cy="685800"/>
+          <p:cNvPr id="24" name="TextBox 23"/>
+          <p:cNvSpPr txBox="1"/>
+          <p:nvPr/>
+        </p:nvSpPr>
+        <p:spPr>
+          <a:xfrm>
+            <a:off x="868680" y="5669280"/>
+            <a:ext cx="10332720" cy="566758"/>
           </a:xfrm>
           <a:prstGeom prst="rect">
             <a:avLst/>
@@ -6533,37 +6751,37 @@
           <a:p>
             <a:pPr algn="l">
               <a:lnSpc>
-                <a:spcPct val="110000"/>
+                <a:spcPct val="115000"/>
               </a:lnSpc>
             </a:pPr>
             <a:r>
-              <a:rPr sz="1200" b="0" i="0">
+              <a:rPr sz="1400" b="0" i="1" dirty="0">
                 <a:solidFill>
                   <a:srgbClr val="222222"/>
                 </a:solidFill>
-                <a:latin typeface="Calibri"/>
-              </a:rPr>
-              <a:t>Confirm the fusion candidates: cross-attention and Coupled-Mamba as previously discussed; Cross-Mamba and mixture-of-experts fusion stand by as fallbacks.</a:t>
-            </a:r>
-          </a:p>
-        </p:txBody>
-      </p:sp>
-      <p:sp>
-        <p:nvSpPr>
-          <p:cNvPr id="13" name="Rectangle 12"/>
+                <a:latin typeface="Cambria"/>
+              </a:rPr>
+              <a:t>Once these are confirmed: Stage 2 formalizes the alignment decision, Stage 3 builds and benchmarks both fusion architectures at scale, and Stage 4 tests whether fusion beats the best single-modality model.</a:t>
+            </a:r>
+          </a:p>
+        </p:txBody>
+      </p:sp>
+      <p:sp>
+        <p:nvSpPr>
+          <p:cNvPr id="25" name="Rectangle 24"/>
           <p:cNvSpPr/>
           <p:nvPr/>
         </p:nvSpPr>
         <p:spPr>
           <a:xfrm>
-            <a:off x="5760720" y="1691640"/>
-            <a:ext cx="18288" cy="3794760"/>
-          </a:xfrm>
-          <a:prstGeom prst="rect">
-            <a:avLst/>
-          </a:prstGeom>
-          <a:solidFill>
-            <a:srgbClr val="D9E2CE"/>
+            <a:off x="640080" y="2285999"/>
+            <a:ext cx="128016" cy="27432"/>
+          </a:xfrm>
+          <a:prstGeom prst="rect">
+            <a:avLst/>
+          </a:prstGeom>
+          <a:solidFill>
+            <a:srgbClr val="2C5F2D"/>
           </a:solidFill>
           <a:ln>
             <a:noFill/>
@@ -6589,357 +6807,170 @@
           <a:lstStyle/>
           <a:p>
             <a:pPr algn="ctr"/>
-            <a:endParaRPr/>
-          </a:p>
-        </p:txBody>
-      </p:sp>
-      <p:sp>
-        <p:nvSpPr>
-          <p:cNvPr id="14" name="TextBox 13"/>
-          <p:cNvSpPr txBox="1"/>
-          <p:nvPr/>
-        </p:nvSpPr>
-        <p:spPr>
-          <a:xfrm>
-            <a:off x="6080760" y="1691640"/>
-            <a:ext cx="5166360" cy="365760"/>
-          </a:xfrm>
-          <a:prstGeom prst="rect">
-            <a:avLst/>
-          </a:prstGeom>
-          <a:noFill/>
-        </p:spPr>
-        <p:txBody>
-          <a:bodyPr wrap="square">
-            <a:spAutoFit/>
-          </a:bodyPr>
-          <a:lstStyle/>
-          <a:p>
-            <a:pPr algn="l"/>
-            <a:r>
-              <a:rPr sz="1600" b="1" i="0">
+          </a:p>
+        </p:txBody>
+      </p:sp>
+      <p:sp>
+        <p:nvSpPr>
+          <p:cNvPr id="26" name="TextBox 25"/>
+          <p:cNvSpPr txBox="1"/>
+          <p:nvPr/>
+        </p:nvSpPr>
+        <p:spPr>
+          <a:xfrm>
+            <a:off x="896112" y="2194560"/>
+            <a:ext cx="4727448" cy="640080"/>
+          </a:xfrm>
+          <a:prstGeom prst="rect">
+            <a:avLst/>
+          </a:prstGeom>
+          <a:noFill/>
+        </p:spPr>
+        <p:txBody>
+          <a:bodyPr wrap="square" lIns="0" rIns="0" tIns="0" bIns="0" anchor="t">
+            <a:spAutoFit/>
+          </a:bodyPr>
+          <a:lstStyle/>
+          <a:p>
+            <a:r>
+              <a:rPr sz="1200" b="1">
+                <a:solidFill>
+                  <a:srgbClr val="222222"/>
+                </a:solidFill>
+                <a:latin typeface="Calibri"/>
+              </a:rPr>
+              <a:t>No explicit alignment step: </a:t>
+            </a:r>
+            <a:r>
+              <a:rPr sz="1200" b="0">
+                <a:solidFill>
+                  <a:srgbClr val="222222"/>
+                </a:solidFill>
+                <a:latin typeface="Calibri"/>
+              </a:rPr>
+              <a:t>RNA and protein mostly carry different information, so forcing them to align could erase useful signal. The fusion model learns what they share.</a:t>
+            </a:r>
+          </a:p>
+        </p:txBody>
+      </p:sp>
+      <p:sp>
+        <p:nvSpPr>
+          <p:cNvPr id="27" name="TextBox 26"/>
+          <p:cNvSpPr txBox="1"/>
+          <p:nvPr/>
+        </p:nvSpPr>
+        <p:spPr>
+          <a:xfrm>
+            <a:off x="640080" y="3000000"/>
+            <a:ext cx="4983480" cy="320040"/>
+          </a:xfrm>
+          <a:prstGeom prst="rect">
+            <a:avLst/>
+          </a:prstGeom>
+          <a:noFill/>
+        </p:spPr>
+        <p:txBody>
+          <a:bodyPr wrap="square" lIns="0" rIns="0" tIns="0" bIns="0" anchor="t">
+            <a:spAutoFit/>
+          </a:bodyPr>
+          <a:lstStyle/>
+          <a:p>
+            <a:r>
+              <a:rPr sz="1400" b="1">
                 <a:solidFill>
                   <a:srgbClr val="2C5F2D"/>
                 </a:solidFill>
                 <a:latin typeface="Cambria"/>
               </a:rPr>
-              <a:t>Open Questions for Wednesday</a:t>
-            </a:r>
-          </a:p>
-        </p:txBody>
-      </p:sp>
-      <p:sp>
-        <p:nvSpPr>
-          <p:cNvPr id="15" name="TextBox 14"/>
-          <p:cNvSpPr txBox="1"/>
-          <p:nvPr/>
-        </p:nvSpPr>
-        <p:spPr>
-          <a:xfrm>
-            <a:off x="6080760" y="2194560"/>
-            <a:ext cx="457200" cy="365760"/>
-          </a:xfrm>
-          <a:prstGeom prst="rect">
-            <a:avLst/>
-          </a:prstGeom>
-          <a:noFill/>
-        </p:spPr>
-        <p:txBody>
-          <a:bodyPr wrap="square">
-            <a:spAutoFit/>
-          </a:bodyPr>
-          <a:lstStyle/>
-          <a:p>
-            <a:pPr algn="l"/>
-            <a:r>
-              <a:rPr sz="1500" b="1" i="0">
+              <a:t>Fusion Candidates</a:t>
+            </a:r>
+          </a:p>
+        </p:txBody>
+      </p:sp>
+      <p:sp>
+        <p:nvSpPr>
+          <p:cNvPr id="28" name="TextBox 27"/>
+          <p:cNvSpPr txBox="1"/>
+          <p:nvPr/>
+        </p:nvSpPr>
+        <p:spPr>
+          <a:xfrm>
+            <a:off x="640080" y="3400000"/>
+            <a:ext cx="3300000" cy="340000"/>
+          </a:xfrm>
+          <a:prstGeom prst="rect">
+            <a:avLst/>
+          </a:prstGeom>
+          <a:noFill/>
+        </p:spPr>
+        <p:txBody>
+          <a:bodyPr wrap="square" lIns="0" rIns="0" tIns="0" bIns="0" anchor="ctr">
+            <a:spAutoFit/>
+          </a:bodyPr>
+          <a:lstStyle/>
+          <a:p>
+            <a:r>
+              <a:rPr sz="1200" b="1">
+                <a:solidFill>
+                  <a:srgbClr val="222222"/>
+                </a:solidFill>
+                <a:latin typeface="Calibri"/>
+              </a:rPr>
+              <a:t>Cross-attention (Isoformer-style)</a:t>
+            </a:r>
+          </a:p>
+        </p:txBody>
+      </p:sp>
+      <p:sp>
+        <p:nvSpPr>
+          <p:cNvPr id="29" name="TextBox 28"/>
+          <p:cNvSpPr txBox="1"/>
+          <p:nvPr/>
+        </p:nvSpPr>
+        <p:spPr>
+          <a:xfrm>
+            <a:off x="3990080" y="3400000"/>
+            <a:ext cx="1633480" cy="340000"/>
+          </a:xfrm>
+          <a:prstGeom prst="rect">
+            <a:avLst/>
+          </a:prstGeom>
+          <a:noFill/>
+        </p:spPr>
+        <p:txBody>
+          <a:bodyPr wrap="square" lIns="0" rIns="0" tIns="0" bIns="0" anchor="ctr">
+            <a:spAutoFit/>
+          </a:bodyPr>
+          <a:lstStyle/>
+          <a:p>
+            <a:r>
+              <a:rPr sz="1100" b="1">
                 <a:solidFill>
                   <a:srgbClr val="2C5F2D"/>
                 </a:solidFill>
-                <a:latin typeface="Cambria"/>
-              </a:rPr>
-              <a:t>01</a:t>
-            </a:r>
-          </a:p>
-        </p:txBody>
-      </p:sp>
-      <p:sp>
-        <p:nvSpPr>
-          <p:cNvPr id="16" name="TextBox 15"/>
-          <p:cNvSpPr txBox="1"/>
-          <p:nvPr/>
-        </p:nvSpPr>
-        <p:spPr>
-          <a:xfrm>
-            <a:off x="6537960" y="2194560"/>
-            <a:ext cx="4709160" cy="685800"/>
-          </a:xfrm>
-          <a:prstGeom prst="rect">
-            <a:avLst/>
-          </a:prstGeom>
-          <a:noFill/>
-        </p:spPr>
-        <p:txBody>
-          <a:bodyPr wrap="square">
-            <a:spAutoFit/>
-          </a:bodyPr>
-          <a:lstStyle/>
-          <a:p>
-            <a:pPr algn="l">
-              <a:lnSpc>
-                <a:spcPct val="110000"/>
-              </a:lnSpc>
-            </a:pPr>
-            <a:r>
-              <a:rPr sz="1200" b="0" i="0">
-                <a:solidFill>
-                  <a:srgbClr val="222222"/>
-                </a:solidFill>
                 <a:latin typeface="Calibri"/>
               </a:rPr>
-              <a:t>Does mRNA stability become the confirmed Stage 4 benchmark, given DNA-optional scoping?</a:t>
-            </a:r>
-          </a:p>
-        </p:txBody>
-      </p:sp>
-      <p:sp>
-        <p:nvSpPr>
-          <p:cNvPr id="17" name="TextBox 16"/>
-          <p:cNvSpPr txBox="1"/>
-          <p:nvPr/>
-        </p:nvSpPr>
-        <p:spPr>
-          <a:xfrm>
-            <a:off x="6080760" y="2944368"/>
-            <a:ext cx="457200" cy="365760"/>
-          </a:xfrm>
-          <a:prstGeom prst="rect">
-            <a:avLst/>
-          </a:prstGeom>
-          <a:noFill/>
-        </p:spPr>
-        <p:txBody>
-          <a:bodyPr wrap="square">
-            <a:spAutoFit/>
-          </a:bodyPr>
-          <a:lstStyle/>
-          <a:p>
-            <a:pPr algn="l"/>
-            <a:r>
-              <a:rPr sz="1500" b="1" i="0">
-                <a:solidFill>
-                  <a:srgbClr val="2C5F2D"/>
-                </a:solidFill>
-                <a:latin typeface="Cambria"/>
-              </a:rPr>
-              <a:t>02</a:t>
-            </a:r>
-          </a:p>
-        </p:txBody>
-      </p:sp>
-      <p:sp>
-        <p:nvSpPr>
-          <p:cNvPr id="18" name="TextBox 17"/>
-          <p:cNvSpPr txBox="1"/>
-          <p:nvPr/>
-        </p:nvSpPr>
-        <p:spPr>
-          <a:xfrm>
-            <a:off x="6537960" y="2944368"/>
-            <a:ext cx="4709160" cy="685800"/>
-          </a:xfrm>
-          <a:prstGeom prst="rect">
-            <a:avLst/>
-          </a:prstGeom>
-          <a:noFill/>
-        </p:spPr>
-        <p:txBody>
-          <a:bodyPr wrap="square">
-            <a:spAutoFit/>
-          </a:bodyPr>
-          <a:lstStyle/>
-          <a:p>
-            <a:pPr algn="l">
-              <a:lnSpc>
-                <a:spcPct val="110000"/>
-              </a:lnSpc>
-            </a:pPr>
-            <a:r>
-              <a:rPr sz="1200" b="0" i="0">
-                <a:solidFill>
-                  <a:srgbClr val="222222"/>
-                </a:solidFill>
-                <a:latin typeface="Calibri"/>
-              </a:rPr>
-              <a:t>Do the mRNA_Stability sequences include 3' UTR context, where AU-rich elements and m6A sites concentrate, or are they CDS-only?</a:t>
-            </a:r>
-          </a:p>
-        </p:txBody>
-      </p:sp>
-      <p:sp>
-        <p:nvSpPr>
-          <p:cNvPr id="19" name="TextBox 18"/>
-          <p:cNvSpPr txBox="1"/>
-          <p:nvPr/>
-        </p:nvSpPr>
-        <p:spPr>
-          <a:xfrm>
-            <a:off x="6080760" y="3694176"/>
-            <a:ext cx="457200" cy="365760"/>
-          </a:xfrm>
-          <a:prstGeom prst="rect">
-            <a:avLst/>
-          </a:prstGeom>
-          <a:noFill/>
-        </p:spPr>
-        <p:txBody>
-          <a:bodyPr wrap="square">
-            <a:spAutoFit/>
-          </a:bodyPr>
-          <a:lstStyle/>
-          <a:p>
-            <a:pPr algn="l"/>
-            <a:r>
-              <a:rPr sz="1500" b="1" i="0">
-                <a:solidFill>
-                  <a:srgbClr val="2C5F2D"/>
-                </a:solidFill>
-                <a:latin typeface="Cambria"/>
-              </a:rPr>
-              <a:t>03</a:t>
-            </a:r>
-          </a:p>
-        </p:txBody>
-      </p:sp>
-      <p:sp>
-        <p:nvSpPr>
-          <p:cNvPr id="20" name="TextBox 19"/>
-          <p:cNvSpPr txBox="1"/>
-          <p:nvPr/>
-        </p:nvSpPr>
-        <p:spPr>
-          <a:xfrm>
-            <a:off x="6537960" y="3694176"/>
-            <a:ext cx="4709160" cy="685800"/>
-          </a:xfrm>
-          <a:prstGeom prst="rect">
-            <a:avLst/>
-          </a:prstGeom>
-          <a:noFill/>
-        </p:spPr>
-        <p:txBody>
-          <a:bodyPr wrap="square">
-            <a:spAutoFit/>
-          </a:bodyPr>
-          <a:lstStyle/>
-          <a:p>
-            <a:pPr algn="l">
-              <a:lnSpc>
-                <a:spcPct val="110000"/>
-              </a:lnSpc>
-            </a:pPr>
-            <a:r>
-              <a:rPr sz="1200" b="0" i="0">
-                <a:solidFill>
-                  <a:srgbClr val="222222"/>
-                </a:solidFill>
-                <a:latin typeface="Calibri"/>
-              </a:rPr>
-              <a:t>Should Stage 2 use asymmetric, per-pair alignment decisions across modality pairs?</a:t>
-            </a:r>
-          </a:p>
-        </p:txBody>
-      </p:sp>
-      <p:sp>
-        <p:nvSpPr>
-          <p:cNvPr id="21" name="TextBox 20"/>
-          <p:cNvSpPr txBox="1"/>
-          <p:nvPr/>
-        </p:nvSpPr>
-        <p:spPr>
-          <a:xfrm>
-            <a:off x="6080760" y="4443984"/>
-            <a:ext cx="457200" cy="365760"/>
-          </a:xfrm>
-          <a:prstGeom prst="rect">
-            <a:avLst/>
-          </a:prstGeom>
-          <a:noFill/>
-        </p:spPr>
-        <p:txBody>
-          <a:bodyPr wrap="square">
-            <a:spAutoFit/>
-          </a:bodyPr>
-          <a:lstStyle/>
-          <a:p>
-            <a:pPr algn="l"/>
-            <a:r>
-              <a:rPr sz="1500" b="1" i="0">
-                <a:solidFill>
-                  <a:srgbClr val="2C5F2D"/>
-                </a:solidFill>
-                <a:latin typeface="Cambria"/>
-              </a:rPr>
-              <a:t>04</a:t>
-            </a:r>
-          </a:p>
-        </p:txBody>
-      </p:sp>
-      <p:sp>
-        <p:nvSpPr>
-          <p:cNvPr id="22" name="TextBox 21"/>
-          <p:cNvSpPr txBox="1"/>
-          <p:nvPr/>
-        </p:nvSpPr>
-        <p:spPr>
-          <a:xfrm>
-            <a:off x="6537960" y="4443984"/>
-            <a:ext cx="4709160" cy="685800"/>
-          </a:xfrm>
-          <a:prstGeom prst="rect">
-            <a:avLst/>
-          </a:prstGeom>
-          <a:noFill/>
-        </p:spPr>
-        <p:txBody>
-          <a:bodyPr wrap="square">
-            <a:spAutoFit/>
-          </a:bodyPr>
-          <a:lstStyle/>
-          <a:p>
-            <a:pPr algn="l">
-              <a:lnSpc>
-                <a:spcPct val="110000"/>
-              </a:lnSpc>
-            </a:pPr>
-            <a:r>
-              <a:rPr sz="1200" b="0" i="0" dirty="0">
-                <a:solidFill>
-                  <a:srgbClr val="222222"/>
-                </a:solidFill>
-                <a:latin typeface="Calibri"/>
-              </a:rPr>
-              <a:t>Is the shared subspace compositional (GC-linked), or something more specific worth checking?</a:t>
-            </a:r>
-          </a:p>
-        </p:txBody>
-      </p:sp>
-      <p:sp>
-        <p:nvSpPr>
-          <p:cNvPr id="23" name="Rectangle 22"/>
+              <a:t>Mina's pick</a:t>
+            </a:r>
+          </a:p>
+        </p:txBody>
+      </p:sp>
+      <p:sp>
+        <p:nvSpPr>
+          <p:cNvPr id="30" name="Rectangle 29"/>
           <p:cNvSpPr/>
           <p:nvPr/>
         </p:nvSpPr>
         <p:spPr>
           <a:xfrm>
-            <a:off x="640080" y="5715000"/>
-            <a:ext cx="54864" cy="914400"/>
-          </a:xfrm>
-          <a:prstGeom prst="rect">
-            <a:avLst/>
-          </a:prstGeom>
-          <a:solidFill>
-            <a:srgbClr val="2C5F2D"/>
+            <a:off x="640080" y="3740000"/>
+            <a:ext cx="4983480" cy="9144"/>
+          </a:xfrm>
+          <a:prstGeom prst="rect">
+            <a:avLst/>
+          </a:prstGeom>
+          <a:solidFill>
+            <a:srgbClr val="DDDDDD"/>
           </a:solidFill>
           <a:ln>
             <a:noFill/>
@@ -6965,45 +6996,409 @@
           <a:lstStyle/>
           <a:p>
             <a:pPr algn="ctr"/>
-            <a:endParaRPr/>
-          </a:p>
-        </p:txBody>
-      </p:sp>
-      <p:sp>
-        <p:nvSpPr>
-          <p:cNvPr id="24" name="TextBox 23"/>
-          <p:cNvSpPr txBox="1"/>
-          <p:nvPr/>
-        </p:nvSpPr>
-        <p:spPr>
-          <a:xfrm>
-            <a:off x="868680" y="5669280"/>
-            <a:ext cx="10332720" cy="566758"/>
-          </a:xfrm>
-          <a:prstGeom prst="rect">
-            <a:avLst/>
-          </a:prstGeom>
-          <a:noFill/>
-        </p:spPr>
-        <p:txBody>
-          <a:bodyPr wrap="square">
-            <a:spAutoFit/>
-          </a:bodyPr>
-          <a:lstStyle/>
-          <a:p>
-            <a:pPr algn="l">
-              <a:lnSpc>
-                <a:spcPct val="115000"/>
-              </a:lnSpc>
-            </a:pPr>
-            <a:r>
-              <a:rPr sz="1400" b="0" i="1" dirty="0">
+          </a:p>
+        </p:txBody>
+      </p:sp>
+      <p:sp>
+        <p:nvSpPr>
+          <p:cNvPr id="31" name="TextBox 30"/>
+          <p:cNvSpPr txBox="1"/>
+          <p:nvPr/>
+        </p:nvSpPr>
+        <p:spPr>
+          <a:xfrm>
+            <a:off x="640080" y="3740000"/>
+            <a:ext cx="3300000" cy="340000"/>
+          </a:xfrm>
+          <a:prstGeom prst="rect">
+            <a:avLst/>
+          </a:prstGeom>
+          <a:noFill/>
+        </p:spPr>
+        <p:txBody>
+          <a:bodyPr wrap="square" lIns="0" rIns="0" tIns="0" bIns="0" anchor="ctr">
+            <a:spAutoFit/>
+          </a:bodyPr>
+          <a:lstStyle/>
+          <a:p>
+            <a:r>
+              <a:rPr sz="1200" b="1">
                 <a:solidFill>
                   <a:srgbClr val="222222"/>
                 </a:solidFill>
-                <a:latin typeface="Cambria"/>
-              </a:rPr>
-              <a:t>Once these are confirmed: Stage 2 formalizes the alignment decision, Stage 3 builds and benchmarks both fusion architectures at scale, and Stage 4 tests whether fusion beats the best single-modality model.</a:t>
+                <a:latin typeface="Calibri"/>
+              </a:rPr>
+              <a:t>Coupled Mamba</a:t>
+            </a:r>
+          </a:p>
+        </p:txBody>
+      </p:sp>
+      <p:sp>
+        <p:nvSpPr>
+          <p:cNvPr id="32" name="TextBox 31"/>
+          <p:cNvSpPr txBox="1"/>
+          <p:nvPr/>
+        </p:nvSpPr>
+        <p:spPr>
+          <a:xfrm>
+            <a:off x="3990080" y="3740000"/>
+            <a:ext cx="1633480" cy="340000"/>
+          </a:xfrm>
+          <a:prstGeom prst="rect">
+            <a:avLst/>
+          </a:prstGeom>
+          <a:noFill/>
+        </p:spPr>
+        <p:txBody>
+          <a:bodyPr wrap="square" lIns="0" rIns="0" tIns="0" bIns="0" anchor="ctr">
+            <a:spAutoFit/>
+          </a:bodyPr>
+          <a:lstStyle/>
+          <a:p>
+            <a:r>
+              <a:rPr sz="1100" b="1">
+                <a:solidFill>
+                  <a:srgbClr val="2C5F2D"/>
+                </a:solidFill>
+                <a:latin typeface="Calibri"/>
+              </a:rPr>
+              <a:t>Mina's pick</a:t>
+            </a:r>
+          </a:p>
+        </p:txBody>
+      </p:sp>
+      <p:sp>
+        <p:nvSpPr>
+          <p:cNvPr id="33" name="Rectangle 32"/>
+          <p:cNvSpPr/>
+          <p:nvPr/>
+        </p:nvSpPr>
+        <p:spPr>
+          <a:xfrm>
+            <a:off x="640080" y="4080000"/>
+            <a:ext cx="4983480" cy="9144"/>
+          </a:xfrm>
+          <a:prstGeom prst="rect">
+            <a:avLst/>
+          </a:prstGeom>
+          <a:solidFill>
+            <a:srgbClr val="DDDDDD"/>
+          </a:solidFill>
+          <a:ln>
+            <a:noFill/>
+          </a:ln>
+          <a:effectLst/>
+        </p:spPr>
+        <p:style>
+          <a:lnRef idx="1">
+            <a:schemeClr val="accent1"/>
+          </a:lnRef>
+          <a:fillRef idx="3">
+            <a:schemeClr val="accent1"/>
+          </a:fillRef>
+          <a:effectRef idx="2">
+            <a:schemeClr val="accent1"/>
+          </a:effectRef>
+          <a:fontRef idx="minor">
+            <a:schemeClr val="lt1"/>
+          </a:fontRef>
+        </p:style>
+        <p:txBody>
+          <a:bodyPr rtlCol="0" anchor="ctr"/>
+          <a:lstStyle/>
+          <a:p>
+            <a:pPr algn="ctr"/>
+          </a:p>
+        </p:txBody>
+      </p:sp>
+      <p:sp>
+        <p:nvSpPr>
+          <p:cNvPr id="34" name="TextBox 33"/>
+          <p:cNvSpPr txBox="1"/>
+          <p:nvPr/>
+        </p:nvSpPr>
+        <p:spPr>
+          <a:xfrm>
+            <a:off x="640080" y="4080000"/>
+            <a:ext cx="3300000" cy="340000"/>
+          </a:xfrm>
+          <a:prstGeom prst="rect">
+            <a:avLst/>
+          </a:prstGeom>
+          <a:noFill/>
+        </p:spPr>
+        <p:txBody>
+          <a:bodyPr wrap="square" lIns="0" rIns="0" tIns="0" bIns="0" anchor="ctr">
+            <a:spAutoFit/>
+          </a:bodyPr>
+          <a:lstStyle/>
+          <a:p>
+            <a:r>
+              <a:rPr sz="1200" b="1">
+                <a:solidFill>
+                  <a:srgbClr val="222222"/>
+                </a:solidFill>
+                <a:latin typeface="Calibri"/>
+              </a:rPr>
+              <a:t>Concatenation + MLP</a:t>
+            </a:r>
+          </a:p>
+        </p:txBody>
+      </p:sp>
+      <p:sp>
+        <p:nvSpPr>
+          <p:cNvPr id="35" name="TextBox 34"/>
+          <p:cNvSpPr txBox="1"/>
+          <p:nvPr/>
+        </p:nvSpPr>
+        <p:spPr>
+          <a:xfrm>
+            <a:off x="3990080" y="4080000"/>
+            <a:ext cx="1633480" cy="340000"/>
+          </a:xfrm>
+          <a:prstGeom prst="rect">
+            <a:avLst/>
+          </a:prstGeom>
+          <a:noFill/>
+        </p:spPr>
+        <p:txBody>
+          <a:bodyPr wrap="square" lIns="0" rIns="0" tIns="0" bIns="0" anchor="ctr">
+            <a:spAutoFit/>
+          </a:bodyPr>
+          <a:lstStyle/>
+          <a:p>
+            <a:r>
+              <a:rPr sz="1100" b="0">
+                <a:solidFill>
+                  <a:srgbClr val="555555"/>
+                </a:solidFill>
+                <a:latin typeface="Calibri"/>
+              </a:rPr>
+              <a:t>Baseline to beat</a:t>
+            </a:r>
+          </a:p>
+        </p:txBody>
+      </p:sp>
+      <p:sp>
+        <p:nvSpPr>
+          <p:cNvPr id="36" name="Rectangle 35"/>
+          <p:cNvSpPr/>
+          <p:nvPr/>
+        </p:nvSpPr>
+        <p:spPr>
+          <a:xfrm>
+            <a:off x="640080" y="4420000"/>
+            <a:ext cx="4983480" cy="9144"/>
+          </a:xfrm>
+          <a:prstGeom prst="rect">
+            <a:avLst/>
+          </a:prstGeom>
+          <a:solidFill>
+            <a:srgbClr val="DDDDDD"/>
+          </a:solidFill>
+          <a:ln>
+            <a:noFill/>
+          </a:ln>
+          <a:effectLst/>
+        </p:spPr>
+        <p:style>
+          <a:lnRef idx="1">
+            <a:schemeClr val="accent1"/>
+          </a:lnRef>
+          <a:fillRef idx="3">
+            <a:schemeClr val="accent1"/>
+          </a:fillRef>
+          <a:effectRef idx="2">
+            <a:schemeClr val="accent1"/>
+          </a:effectRef>
+          <a:fontRef idx="minor">
+            <a:schemeClr val="lt1"/>
+          </a:fontRef>
+        </p:style>
+        <p:txBody>
+          <a:bodyPr rtlCol="0" anchor="ctr"/>
+          <a:lstStyle/>
+          <a:p>
+            <a:pPr algn="ctr"/>
+          </a:p>
+        </p:txBody>
+      </p:sp>
+      <p:sp>
+        <p:nvSpPr>
+          <p:cNvPr id="37" name="TextBox 36"/>
+          <p:cNvSpPr txBox="1"/>
+          <p:nvPr/>
+        </p:nvSpPr>
+        <p:spPr>
+          <a:xfrm>
+            <a:off x="640080" y="4420000"/>
+            <a:ext cx="3300000" cy="340000"/>
+          </a:xfrm>
+          <a:prstGeom prst="rect">
+            <a:avLst/>
+          </a:prstGeom>
+          <a:noFill/>
+        </p:spPr>
+        <p:txBody>
+          <a:bodyPr wrap="square" lIns="0" rIns="0" tIns="0" bIns="0" anchor="ctr">
+            <a:spAutoFit/>
+          </a:bodyPr>
+          <a:lstStyle/>
+          <a:p>
+            <a:r>
+              <a:rPr sz="1200" b="1">
+                <a:solidFill>
+                  <a:srgbClr val="222222"/>
+                </a:solidFill>
+                <a:latin typeface="Calibri"/>
+              </a:rPr>
+              <a:t>Cross-Mamba / BiMamba</a:t>
+            </a:r>
+          </a:p>
+        </p:txBody>
+      </p:sp>
+      <p:sp>
+        <p:nvSpPr>
+          <p:cNvPr id="38" name="TextBox 37"/>
+          <p:cNvSpPr txBox="1"/>
+          <p:nvPr/>
+        </p:nvSpPr>
+        <p:spPr>
+          <a:xfrm>
+            <a:off x="3990080" y="4420000"/>
+            <a:ext cx="1633480" cy="340000"/>
+          </a:xfrm>
+          <a:prstGeom prst="rect">
+            <a:avLst/>
+          </a:prstGeom>
+          <a:noFill/>
+        </p:spPr>
+        <p:txBody>
+          <a:bodyPr wrap="square" lIns="0" rIns="0" tIns="0" bIns="0" anchor="ctr">
+            <a:spAutoFit/>
+          </a:bodyPr>
+          <a:lstStyle/>
+          <a:p>
+            <a:r>
+              <a:rPr sz="1100" b="0">
+                <a:solidFill>
+                  <a:srgbClr val="555555"/>
+                </a:solidFill>
+                <a:latin typeface="Calibri"/>
+              </a:rPr>
+              <a:t>Fallback</a:t>
+            </a:r>
+          </a:p>
+        </p:txBody>
+      </p:sp>
+      <p:sp>
+        <p:nvSpPr>
+          <p:cNvPr id="39" name="Rectangle 38"/>
+          <p:cNvSpPr/>
+          <p:nvPr/>
+        </p:nvSpPr>
+        <p:spPr>
+          <a:xfrm>
+            <a:off x="640080" y="4760000"/>
+            <a:ext cx="4983480" cy="9144"/>
+          </a:xfrm>
+          <a:prstGeom prst="rect">
+            <a:avLst/>
+          </a:prstGeom>
+          <a:solidFill>
+            <a:srgbClr val="DDDDDD"/>
+          </a:solidFill>
+          <a:ln>
+            <a:noFill/>
+          </a:ln>
+          <a:effectLst/>
+        </p:spPr>
+        <p:style>
+          <a:lnRef idx="1">
+            <a:schemeClr val="accent1"/>
+          </a:lnRef>
+          <a:fillRef idx="3">
+            <a:schemeClr val="accent1"/>
+          </a:fillRef>
+          <a:effectRef idx="2">
+            <a:schemeClr val="accent1"/>
+          </a:effectRef>
+          <a:fontRef idx="minor">
+            <a:schemeClr val="lt1"/>
+          </a:fontRef>
+        </p:style>
+        <p:txBody>
+          <a:bodyPr rtlCol="0" anchor="ctr"/>
+          <a:lstStyle/>
+          <a:p>
+            <a:pPr algn="ctr"/>
+          </a:p>
+        </p:txBody>
+      </p:sp>
+      <p:sp>
+        <p:nvSpPr>
+          <p:cNvPr id="40" name="TextBox 39"/>
+          <p:cNvSpPr txBox="1"/>
+          <p:nvPr/>
+        </p:nvSpPr>
+        <p:spPr>
+          <a:xfrm>
+            <a:off x="640080" y="4760000"/>
+            <a:ext cx="3300000" cy="340000"/>
+          </a:xfrm>
+          <a:prstGeom prst="rect">
+            <a:avLst/>
+          </a:prstGeom>
+          <a:noFill/>
+        </p:spPr>
+        <p:txBody>
+          <a:bodyPr wrap="square" lIns="0" rIns="0" tIns="0" bIns="0" anchor="ctr">
+            <a:spAutoFit/>
+          </a:bodyPr>
+          <a:lstStyle/>
+          <a:p>
+            <a:r>
+              <a:rPr sz="1200" b="1">
+                <a:solidFill>
+                  <a:srgbClr val="222222"/>
+                </a:solidFill>
+                <a:latin typeface="Calibri"/>
+              </a:rPr>
+              <a:t>Mixture-of-experts fusion</a:t>
+            </a:r>
+          </a:p>
+        </p:txBody>
+      </p:sp>
+      <p:sp>
+        <p:nvSpPr>
+          <p:cNvPr id="41" name="TextBox 40"/>
+          <p:cNvSpPr txBox="1"/>
+          <p:nvPr/>
+        </p:nvSpPr>
+        <p:spPr>
+          <a:xfrm>
+            <a:off x="3990080" y="4760000"/>
+            <a:ext cx="1633480" cy="340000"/>
+          </a:xfrm>
+          <a:prstGeom prst="rect">
+            <a:avLst/>
+          </a:prstGeom>
+          <a:noFill/>
+        </p:spPr>
+        <p:txBody>
+          <a:bodyPr wrap="square" lIns="0" rIns="0" tIns="0" bIns="0" anchor="ctr">
+            <a:spAutoFit/>
+          </a:bodyPr>
+          <a:lstStyle/>
+          <a:p>
+            <a:r>
+              <a:rPr sz="1100" b="0">
+                <a:solidFill>
+                  <a:srgbClr val="555555"/>
+                </a:solidFill>
+                <a:latin typeface="Calibri"/>
+              </a:rPr>
+              <a:t>Fallback</a:t>
             </a:r>
           </a:p>
         </p:txBody>

--- a/Notes/Mina_Meeting_Slides_2026-09-23.pptx
+++ b/Notes/Mina_Meeting_Slides_2026-09-23.pptx
@@ -3911,7 +3911,7 @@
                 </a:solidFill>
                 <a:latin typeface="Calibri"/>
               </a:rPr>
-              <a:t>Codon-resolution resampling, if alignment turns out high</a:t>
+              <a:t>Codon-grid resampling so RNA and protein positions line up</a:t>
             </a:r>
           </a:p>
         </p:txBody>
@@ -4046,7 +4046,7 @@
                 </a:solidFill>
                 <a:latin typeface="Calibri"/>
               </a:rPr>
-              <a:t>Decide alignment per modality pair, not one method for all (Q3)</a:t>
+              <a:t>Decide alignment per modality pair, not one method for all (Q2)</a:t>
             </a:r>
           </a:p>
         </p:txBody>
@@ -4360,7 +4360,7 @@
                 </a:solidFill>
                 <a:latin typeface="Calibri"/>
               </a:rPr>
-              <a:t>Linear-cost, alignment-free fusion, primary candidate</a:t>
+              <a:t>Linear-cost fusion, no alignment loss, primary candidate</a:t>
             </a:r>
           </a:p>
         </p:txBody>
